--- a/idea.pptx
+++ b/idea.pptx
@@ -6,6 +6,7 @@
   </p:sldMasterIdLst>
   <p:sldIdLst>
     <p:sldId id="260" r:id="rId2"/>
+    <p:sldId id="261" r:id="rId3"/>
   </p:sldIdLst>
   <p:sldSz cx="12192000" cy="8658225"/>
   <p:notesSz cx="6858000" cy="9144000"/>
@@ -115,7 +116,7 @@
 <file path=ppt/revisionInfo.xml><?xml version="1.0" encoding="utf-8"?>
 <p1510:revInfo xmlns:a="http://schemas.openxmlformats.org/drawingml/2006/main" xmlns:r="http://schemas.openxmlformats.org/officeDocument/2006/relationships" xmlns:p1510="http://schemas.microsoft.com/office/powerpoint/2015/10/main">
   <p1510:revLst>
-    <p1510:client id="{D6CC9EDA-5790-40E7-B26A-1491EB203ABA}" v="2" dt="2023-09-11T00:25:06.414"/>
+    <p1510:client id="{D6CC9EDA-5790-40E7-B26A-1491EB203ABA}" v="15" dt="2023-10-12T07:40:45.265"/>
   </p1510:revLst>
 </p1510:revInfo>
 </file>
@@ -123,9 +124,41 @@
 <file path=ppt/changesInfos/changesInfo1.xml><?xml version="1.0" encoding="utf-8"?>
 <pc:chgInfo xmlns:a="http://schemas.openxmlformats.org/drawingml/2006/main" xmlns:r="http://schemas.openxmlformats.org/officeDocument/2006/relationships" xmlns:ac="http://schemas.microsoft.com/office/drawing/2013/main/command" xmlns:pc="http://schemas.microsoft.com/office/powerpoint/2013/main/command">
   <pc:docChgLst>
+    <pc:chgData name="승웅 하" userId="f9089b053ea938d5" providerId="LiveId" clId="{C0D21F4F-1AEF-4899-94CC-895553E32EE9}"/>
+    <pc:docChg chg="modSld">
+      <pc:chgData name="승웅 하" userId="f9089b053ea938d5" providerId="LiveId" clId="{C0D21F4F-1AEF-4899-94CC-895553E32EE9}" dt="2023-10-12T17:33:40.923" v="29" actId="20577"/>
+      <pc:docMkLst>
+        <pc:docMk/>
+      </pc:docMkLst>
+      <pc:sldChg chg="modSp mod">
+        <pc:chgData name="승웅 하" userId="f9089b053ea938d5" providerId="LiveId" clId="{C0D21F4F-1AEF-4899-94CC-895553E32EE9}" dt="2023-10-12T17:33:40.923" v="29" actId="20577"/>
+        <pc:sldMkLst>
+          <pc:docMk/>
+          <pc:sldMk cId="2372134658" sldId="261"/>
+        </pc:sldMkLst>
+        <pc:spChg chg="mod">
+          <ac:chgData name="승웅 하" userId="f9089b053ea938d5" providerId="LiveId" clId="{C0D21F4F-1AEF-4899-94CC-895553E32EE9}" dt="2023-10-12T17:33:40.923" v="29" actId="20577"/>
+          <ac:spMkLst>
+            <pc:docMk/>
+            <pc:sldMk cId="2372134658" sldId="261"/>
+            <ac:spMk id="5" creationId="{2EE2059A-EB8A-E7C0-778A-717EEAB39638}"/>
+          </ac:spMkLst>
+        </pc:spChg>
+        <pc:cxnChg chg="mod">
+          <ac:chgData name="승웅 하" userId="f9089b053ea938d5" providerId="LiveId" clId="{C0D21F4F-1AEF-4899-94CC-895553E32EE9}" dt="2023-10-12T16:32:50.714" v="2" actId="14100"/>
+          <ac:cxnSpMkLst>
+            <pc:docMk/>
+            <pc:sldMk cId="2372134658" sldId="261"/>
+            <ac:cxnSpMk id="135" creationId="{4CFCDE48-F384-3B97-A3DD-A2B4C648A970}"/>
+          </ac:cxnSpMkLst>
+        </pc:cxnChg>
+      </pc:sldChg>
+    </pc:docChg>
+  </pc:docChgLst>
+  <pc:docChgLst>
     <pc:chgData name="승웅 하" userId="f9089b053ea938d5" providerId="LiveId" clId="{D6CC9EDA-5790-40E7-B26A-1491EB203ABA}"/>
-    <pc:docChg chg="undo custSel delSld modSld">
-      <pc:chgData name="승웅 하" userId="f9089b053ea938d5" providerId="LiveId" clId="{D6CC9EDA-5790-40E7-B26A-1491EB203ABA}" dt="2023-09-11T00:25:06.414" v="5" actId="20577"/>
+    <pc:docChg chg="undo custSel addSld delSld modSld">
+      <pc:chgData name="승웅 하" userId="f9089b053ea938d5" providerId="LiveId" clId="{D6CC9EDA-5790-40E7-B26A-1491EB203ABA}" dt="2023-10-18T20:51:35.959" v="3746" actId="1076"/>
       <pc:docMkLst>
         <pc:docMk/>
       </pc:docMkLst>
@@ -184,6 +217,893 @@
           <ac:cxnSpMkLst>
             <pc:docMk/>
             <pc:sldMk cId="1990812192" sldId="260"/>
+            <ac:cxnSpMk id="143" creationId="{5EC68208-783D-6465-12A4-87045E369E2D}"/>
+          </ac:cxnSpMkLst>
+        </pc:cxnChg>
+      </pc:sldChg>
+      <pc:sldChg chg="addSp delSp modSp add mod">
+        <pc:chgData name="승웅 하" userId="f9089b053ea938d5" providerId="LiveId" clId="{D6CC9EDA-5790-40E7-B26A-1491EB203ABA}" dt="2023-10-18T20:51:35.959" v="3746" actId="1076"/>
+        <pc:sldMkLst>
+          <pc:docMk/>
+          <pc:sldMk cId="2372134658" sldId="261"/>
+        </pc:sldMkLst>
+        <pc:spChg chg="add mod">
+          <ac:chgData name="승웅 하" userId="f9089b053ea938d5" providerId="LiveId" clId="{D6CC9EDA-5790-40E7-B26A-1491EB203ABA}" dt="2023-10-12T06:54:23.483" v="1779" actId="1076"/>
+          <ac:spMkLst>
+            <pc:docMk/>
+            <pc:sldMk cId="2372134658" sldId="261"/>
+            <ac:spMk id="2" creationId="{6AADFA1C-F1BF-CF9A-E449-D7B7C1FFB2FF}"/>
+          </ac:spMkLst>
+        </pc:spChg>
+        <pc:spChg chg="del mod">
+          <ac:chgData name="승웅 하" userId="f9089b053ea938d5" providerId="LiveId" clId="{D6CC9EDA-5790-40E7-B26A-1491EB203ABA}" dt="2023-10-11T05:24:12.567" v="10" actId="478"/>
+          <ac:spMkLst>
+            <pc:docMk/>
+            <pc:sldMk cId="2372134658" sldId="261"/>
+            <ac:spMk id="2" creationId="{F1F0E058-F82B-E34D-C5FB-7B4EFDF64318}"/>
+          </ac:spMkLst>
+        </pc:spChg>
+        <pc:spChg chg="del">
+          <ac:chgData name="승웅 하" userId="f9089b053ea938d5" providerId="LiveId" clId="{D6CC9EDA-5790-40E7-B26A-1491EB203ABA}" dt="2023-10-11T05:24:26.548" v="22" actId="478"/>
+          <ac:spMkLst>
+            <pc:docMk/>
+            <pc:sldMk cId="2372134658" sldId="261"/>
+            <ac:spMk id="3" creationId="{67B18926-E707-C7B3-9D21-8BD64ACFBB68}"/>
+          </ac:spMkLst>
+        </pc:spChg>
+        <pc:spChg chg="add mod">
+          <ac:chgData name="승웅 하" userId="f9089b053ea938d5" providerId="LiveId" clId="{D6CC9EDA-5790-40E7-B26A-1491EB203ABA}" dt="2023-10-12T06:53:17.980" v="1745" actId="1076"/>
+          <ac:spMkLst>
+            <pc:docMk/>
+            <pc:sldMk cId="2372134658" sldId="261"/>
+            <ac:spMk id="3" creationId="{BFBA4F1F-FFB9-31FC-A312-2ECF9F523F0A}"/>
+          </ac:spMkLst>
+        </pc:spChg>
+        <pc:spChg chg="add mod">
+          <ac:chgData name="승웅 하" userId="f9089b053ea938d5" providerId="LiveId" clId="{D6CC9EDA-5790-40E7-B26A-1491EB203ABA}" dt="2023-10-12T06:53:17.980" v="1745" actId="1076"/>
+          <ac:spMkLst>
+            <pc:docMk/>
+            <pc:sldMk cId="2372134658" sldId="261"/>
+            <ac:spMk id="4" creationId="{1B3FD1AC-A3F0-FC52-9C97-CF67B7184E17}"/>
+          </ac:spMkLst>
+        </pc:spChg>
+        <pc:spChg chg="del">
+          <ac:chgData name="승웅 하" userId="f9089b053ea938d5" providerId="LiveId" clId="{D6CC9EDA-5790-40E7-B26A-1491EB203ABA}" dt="2023-10-11T05:24:14.697" v="13" actId="478"/>
+          <ac:spMkLst>
+            <pc:docMk/>
+            <pc:sldMk cId="2372134658" sldId="261"/>
+            <ac:spMk id="4" creationId="{5B0BE2E5-2209-7810-6B75-514596EDA79D}"/>
+          </ac:spMkLst>
+        </pc:spChg>
+        <pc:spChg chg="add mod">
+          <ac:chgData name="승웅 하" userId="f9089b053ea938d5" providerId="LiveId" clId="{D6CC9EDA-5790-40E7-B26A-1491EB203ABA}" dt="2023-10-18T20:51:35.959" v="3746" actId="1076"/>
+          <ac:spMkLst>
+            <pc:docMk/>
+            <pc:sldMk cId="2372134658" sldId="261"/>
+            <ac:spMk id="5" creationId="{2EE2059A-EB8A-E7C0-778A-717EEAB39638}"/>
+          </ac:spMkLst>
+        </pc:spChg>
+        <pc:spChg chg="del">
+          <ac:chgData name="승웅 하" userId="f9089b053ea938d5" providerId="LiveId" clId="{D6CC9EDA-5790-40E7-B26A-1491EB203ABA}" dt="2023-10-11T05:24:13.175" v="11" actId="478"/>
+          <ac:spMkLst>
+            <pc:docMk/>
+            <pc:sldMk cId="2372134658" sldId="261"/>
+            <ac:spMk id="5" creationId="{49CFCAFE-BA29-EE6D-A607-32A40AD01458}"/>
+          </ac:spMkLst>
+        </pc:spChg>
+        <pc:spChg chg="mod">
+          <ac:chgData name="승웅 하" userId="f9089b053ea938d5" providerId="LiveId" clId="{D6CC9EDA-5790-40E7-B26A-1491EB203ABA}" dt="2023-10-12T06:53:17.980" v="1745" actId="1076"/>
+          <ac:spMkLst>
+            <pc:docMk/>
+            <pc:sldMk cId="2372134658" sldId="261"/>
+            <ac:spMk id="6" creationId="{99BBB32C-FAA0-FFA6-F76E-704B253D57C6}"/>
+          </ac:spMkLst>
+        </pc:spChg>
+        <pc:spChg chg="mod">
+          <ac:chgData name="승웅 하" userId="f9089b053ea938d5" providerId="LiveId" clId="{D6CC9EDA-5790-40E7-B26A-1491EB203ABA}" dt="2023-10-12T06:53:17.980" v="1745" actId="1076"/>
+          <ac:spMkLst>
+            <pc:docMk/>
+            <pc:sldMk cId="2372134658" sldId="261"/>
+            <ac:spMk id="7" creationId="{FB6FD684-61B6-19B8-1A2D-BA84106DBA02}"/>
+          </ac:spMkLst>
+        </pc:spChg>
+        <pc:spChg chg="del">
+          <ac:chgData name="승웅 하" userId="f9089b053ea938d5" providerId="LiveId" clId="{D6CC9EDA-5790-40E7-B26A-1491EB203ABA}" dt="2023-10-11T05:24:25.303" v="21" actId="478"/>
+          <ac:spMkLst>
+            <pc:docMk/>
+            <pc:sldMk cId="2372134658" sldId="261"/>
+            <ac:spMk id="8" creationId="{0502D44D-883F-31DF-49FA-A23DF31EED60}"/>
+          </ac:spMkLst>
+        </pc:spChg>
+        <pc:spChg chg="add del mod">
+          <ac:chgData name="승웅 하" userId="f9089b053ea938d5" providerId="LiveId" clId="{D6CC9EDA-5790-40E7-B26A-1491EB203ABA}" dt="2023-10-12T06:48:21.226" v="1191" actId="478"/>
+          <ac:spMkLst>
+            <pc:docMk/>
+            <pc:sldMk cId="2372134658" sldId="261"/>
+            <ac:spMk id="8" creationId="{F68CF170-3A96-B792-12D3-4D9CDBBE54CA}"/>
+          </ac:spMkLst>
+        </pc:spChg>
+        <pc:spChg chg="add mod">
+          <ac:chgData name="승웅 하" userId="f9089b053ea938d5" providerId="LiveId" clId="{D6CC9EDA-5790-40E7-B26A-1491EB203ABA}" dt="2023-10-12T07:40:59.555" v="3465" actId="1076"/>
+          <ac:spMkLst>
+            <pc:docMk/>
+            <pc:sldMk cId="2372134658" sldId="261"/>
+            <ac:spMk id="9" creationId="{821780F4-7084-4E3F-2FCE-E938BA6FDBAD}"/>
+          </ac:spMkLst>
+        </pc:spChg>
+        <pc:spChg chg="add del mod">
+          <ac:chgData name="승웅 하" userId="f9089b053ea938d5" providerId="LiveId" clId="{D6CC9EDA-5790-40E7-B26A-1491EB203ABA}" dt="2023-10-12T06:47:16.151" v="989"/>
+          <ac:spMkLst>
+            <pc:docMk/>
+            <pc:sldMk cId="2372134658" sldId="261"/>
+            <ac:spMk id="10" creationId="{3EA03269-0DC6-A4BC-AA5F-C0B9B48386BA}"/>
+          </ac:spMkLst>
+        </pc:spChg>
+        <pc:spChg chg="add del mod">
+          <ac:chgData name="승웅 하" userId="f9089b053ea938d5" providerId="LiveId" clId="{D6CC9EDA-5790-40E7-B26A-1491EB203ABA}" dt="2023-10-12T06:50:10.257" v="1364"/>
+          <ac:spMkLst>
+            <pc:docMk/>
+            <pc:sldMk cId="2372134658" sldId="261"/>
+            <ac:spMk id="11" creationId="{AC2F967F-342C-BA93-7588-897AC520A4E0}"/>
+          </ac:spMkLst>
+        </pc:spChg>
+        <pc:spChg chg="del">
+          <ac:chgData name="승웅 하" userId="f9089b053ea938d5" providerId="LiveId" clId="{D6CC9EDA-5790-40E7-B26A-1491EB203ABA}" dt="2023-10-11T05:24:20.396" v="17" actId="478"/>
+          <ac:spMkLst>
+            <pc:docMk/>
+            <pc:sldMk cId="2372134658" sldId="261"/>
+            <ac:spMk id="12" creationId="{8FF866AB-3168-CB39-8299-36791F0504FB}"/>
+          </ac:spMkLst>
+        </pc:spChg>
+        <pc:spChg chg="add del mod">
+          <ac:chgData name="승웅 하" userId="f9089b053ea938d5" providerId="LiveId" clId="{D6CC9EDA-5790-40E7-B26A-1491EB203ABA}" dt="2023-10-12T06:53:26.949" v="1749"/>
+          <ac:spMkLst>
+            <pc:docMk/>
+            <pc:sldMk cId="2372134658" sldId="261"/>
+            <ac:spMk id="13" creationId="{042028EA-54D1-C4E2-B543-421AD9BC7025}"/>
+          </ac:spMkLst>
+        </pc:spChg>
+        <pc:spChg chg="del">
+          <ac:chgData name="승웅 하" userId="f9089b053ea938d5" providerId="LiveId" clId="{D6CC9EDA-5790-40E7-B26A-1491EB203ABA}" dt="2023-10-11T05:24:23.825" v="20" actId="478"/>
+          <ac:spMkLst>
+            <pc:docMk/>
+            <pc:sldMk cId="2372134658" sldId="261"/>
+            <ac:spMk id="14" creationId="{48AAEF07-5368-99E5-4B6A-219FFEB0CC39}"/>
+          </ac:spMkLst>
+        </pc:spChg>
+        <pc:spChg chg="add mod">
+          <ac:chgData name="승웅 하" userId="f9089b053ea938d5" providerId="LiveId" clId="{D6CC9EDA-5790-40E7-B26A-1491EB203ABA}" dt="2023-10-12T06:54:19.767" v="1777" actId="1035"/>
+          <ac:spMkLst>
+            <pc:docMk/>
+            <pc:sldMk cId="2372134658" sldId="261"/>
+            <ac:spMk id="14" creationId="{4BC26F2F-2045-BA4C-2659-4611ECEC08D0}"/>
+          </ac:spMkLst>
+        </pc:spChg>
+        <pc:spChg chg="del">
+          <ac:chgData name="승웅 하" userId="f9089b053ea938d5" providerId="LiveId" clId="{D6CC9EDA-5790-40E7-B26A-1491EB203ABA}" dt="2023-10-11T05:24:16.966" v="14" actId="478"/>
+          <ac:spMkLst>
+            <pc:docMk/>
+            <pc:sldMk cId="2372134658" sldId="261"/>
+            <ac:spMk id="15" creationId="{5F29A7C5-D7F7-F4ED-24C4-30A2F1B1BEE8}"/>
+          </ac:spMkLst>
+        </pc:spChg>
+        <pc:spChg chg="add mod">
+          <ac:chgData name="승웅 하" userId="f9089b053ea938d5" providerId="LiveId" clId="{D6CC9EDA-5790-40E7-B26A-1491EB203ABA}" dt="2023-10-12T06:54:19.767" v="1777" actId="1035"/>
+          <ac:spMkLst>
+            <pc:docMk/>
+            <pc:sldMk cId="2372134658" sldId="261"/>
+            <ac:spMk id="15" creationId="{F70974E3-A647-1B3D-201C-7B554A7BCD16}"/>
+          </ac:spMkLst>
+        </pc:spChg>
+        <pc:spChg chg="add mod">
+          <ac:chgData name="승웅 하" userId="f9089b053ea938d5" providerId="LiveId" clId="{D6CC9EDA-5790-40E7-B26A-1491EB203ABA}" dt="2023-10-12T06:54:19.767" v="1777" actId="1035"/>
+          <ac:spMkLst>
+            <pc:docMk/>
+            <pc:sldMk cId="2372134658" sldId="261"/>
+            <ac:spMk id="16" creationId="{34A32A85-FF2F-A7DA-28FF-37966FB6E43D}"/>
+          </ac:spMkLst>
+        </pc:spChg>
+        <pc:spChg chg="del">
+          <ac:chgData name="승웅 하" userId="f9089b053ea938d5" providerId="LiveId" clId="{D6CC9EDA-5790-40E7-B26A-1491EB203ABA}" dt="2023-10-11T05:24:28.595" v="23" actId="478"/>
+          <ac:spMkLst>
+            <pc:docMk/>
+            <pc:sldMk cId="2372134658" sldId="261"/>
+            <ac:spMk id="16" creationId="{9279279C-1F46-7538-D766-5695E3472556}"/>
+          </ac:spMkLst>
+        </pc:spChg>
+        <pc:spChg chg="add mod">
+          <ac:chgData name="승웅 하" userId="f9089b053ea938d5" providerId="LiveId" clId="{D6CC9EDA-5790-40E7-B26A-1491EB203ABA}" dt="2023-10-12T06:54:19.767" v="1777" actId="1035"/>
+          <ac:spMkLst>
+            <pc:docMk/>
+            <pc:sldMk cId="2372134658" sldId="261"/>
+            <ac:spMk id="17" creationId="{29692975-696E-A7AF-717E-F4874D438E12}"/>
+          </ac:spMkLst>
+        </pc:spChg>
+        <pc:spChg chg="del">
+          <ac:chgData name="승웅 하" userId="f9089b053ea938d5" providerId="LiveId" clId="{D6CC9EDA-5790-40E7-B26A-1491EB203ABA}" dt="2023-10-11T05:24:11.690" v="8" actId="478"/>
+          <ac:spMkLst>
+            <pc:docMk/>
+            <pc:sldMk cId="2372134658" sldId="261"/>
+            <ac:spMk id="18" creationId="{C8E65061-B732-AFD3-3490-3FD7B05E9632}"/>
+          </ac:spMkLst>
+        </pc:spChg>
+        <pc:spChg chg="add mod">
+          <ac:chgData name="승웅 하" userId="f9089b053ea938d5" providerId="LiveId" clId="{D6CC9EDA-5790-40E7-B26A-1491EB203ABA}" dt="2023-10-12T07:41:10.900" v="3466" actId="1076"/>
+          <ac:spMkLst>
+            <pc:docMk/>
+            <pc:sldMk cId="2372134658" sldId="261"/>
+            <ac:spMk id="18" creationId="{D1539F89-489A-5D91-494A-892C3DA18AAE}"/>
+          </ac:spMkLst>
+        </pc:spChg>
+        <pc:spChg chg="del">
+          <ac:chgData name="승웅 하" userId="f9089b053ea938d5" providerId="LiveId" clId="{D6CC9EDA-5790-40E7-B26A-1491EB203ABA}" dt="2023-10-11T05:24:14.005" v="12" actId="478"/>
+          <ac:spMkLst>
+            <pc:docMk/>
+            <pc:sldMk cId="2372134658" sldId="261"/>
+            <ac:spMk id="20" creationId="{26B90303-0B53-18BE-E9A4-3B1E74C650AA}"/>
+          </ac:spMkLst>
+        </pc:spChg>
+        <pc:spChg chg="del">
+          <ac:chgData name="승웅 하" userId="f9089b053ea938d5" providerId="LiveId" clId="{D6CC9EDA-5790-40E7-B26A-1491EB203ABA}" dt="2023-10-11T05:24:11.012" v="7" actId="478"/>
+          <ac:spMkLst>
+            <pc:docMk/>
+            <pc:sldMk cId="2372134658" sldId="261"/>
+            <ac:spMk id="23" creationId="{78E7B0FE-ACC1-4FF7-1B92-CFFA46B70BAE}"/>
+          </ac:spMkLst>
+        </pc:spChg>
+        <pc:spChg chg="del">
+          <ac:chgData name="승웅 하" userId="f9089b053ea938d5" providerId="LiveId" clId="{D6CC9EDA-5790-40E7-B26A-1491EB203ABA}" dt="2023-10-11T05:24:29.934" v="24" actId="478"/>
+          <ac:spMkLst>
+            <pc:docMk/>
+            <pc:sldMk cId="2372134658" sldId="261"/>
+            <ac:spMk id="32" creationId="{2CC106AD-8E4B-C6AB-F2FD-11ADBC88A3F8}"/>
+          </ac:spMkLst>
+        </pc:spChg>
+        <pc:spChg chg="del">
+          <ac:chgData name="승웅 하" userId="f9089b053ea938d5" providerId="LiveId" clId="{D6CC9EDA-5790-40E7-B26A-1491EB203ABA}" dt="2023-10-11T05:24:29.934" v="24" actId="478"/>
+          <ac:spMkLst>
+            <pc:docMk/>
+            <pc:sldMk cId="2372134658" sldId="261"/>
+            <ac:spMk id="34" creationId="{7DB8FDAA-2CCA-D87A-AE18-B97981975AB4}"/>
+          </ac:spMkLst>
+        </pc:spChg>
+        <pc:spChg chg="del">
+          <ac:chgData name="승웅 하" userId="f9089b053ea938d5" providerId="LiveId" clId="{D6CC9EDA-5790-40E7-B26A-1491EB203ABA}" dt="2023-10-11T05:24:29.934" v="24" actId="478"/>
+          <ac:spMkLst>
+            <pc:docMk/>
+            <pc:sldMk cId="2372134658" sldId="261"/>
+            <ac:spMk id="36" creationId="{CDAC8E9E-A981-F9E4-EBC5-868592029E9A}"/>
+          </ac:spMkLst>
+        </pc:spChg>
+        <pc:spChg chg="del">
+          <ac:chgData name="승웅 하" userId="f9089b053ea938d5" providerId="LiveId" clId="{D6CC9EDA-5790-40E7-B26A-1491EB203ABA}" dt="2023-10-11T05:24:19.333" v="16" actId="478"/>
+          <ac:spMkLst>
+            <pc:docMk/>
+            <pc:sldMk cId="2372134658" sldId="261"/>
+            <ac:spMk id="37" creationId="{8DACC5D2-4498-2296-7B06-8EDBFC700014}"/>
+          </ac:spMkLst>
+        </pc:spChg>
+        <pc:spChg chg="mod">
+          <ac:chgData name="승웅 하" userId="f9089b053ea938d5" providerId="LiveId" clId="{D6CC9EDA-5790-40E7-B26A-1491EB203ABA}" dt="2023-10-12T06:53:17.980" v="1745" actId="1076"/>
+          <ac:spMkLst>
+            <pc:docMk/>
+            <pc:sldMk cId="2372134658" sldId="261"/>
+            <ac:spMk id="47" creationId="{E9D017B4-B5D3-A1CC-1322-D60ACB11D32E}"/>
+          </ac:spMkLst>
+        </pc:spChg>
+        <pc:spChg chg="mod">
+          <ac:chgData name="승웅 하" userId="f9089b053ea938d5" providerId="LiveId" clId="{D6CC9EDA-5790-40E7-B26A-1491EB203ABA}" dt="2023-10-12T06:53:17.980" v="1745" actId="1076"/>
+          <ac:spMkLst>
+            <pc:docMk/>
+            <pc:sldMk cId="2372134658" sldId="261"/>
+            <ac:spMk id="48" creationId="{E0868C25-DEF0-DE3F-8413-2EC1BA00B86B}"/>
+          </ac:spMkLst>
+        </pc:spChg>
+        <pc:spChg chg="mod">
+          <ac:chgData name="승웅 하" userId="f9089b053ea938d5" providerId="LiveId" clId="{D6CC9EDA-5790-40E7-B26A-1491EB203ABA}" dt="2023-10-12T06:53:17.980" v="1745" actId="1076"/>
+          <ac:spMkLst>
+            <pc:docMk/>
+            <pc:sldMk cId="2372134658" sldId="261"/>
+            <ac:spMk id="75" creationId="{16890CCC-3AB1-6DB2-3457-C9E0D1B0E43B}"/>
+          </ac:spMkLst>
+        </pc:spChg>
+        <pc:spChg chg="mod">
+          <ac:chgData name="승웅 하" userId="f9089b053ea938d5" providerId="LiveId" clId="{D6CC9EDA-5790-40E7-B26A-1491EB203ABA}" dt="2023-10-12T06:53:32.918" v="1751" actId="1076"/>
+          <ac:spMkLst>
+            <pc:docMk/>
+            <pc:sldMk cId="2372134658" sldId="261"/>
+            <ac:spMk id="76" creationId="{4BEB773B-F752-4DA3-5707-5D5D8142632D}"/>
+          </ac:spMkLst>
+        </pc:spChg>
+        <pc:spChg chg="mod">
+          <ac:chgData name="승웅 하" userId="f9089b053ea938d5" providerId="LiveId" clId="{D6CC9EDA-5790-40E7-B26A-1491EB203ABA}" dt="2023-10-12T06:53:38.809" v="1754" actId="1076"/>
+          <ac:spMkLst>
+            <pc:docMk/>
+            <pc:sldMk cId="2372134658" sldId="261"/>
+            <ac:spMk id="77" creationId="{5DE36840-14B2-68F9-E41A-037C7D4E99DF}"/>
+          </ac:spMkLst>
+        </pc:spChg>
+        <pc:spChg chg="mod">
+          <ac:chgData name="승웅 하" userId="f9089b053ea938d5" providerId="LiveId" clId="{D6CC9EDA-5790-40E7-B26A-1491EB203ABA}" dt="2023-10-12T06:53:17.980" v="1745" actId="1076"/>
+          <ac:spMkLst>
+            <pc:docMk/>
+            <pc:sldMk cId="2372134658" sldId="261"/>
+            <ac:spMk id="78" creationId="{2922B32E-08E3-5D62-E62C-98BA09B71B4F}"/>
+          </ac:spMkLst>
+        </pc:spChg>
+        <pc:spChg chg="mod">
+          <ac:chgData name="승웅 하" userId="f9089b053ea938d5" providerId="LiveId" clId="{D6CC9EDA-5790-40E7-B26A-1491EB203ABA}" dt="2023-10-12T06:53:17.980" v="1745" actId="1076"/>
+          <ac:spMkLst>
+            <pc:docMk/>
+            <pc:sldMk cId="2372134658" sldId="261"/>
+            <ac:spMk id="79" creationId="{9C766AC5-A925-657F-9E5E-4DE29D7D67D9}"/>
+          </ac:spMkLst>
+        </pc:spChg>
+        <pc:spChg chg="mod">
+          <ac:chgData name="승웅 하" userId="f9089b053ea938d5" providerId="LiveId" clId="{D6CC9EDA-5790-40E7-B26A-1491EB203ABA}" dt="2023-10-12T06:53:17.980" v="1745" actId="1076"/>
+          <ac:spMkLst>
+            <pc:docMk/>
+            <pc:sldMk cId="2372134658" sldId="261"/>
+            <ac:spMk id="80" creationId="{DFDA8351-6E26-B839-6636-43B2B5054681}"/>
+          </ac:spMkLst>
+        </pc:spChg>
+        <pc:spChg chg="mod">
+          <ac:chgData name="승웅 하" userId="f9089b053ea938d5" providerId="LiveId" clId="{D6CC9EDA-5790-40E7-B26A-1491EB203ABA}" dt="2023-10-12T06:53:17.980" v="1745" actId="1076"/>
+          <ac:spMkLst>
+            <pc:docMk/>
+            <pc:sldMk cId="2372134658" sldId="261"/>
+            <ac:spMk id="81" creationId="{DF067161-C688-11E0-5A1A-14F3D07E79DD}"/>
+          </ac:spMkLst>
+        </pc:spChg>
+        <pc:spChg chg="mod">
+          <ac:chgData name="승웅 하" userId="f9089b053ea938d5" providerId="LiveId" clId="{D6CC9EDA-5790-40E7-B26A-1491EB203ABA}" dt="2023-10-12T06:53:17.980" v="1745" actId="1076"/>
+          <ac:spMkLst>
+            <pc:docMk/>
+            <pc:sldMk cId="2372134658" sldId="261"/>
+            <ac:spMk id="82" creationId="{2EC7A63D-A0AD-9A22-311C-863F037B0CD2}"/>
+          </ac:spMkLst>
+        </pc:spChg>
+        <pc:spChg chg="mod">
+          <ac:chgData name="승웅 하" userId="f9089b053ea938d5" providerId="LiveId" clId="{D6CC9EDA-5790-40E7-B26A-1491EB203ABA}" dt="2023-10-12T06:53:17.980" v="1745" actId="1076"/>
+          <ac:spMkLst>
+            <pc:docMk/>
+            <pc:sldMk cId="2372134658" sldId="261"/>
+            <ac:spMk id="83" creationId="{43C2D2FD-C030-8077-C94D-974B0CC1CB2B}"/>
+          </ac:spMkLst>
+        </pc:spChg>
+        <pc:spChg chg="mod">
+          <ac:chgData name="승웅 하" userId="f9089b053ea938d5" providerId="LiveId" clId="{D6CC9EDA-5790-40E7-B26A-1491EB203ABA}" dt="2023-10-12T06:53:17.980" v="1745" actId="1076"/>
+          <ac:spMkLst>
+            <pc:docMk/>
+            <pc:sldMk cId="2372134658" sldId="261"/>
+            <ac:spMk id="84" creationId="{44E36D5A-E280-E2B8-C6C2-E9A158132F87}"/>
+          </ac:spMkLst>
+        </pc:spChg>
+        <pc:spChg chg="mod">
+          <ac:chgData name="승웅 하" userId="f9089b053ea938d5" providerId="LiveId" clId="{D6CC9EDA-5790-40E7-B26A-1491EB203ABA}" dt="2023-10-12T06:53:17.980" v="1745" actId="1076"/>
+          <ac:spMkLst>
+            <pc:docMk/>
+            <pc:sldMk cId="2372134658" sldId="261"/>
+            <ac:spMk id="90" creationId="{FE1EE431-359E-76D7-9F58-AD1113D7CE0C}"/>
+          </ac:spMkLst>
+        </pc:spChg>
+        <pc:spChg chg="mod">
+          <ac:chgData name="승웅 하" userId="f9089b053ea938d5" providerId="LiveId" clId="{D6CC9EDA-5790-40E7-B26A-1491EB203ABA}" dt="2023-10-12T06:53:17.980" v="1745" actId="1076"/>
+          <ac:spMkLst>
+            <pc:docMk/>
+            <pc:sldMk cId="2372134658" sldId="261"/>
+            <ac:spMk id="95" creationId="{0F7DF099-5E39-E413-2108-539156D89C15}"/>
+          </ac:spMkLst>
+        </pc:spChg>
+        <pc:spChg chg="mod">
+          <ac:chgData name="승웅 하" userId="f9089b053ea938d5" providerId="LiveId" clId="{D6CC9EDA-5790-40E7-B26A-1491EB203ABA}" dt="2023-10-12T06:53:17.980" v="1745" actId="1076"/>
+          <ac:spMkLst>
+            <pc:docMk/>
+            <pc:sldMk cId="2372134658" sldId="261"/>
+            <ac:spMk id="96" creationId="{DF9745F7-A092-D569-EFC6-D7CBDF4B8BA6}"/>
+          </ac:spMkLst>
+        </pc:spChg>
+        <pc:spChg chg="mod">
+          <ac:chgData name="승웅 하" userId="f9089b053ea938d5" providerId="LiveId" clId="{D6CC9EDA-5790-40E7-B26A-1491EB203ABA}" dt="2023-10-12T06:53:17.980" v="1745" actId="1076"/>
+          <ac:spMkLst>
+            <pc:docMk/>
+            <pc:sldMk cId="2372134658" sldId="261"/>
+            <ac:spMk id="97" creationId="{983666E1-8203-72BB-A623-2D3606699A31}"/>
+          </ac:spMkLst>
+        </pc:spChg>
+        <pc:spChg chg="mod">
+          <ac:chgData name="승웅 하" userId="f9089b053ea938d5" providerId="LiveId" clId="{D6CC9EDA-5790-40E7-B26A-1491EB203ABA}" dt="2023-10-12T06:53:17.980" v="1745" actId="1076"/>
+          <ac:spMkLst>
+            <pc:docMk/>
+            <pc:sldMk cId="2372134658" sldId="261"/>
+            <ac:spMk id="98" creationId="{02426819-7CF5-4A99-E5EB-2C7CB7C55EAC}"/>
+          </ac:spMkLst>
+        </pc:spChg>
+        <pc:spChg chg="mod">
+          <ac:chgData name="승웅 하" userId="f9089b053ea938d5" providerId="LiveId" clId="{D6CC9EDA-5790-40E7-B26A-1491EB203ABA}" dt="2023-10-12T06:53:17.980" v="1745" actId="1076"/>
+          <ac:spMkLst>
+            <pc:docMk/>
+            <pc:sldMk cId="2372134658" sldId="261"/>
+            <ac:spMk id="99" creationId="{15D7EE0B-BB43-BF00-83B1-17B20927F1DF}"/>
+          </ac:spMkLst>
+        </pc:spChg>
+        <pc:spChg chg="mod">
+          <ac:chgData name="승웅 하" userId="f9089b053ea938d5" providerId="LiveId" clId="{D6CC9EDA-5790-40E7-B26A-1491EB203ABA}" dt="2023-10-12T06:53:17.980" v="1745" actId="1076"/>
+          <ac:spMkLst>
+            <pc:docMk/>
+            <pc:sldMk cId="2372134658" sldId="261"/>
+            <ac:spMk id="100" creationId="{1F0EFEB7-511B-E5C8-3104-D94ABE058DAF}"/>
+          </ac:spMkLst>
+        </pc:spChg>
+        <pc:spChg chg="mod">
+          <ac:chgData name="승웅 하" userId="f9089b053ea938d5" providerId="LiveId" clId="{D6CC9EDA-5790-40E7-B26A-1491EB203ABA}" dt="2023-10-12T06:53:17.980" v="1745" actId="1076"/>
+          <ac:spMkLst>
+            <pc:docMk/>
+            <pc:sldMk cId="2372134658" sldId="261"/>
+            <ac:spMk id="101" creationId="{1994EB39-E5CF-1990-3D9F-B1565F824A70}"/>
+          </ac:spMkLst>
+        </pc:spChg>
+        <pc:spChg chg="mod">
+          <ac:chgData name="승웅 하" userId="f9089b053ea938d5" providerId="LiveId" clId="{D6CC9EDA-5790-40E7-B26A-1491EB203ABA}" dt="2023-10-12T06:53:17.980" v="1745" actId="1076"/>
+          <ac:spMkLst>
+            <pc:docMk/>
+            <pc:sldMk cId="2372134658" sldId="261"/>
+            <ac:spMk id="102" creationId="{4C53AF7C-9572-B94B-AA5C-4301D96D251E}"/>
+          </ac:spMkLst>
+        </pc:spChg>
+        <pc:spChg chg="mod">
+          <ac:chgData name="승웅 하" userId="f9089b053ea938d5" providerId="LiveId" clId="{D6CC9EDA-5790-40E7-B26A-1491EB203ABA}" dt="2023-10-12T06:53:17.980" v="1745" actId="1076"/>
+          <ac:spMkLst>
+            <pc:docMk/>
+            <pc:sldMk cId="2372134658" sldId="261"/>
+            <ac:spMk id="103" creationId="{49C78B53-8A57-B8FB-529F-84FC8B86BF59}"/>
+          </ac:spMkLst>
+        </pc:spChg>
+        <pc:spChg chg="mod">
+          <ac:chgData name="승웅 하" userId="f9089b053ea938d5" providerId="LiveId" clId="{D6CC9EDA-5790-40E7-B26A-1491EB203ABA}" dt="2023-10-12T06:53:17.980" v="1745" actId="1076"/>
+          <ac:spMkLst>
+            <pc:docMk/>
+            <pc:sldMk cId="2372134658" sldId="261"/>
+            <ac:spMk id="104" creationId="{1875E357-5939-89F6-66B4-C06380823EC2}"/>
+          </ac:spMkLst>
+        </pc:spChg>
+        <pc:spChg chg="mod">
+          <ac:chgData name="승웅 하" userId="f9089b053ea938d5" providerId="LiveId" clId="{D6CC9EDA-5790-40E7-B26A-1491EB203ABA}" dt="2023-10-12T06:53:17.980" v="1745" actId="1076"/>
+          <ac:spMkLst>
+            <pc:docMk/>
+            <pc:sldMk cId="2372134658" sldId="261"/>
+            <ac:spMk id="105" creationId="{1352283C-5504-C55D-2D7B-5EA23FED53B0}"/>
+          </ac:spMkLst>
+        </pc:spChg>
+        <pc:spChg chg="mod">
+          <ac:chgData name="승웅 하" userId="f9089b053ea938d5" providerId="LiveId" clId="{D6CC9EDA-5790-40E7-B26A-1491EB203ABA}" dt="2023-10-12T06:53:17.980" v="1745" actId="1076"/>
+          <ac:spMkLst>
+            <pc:docMk/>
+            <pc:sldMk cId="2372134658" sldId="261"/>
+            <ac:spMk id="106" creationId="{5B81EA6F-5D4F-8382-3602-AA4DD35D7725}"/>
+          </ac:spMkLst>
+        </pc:spChg>
+        <pc:spChg chg="mod">
+          <ac:chgData name="승웅 하" userId="f9089b053ea938d5" providerId="LiveId" clId="{D6CC9EDA-5790-40E7-B26A-1491EB203ABA}" dt="2023-10-12T06:53:17.980" v="1745" actId="1076"/>
+          <ac:spMkLst>
+            <pc:docMk/>
+            <pc:sldMk cId="2372134658" sldId="261"/>
+            <ac:spMk id="107" creationId="{DF61B449-C519-2142-F552-3C068E60D1D3}"/>
+          </ac:spMkLst>
+        </pc:spChg>
+        <pc:spChg chg="mod">
+          <ac:chgData name="승웅 하" userId="f9089b053ea938d5" providerId="LiveId" clId="{D6CC9EDA-5790-40E7-B26A-1491EB203ABA}" dt="2023-10-12T06:53:17.980" v="1745" actId="1076"/>
+          <ac:spMkLst>
+            <pc:docMk/>
+            <pc:sldMk cId="2372134658" sldId="261"/>
+            <ac:spMk id="108" creationId="{B8371761-6E8D-3EF9-3046-BE268FB90822}"/>
+          </ac:spMkLst>
+        </pc:spChg>
+        <pc:spChg chg="mod">
+          <ac:chgData name="승웅 하" userId="f9089b053ea938d5" providerId="LiveId" clId="{D6CC9EDA-5790-40E7-B26A-1491EB203ABA}" dt="2023-10-12T06:53:17.980" v="1745" actId="1076"/>
+          <ac:spMkLst>
+            <pc:docMk/>
+            <pc:sldMk cId="2372134658" sldId="261"/>
+            <ac:spMk id="109" creationId="{7B13077B-521A-9486-586B-C3553006ED4F}"/>
+          </ac:spMkLst>
+        </pc:spChg>
+        <pc:spChg chg="mod">
+          <ac:chgData name="승웅 하" userId="f9089b053ea938d5" providerId="LiveId" clId="{D6CC9EDA-5790-40E7-B26A-1491EB203ABA}" dt="2023-10-12T06:53:17.980" v="1745" actId="1076"/>
+          <ac:spMkLst>
+            <pc:docMk/>
+            <pc:sldMk cId="2372134658" sldId="261"/>
+            <ac:spMk id="114" creationId="{7142E4A9-CAF8-9F76-19FD-1C3B1575F6DA}"/>
+          </ac:spMkLst>
+        </pc:spChg>
+        <pc:spChg chg="mod">
+          <ac:chgData name="승웅 하" userId="f9089b053ea938d5" providerId="LiveId" clId="{D6CC9EDA-5790-40E7-B26A-1491EB203ABA}" dt="2023-10-12T06:54:19.767" v="1777" actId="1035"/>
+          <ac:spMkLst>
+            <pc:docMk/>
+            <pc:sldMk cId="2372134658" sldId="261"/>
+            <ac:spMk id="115" creationId="{0E132080-5691-9491-E4BE-FDFF3C067B9B}"/>
+          </ac:spMkLst>
+        </pc:spChg>
+        <pc:spChg chg="mod">
+          <ac:chgData name="승웅 하" userId="f9089b053ea938d5" providerId="LiveId" clId="{D6CC9EDA-5790-40E7-B26A-1491EB203ABA}" dt="2023-10-12T06:54:19.767" v="1777" actId="1035"/>
+          <ac:spMkLst>
+            <pc:docMk/>
+            <pc:sldMk cId="2372134658" sldId="261"/>
+            <ac:spMk id="116" creationId="{A6F7D513-7E8C-3DD0-EDDF-4090E4852DF0}"/>
+          </ac:spMkLst>
+        </pc:spChg>
+        <pc:spChg chg="mod">
+          <ac:chgData name="승웅 하" userId="f9089b053ea938d5" providerId="LiveId" clId="{D6CC9EDA-5790-40E7-B26A-1491EB203ABA}" dt="2023-10-12T06:54:19.767" v="1777" actId="1035"/>
+          <ac:spMkLst>
+            <pc:docMk/>
+            <pc:sldMk cId="2372134658" sldId="261"/>
+            <ac:spMk id="117" creationId="{847185A3-9CB1-4CA8-CD1D-8765E0486689}"/>
+          </ac:spMkLst>
+        </pc:spChg>
+        <pc:spChg chg="mod">
+          <ac:chgData name="승웅 하" userId="f9089b053ea938d5" providerId="LiveId" clId="{D6CC9EDA-5790-40E7-B26A-1491EB203ABA}" dt="2023-10-12T06:54:19.767" v="1777" actId="1035"/>
+          <ac:spMkLst>
+            <pc:docMk/>
+            <pc:sldMk cId="2372134658" sldId="261"/>
+            <ac:spMk id="118" creationId="{E25F6966-8A19-EFD6-A235-BEAB40666E23}"/>
+          </ac:spMkLst>
+        </pc:spChg>
+        <pc:spChg chg="mod">
+          <ac:chgData name="승웅 하" userId="f9089b053ea938d5" providerId="LiveId" clId="{D6CC9EDA-5790-40E7-B26A-1491EB203ABA}" dt="2023-10-12T06:54:19.767" v="1777" actId="1035"/>
+          <ac:spMkLst>
+            <pc:docMk/>
+            <pc:sldMk cId="2372134658" sldId="261"/>
+            <ac:spMk id="119" creationId="{AD8FF88E-1C7D-0F9F-5DF0-45E902227CBB}"/>
+          </ac:spMkLst>
+        </pc:spChg>
+        <pc:spChg chg="mod">
+          <ac:chgData name="승웅 하" userId="f9089b053ea938d5" providerId="LiveId" clId="{D6CC9EDA-5790-40E7-B26A-1491EB203ABA}" dt="2023-10-12T06:54:19.767" v="1777" actId="1035"/>
+          <ac:spMkLst>
+            <pc:docMk/>
+            <pc:sldMk cId="2372134658" sldId="261"/>
+            <ac:spMk id="120" creationId="{FC340BD2-7A10-98F4-FB4C-CB37E2F893E9}"/>
+          </ac:spMkLst>
+        </pc:spChg>
+        <pc:spChg chg="mod">
+          <ac:chgData name="승웅 하" userId="f9089b053ea938d5" providerId="LiveId" clId="{D6CC9EDA-5790-40E7-B26A-1491EB203ABA}" dt="2023-10-12T06:54:19.767" v="1777" actId="1035"/>
+          <ac:spMkLst>
+            <pc:docMk/>
+            <pc:sldMk cId="2372134658" sldId="261"/>
+            <ac:spMk id="121" creationId="{4D989561-528A-C8B2-3AFE-2CA2A681D9D8}"/>
+          </ac:spMkLst>
+        </pc:spChg>
+        <pc:spChg chg="mod">
+          <ac:chgData name="승웅 하" userId="f9089b053ea938d5" providerId="LiveId" clId="{D6CC9EDA-5790-40E7-B26A-1491EB203ABA}" dt="2023-10-12T06:54:19.767" v="1777" actId="1035"/>
+          <ac:spMkLst>
+            <pc:docMk/>
+            <pc:sldMk cId="2372134658" sldId="261"/>
+            <ac:spMk id="122" creationId="{AA94FE50-9B9B-26DB-392F-BE25C4592834}"/>
+          </ac:spMkLst>
+        </pc:spChg>
+        <pc:spChg chg="del">
+          <ac:chgData name="승웅 하" userId="f9089b053ea938d5" providerId="LiveId" clId="{D6CC9EDA-5790-40E7-B26A-1491EB203ABA}" dt="2023-10-12T05:48:56.448" v="26" actId="478"/>
+          <ac:spMkLst>
+            <pc:docMk/>
+            <pc:sldMk cId="2372134658" sldId="261"/>
+            <ac:spMk id="123" creationId="{DAAD8297-B26C-654B-6029-2A2F75FDA7BD}"/>
+          </ac:spMkLst>
+        </pc:spChg>
+        <pc:spChg chg="del">
+          <ac:chgData name="승웅 하" userId="f9089b053ea938d5" providerId="LiveId" clId="{D6CC9EDA-5790-40E7-B26A-1491EB203ABA}" dt="2023-10-12T05:48:56.448" v="26" actId="478"/>
+          <ac:spMkLst>
+            <pc:docMk/>
+            <pc:sldMk cId="2372134658" sldId="261"/>
+            <ac:spMk id="124" creationId="{45988FC3-BCF8-727D-C288-334C5B309845}"/>
+          </ac:spMkLst>
+        </pc:spChg>
+        <pc:spChg chg="del">
+          <ac:chgData name="승웅 하" userId="f9089b053ea938d5" providerId="LiveId" clId="{D6CC9EDA-5790-40E7-B26A-1491EB203ABA}" dt="2023-10-12T05:48:56.448" v="26" actId="478"/>
+          <ac:spMkLst>
+            <pc:docMk/>
+            <pc:sldMk cId="2372134658" sldId="261"/>
+            <ac:spMk id="125" creationId="{94D0CF41-1378-B694-054D-411DC43550D0}"/>
+          </ac:spMkLst>
+        </pc:spChg>
+        <pc:spChg chg="del">
+          <ac:chgData name="승웅 하" userId="f9089b053ea938d5" providerId="LiveId" clId="{D6CC9EDA-5790-40E7-B26A-1491EB203ABA}" dt="2023-10-12T05:48:56.448" v="26" actId="478"/>
+          <ac:spMkLst>
+            <pc:docMk/>
+            <pc:sldMk cId="2372134658" sldId="261"/>
+            <ac:spMk id="126" creationId="{842E185E-56EA-A3C8-CAB0-5979DA6C839C}"/>
+          </ac:spMkLst>
+        </pc:spChg>
+        <pc:spChg chg="del">
+          <ac:chgData name="승웅 하" userId="f9089b053ea938d5" providerId="LiveId" clId="{D6CC9EDA-5790-40E7-B26A-1491EB203ABA}" dt="2023-10-12T05:48:56.448" v="26" actId="478"/>
+          <ac:spMkLst>
+            <pc:docMk/>
+            <pc:sldMk cId="2372134658" sldId="261"/>
+            <ac:spMk id="128" creationId="{5AE5C3DB-4F20-CED6-8418-053BF5571CAE}"/>
+          </ac:spMkLst>
+        </pc:spChg>
+        <pc:spChg chg="del">
+          <ac:chgData name="승웅 하" userId="f9089b053ea938d5" providerId="LiveId" clId="{D6CC9EDA-5790-40E7-B26A-1491EB203ABA}" dt="2023-10-12T05:48:54.710" v="25" actId="478"/>
+          <ac:spMkLst>
+            <pc:docMk/>
+            <pc:sldMk cId="2372134658" sldId="261"/>
+            <ac:spMk id="129" creationId="{B9512AE7-3D76-72C3-DD31-6114A516A5A7}"/>
+          </ac:spMkLst>
+        </pc:spChg>
+        <pc:spChg chg="mod">
+          <ac:chgData name="승웅 하" userId="f9089b053ea938d5" providerId="LiveId" clId="{D6CC9EDA-5790-40E7-B26A-1491EB203ABA}" dt="2023-10-12T06:53:17.980" v="1745" actId="1076"/>
+          <ac:spMkLst>
+            <pc:docMk/>
+            <pc:sldMk cId="2372134658" sldId="261"/>
+            <ac:spMk id="130" creationId="{0FA72858-8DB7-9531-6671-3EE42744B1BD}"/>
+          </ac:spMkLst>
+        </pc:spChg>
+        <pc:spChg chg="mod">
+          <ac:chgData name="승웅 하" userId="f9089b053ea938d5" providerId="LiveId" clId="{D6CC9EDA-5790-40E7-B26A-1491EB203ABA}" dt="2023-10-12T06:53:17.980" v="1745" actId="1076"/>
+          <ac:spMkLst>
+            <pc:docMk/>
+            <pc:sldMk cId="2372134658" sldId="261"/>
+            <ac:spMk id="131" creationId="{1610AB90-5838-D34A-0A9C-877EE22262D8}"/>
+          </ac:spMkLst>
+        </pc:spChg>
+        <pc:spChg chg="del">
+          <ac:chgData name="승웅 하" userId="f9089b053ea938d5" providerId="LiveId" clId="{D6CC9EDA-5790-40E7-B26A-1491EB203ABA}" dt="2023-10-11T05:24:22.386" v="19" actId="478"/>
+          <ac:spMkLst>
+            <pc:docMk/>
+            <pc:sldMk cId="2372134658" sldId="261"/>
+            <ac:spMk id="132" creationId="{53523F0A-6C68-4612-001C-F2EDF5141409}"/>
+          </ac:spMkLst>
+        </pc:spChg>
+        <pc:spChg chg="mod">
+          <ac:chgData name="승웅 하" userId="f9089b053ea938d5" providerId="LiveId" clId="{D6CC9EDA-5790-40E7-B26A-1491EB203ABA}" dt="2023-10-12T06:53:17.980" v="1745" actId="1076"/>
+          <ac:spMkLst>
+            <pc:docMk/>
+            <pc:sldMk cId="2372134658" sldId="261"/>
+            <ac:spMk id="141" creationId="{EEBA084C-9164-7A3B-50FA-171C761F6F1E}"/>
+          </ac:spMkLst>
+        </pc:spChg>
+        <pc:spChg chg="mod">
+          <ac:chgData name="승웅 하" userId="f9089b053ea938d5" providerId="LiveId" clId="{D6CC9EDA-5790-40E7-B26A-1491EB203ABA}" dt="2023-10-12T06:53:17.980" v="1745" actId="1076"/>
+          <ac:spMkLst>
+            <pc:docMk/>
+            <pc:sldMk cId="2372134658" sldId="261"/>
+            <ac:spMk id="142" creationId="{ED2CBDFC-B8BD-4F83-569F-7AD27E3AF977}"/>
+          </ac:spMkLst>
+        </pc:spChg>
+        <pc:spChg chg="del">
+          <ac:chgData name="승웅 하" userId="f9089b053ea938d5" providerId="LiveId" clId="{D6CC9EDA-5790-40E7-B26A-1491EB203ABA}" dt="2023-10-11T05:24:21.549" v="18" actId="478"/>
+          <ac:spMkLst>
+            <pc:docMk/>
+            <pc:sldMk cId="2372134658" sldId="261"/>
+            <ac:spMk id="146" creationId="{3E824D89-719B-0FC1-6722-05324888209F}"/>
+          </ac:spMkLst>
+        </pc:spChg>
+        <pc:spChg chg="del">
+          <ac:chgData name="승웅 하" userId="f9089b053ea938d5" providerId="LiveId" clId="{D6CC9EDA-5790-40E7-B26A-1491EB203ABA}" dt="2023-10-11T05:24:17.850" v="15" actId="478"/>
+          <ac:spMkLst>
+            <pc:docMk/>
+            <pc:sldMk cId="2372134658" sldId="261"/>
+            <ac:spMk id="147" creationId="{690DB8D5-7D79-4323-AE90-875D3DD36EE2}"/>
+          </ac:spMkLst>
+        </pc:spChg>
+        <pc:spChg chg="mod">
+          <ac:chgData name="승웅 하" userId="f9089b053ea938d5" providerId="LiveId" clId="{D6CC9EDA-5790-40E7-B26A-1491EB203ABA}" dt="2023-10-12T06:53:17.980" v="1745" actId="1076"/>
+          <ac:spMkLst>
+            <pc:docMk/>
+            <pc:sldMk cId="2372134658" sldId="261"/>
+            <ac:spMk id="148" creationId="{373D58FB-A53F-B90B-B23E-2E211BB73FB4}"/>
+          </ac:spMkLst>
+        </pc:spChg>
+        <pc:spChg chg="mod">
+          <ac:chgData name="승웅 하" userId="f9089b053ea938d5" providerId="LiveId" clId="{D6CC9EDA-5790-40E7-B26A-1491EB203ABA}" dt="2023-10-12T06:53:17.980" v="1745" actId="1076"/>
+          <ac:spMkLst>
+            <pc:docMk/>
+            <pc:sldMk cId="2372134658" sldId="261"/>
+            <ac:spMk id="149" creationId="{F23A85D5-9E0A-0501-D290-0B87FDE2AA53}"/>
+          </ac:spMkLst>
+        </pc:spChg>
+        <pc:spChg chg="mod">
+          <ac:chgData name="승웅 하" userId="f9089b053ea938d5" providerId="LiveId" clId="{D6CC9EDA-5790-40E7-B26A-1491EB203ABA}" dt="2023-10-12T06:53:17.980" v="1745" actId="1076"/>
+          <ac:spMkLst>
+            <pc:docMk/>
+            <pc:sldMk cId="2372134658" sldId="261"/>
+            <ac:spMk id="150" creationId="{049F0D94-528D-4CE2-0CAE-5B6AA6C655DF}"/>
+          </ac:spMkLst>
+        </pc:spChg>
+        <pc:spChg chg="mod">
+          <ac:chgData name="승웅 하" userId="f9089b053ea938d5" providerId="LiveId" clId="{D6CC9EDA-5790-40E7-B26A-1491EB203ABA}" dt="2023-10-12T06:53:17.980" v="1745" actId="1076"/>
+          <ac:spMkLst>
+            <pc:docMk/>
+            <pc:sldMk cId="2372134658" sldId="261"/>
+            <ac:spMk id="151" creationId="{E5AC36E2-94B2-73D6-3AFD-DF76566A3866}"/>
+          </ac:spMkLst>
+        </pc:spChg>
+        <pc:spChg chg="mod">
+          <ac:chgData name="승웅 하" userId="f9089b053ea938d5" providerId="LiveId" clId="{D6CC9EDA-5790-40E7-B26A-1491EB203ABA}" dt="2023-10-12T06:53:17.980" v="1745" actId="1076"/>
+          <ac:spMkLst>
+            <pc:docMk/>
+            <pc:sldMk cId="2372134658" sldId="261"/>
+            <ac:spMk id="152" creationId="{DC5517EA-6A08-29CB-859F-AC332D96A8EB}"/>
+          </ac:spMkLst>
+        </pc:spChg>
+        <pc:spChg chg="del">
+          <ac:chgData name="승웅 하" userId="f9089b053ea938d5" providerId="LiveId" clId="{D6CC9EDA-5790-40E7-B26A-1491EB203ABA}" dt="2023-10-11T05:24:29.934" v="24" actId="478"/>
+          <ac:spMkLst>
+            <pc:docMk/>
+            <pc:sldMk cId="2372134658" sldId="261"/>
+            <ac:spMk id="162" creationId="{BC7ED2DA-61AA-231C-FAB5-B8CD9F2EC663}"/>
+          </ac:spMkLst>
+        </pc:spChg>
+        <pc:spChg chg="del">
+          <ac:chgData name="승웅 하" userId="f9089b053ea938d5" providerId="LiveId" clId="{D6CC9EDA-5790-40E7-B26A-1491EB203ABA}" dt="2023-10-11T05:24:29.934" v="24" actId="478"/>
+          <ac:spMkLst>
+            <pc:docMk/>
+            <pc:sldMk cId="2372134658" sldId="261"/>
+            <ac:spMk id="163" creationId="{71302058-F734-44EC-30BE-B89778CA02DB}"/>
+          </ac:spMkLst>
+        </pc:spChg>
+        <pc:spChg chg="del">
+          <ac:chgData name="승웅 하" userId="f9089b053ea938d5" providerId="LiveId" clId="{D6CC9EDA-5790-40E7-B26A-1491EB203ABA}" dt="2023-10-11T05:24:29.934" v="24" actId="478"/>
+          <ac:spMkLst>
+            <pc:docMk/>
+            <pc:sldMk cId="2372134658" sldId="261"/>
+            <ac:spMk id="164" creationId="{D653A247-DBEC-665B-AA28-6C8C945B0152}"/>
+          </ac:spMkLst>
+        </pc:spChg>
+        <pc:spChg chg="mod">
+          <ac:chgData name="승웅 하" userId="f9089b053ea938d5" providerId="LiveId" clId="{D6CC9EDA-5790-40E7-B26A-1491EB203ABA}" dt="2023-10-12T06:54:15.562" v="1768" actId="1076"/>
+          <ac:spMkLst>
+            <pc:docMk/>
+            <pc:sldMk cId="2372134658" sldId="261"/>
+            <ac:spMk id="183" creationId="{C6BC361F-5679-AF4B-2034-8B28CE991510}"/>
+          </ac:spMkLst>
+        </pc:spChg>
+        <pc:cxnChg chg="mod">
+          <ac:chgData name="승웅 하" userId="f9089b053ea938d5" providerId="LiveId" clId="{D6CC9EDA-5790-40E7-B26A-1491EB203ABA}" dt="2023-10-12T06:53:17.980" v="1745" actId="1076"/>
+          <ac:cxnSpMkLst>
+            <pc:docMk/>
+            <pc:sldMk cId="2372134658" sldId="261"/>
+            <ac:cxnSpMk id="39" creationId="{C6171346-F228-4978-7607-A260957DEB3B}"/>
+          </ac:cxnSpMkLst>
+        </pc:cxnChg>
+        <pc:cxnChg chg="mod">
+          <ac:chgData name="승웅 하" userId="f9089b053ea938d5" providerId="LiveId" clId="{D6CC9EDA-5790-40E7-B26A-1491EB203ABA}" dt="2023-10-12T06:53:17.980" v="1745" actId="1076"/>
+          <ac:cxnSpMkLst>
+            <pc:docMk/>
+            <pc:sldMk cId="2372134658" sldId="261"/>
+            <ac:cxnSpMk id="41" creationId="{6B0BB905-7E51-0FA0-6F1D-4690E824E1A6}"/>
+          </ac:cxnSpMkLst>
+        </pc:cxnChg>
+        <pc:cxnChg chg="mod">
+          <ac:chgData name="승웅 하" userId="f9089b053ea938d5" providerId="LiveId" clId="{D6CC9EDA-5790-40E7-B26A-1491EB203ABA}" dt="2023-10-12T06:53:17.980" v="1745" actId="1076"/>
+          <ac:cxnSpMkLst>
+            <pc:docMk/>
+            <pc:sldMk cId="2372134658" sldId="261"/>
+            <ac:cxnSpMk id="44" creationId="{A923842B-C2EA-2540-3F79-2D4D00091EDC}"/>
+          </ac:cxnSpMkLst>
+        </pc:cxnChg>
+        <pc:cxnChg chg="mod">
+          <ac:chgData name="승웅 하" userId="f9089b053ea938d5" providerId="LiveId" clId="{D6CC9EDA-5790-40E7-B26A-1491EB203ABA}" dt="2023-10-12T06:53:17.980" v="1745" actId="1076"/>
+          <ac:cxnSpMkLst>
+            <pc:docMk/>
+            <pc:sldMk cId="2372134658" sldId="261"/>
+            <ac:cxnSpMk id="49" creationId="{3A58CF3D-B152-6349-279E-2875CE0BBFA5}"/>
+          </ac:cxnSpMkLst>
+        </pc:cxnChg>
+        <pc:cxnChg chg="mod">
+          <ac:chgData name="승웅 하" userId="f9089b053ea938d5" providerId="LiveId" clId="{D6CC9EDA-5790-40E7-B26A-1491EB203ABA}" dt="2023-10-12T06:53:17.980" v="1745" actId="1076"/>
+          <ac:cxnSpMkLst>
+            <pc:docMk/>
+            <pc:sldMk cId="2372134658" sldId="261"/>
+            <ac:cxnSpMk id="52" creationId="{A3081BD3-57A8-4E53-CCEE-221184D5E88A}"/>
+          </ac:cxnSpMkLst>
+        </pc:cxnChg>
+        <pc:cxnChg chg="mod">
+          <ac:chgData name="승웅 하" userId="f9089b053ea938d5" providerId="LiveId" clId="{D6CC9EDA-5790-40E7-B26A-1491EB203ABA}" dt="2023-10-12T06:53:17.980" v="1745" actId="1076"/>
+          <ac:cxnSpMkLst>
+            <pc:docMk/>
+            <pc:sldMk cId="2372134658" sldId="261"/>
+            <ac:cxnSpMk id="57" creationId="{053BD79F-D7BC-C1FB-3B54-75E529C3EA45}"/>
+          </ac:cxnSpMkLst>
+        </pc:cxnChg>
+        <pc:cxnChg chg="mod">
+          <ac:chgData name="승웅 하" userId="f9089b053ea938d5" providerId="LiveId" clId="{D6CC9EDA-5790-40E7-B26A-1491EB203ABA}" dt="2023-10-12T06:53:17.980" v="1745" actId="1076"/>
+          <ac:cxnSpMkLst>
+            <pc:docMk/>
+            <pc:sldMk cId="2372134658" sldId="261"/>
+            <ac:cxnSpMk id="60" creationId="{2E734A6C-FF4B-89A4-8342-F6D88ED42C23}"/>
+          </ac:cxnSpMkLst>
+        </pc:cxnChg>
+        <pc:cxnChg chg="mod">
+          <ac:chgData name="승웅 하" userId="f9089b053ea938d5" providerId="LiveId" clId="{D6CC9EDA-5790-40E7-B26A-1491EB203ABA}" dt="2023-10-12T06:53:17.980" v="1745" actId="1076"/>
+          <ac:cxnSpMkLst>
+            <pc:docMk/>
+            <pc:sldMk cId="2372134658" sldId="261"/>
+            <ac:cxnSpMk id="63" creationId="{1ADF04A6-23B2-F3C6-51C2-0D9C063038D2}"/>
+          </ac:cxnSpMkLst>
+        </pc:cxnChg>
+        <pc:cxnChg chg="mod">
+          <ac:chgData name="승웅 하" userId="f9089b053ea938d5" providerId="LiveId" clId="{D6CC9EDA-5790-40E7-B26A-1491EB203ABA}" dt="2023-10-12T06:53:17.980" v="1745" actId="1076"/>
+          <ac:cxnSpMkLst>
+            <pc:docMk/>
+            <pc:sldMk cId="2372134658" sldId="261"/>
+            <ac:cxnSpMk id="66" creationId="{1BD2C6C7-DF5E-762D-96F8-927A610D0174}"/>
+          </ac:cxnSpMkLst>
+        </pc:cxnChg>
+        <pc:cxnChg chg="mod">
+          <ac:chgData name="승웅 하" userId="f9089b053ea938d5" providerId="LiveId" clId="{D6CC9EDA-5790-40E7-B26A-1491EB203ABA}" dt="2023-10-12T06:53:17.980" v="1745" actId="1076"/>
+          <ac:cxnSpMkLst>
+            <pc:docMk/>
+            <pc:sldMk cId="2372134658" sldId="261"/>
+            <ac:cxnSpMk id="69" creationId="{7079B5DF-FE90-EBC6-F88D-AB009B032481}"/>
+          </ac:cxnSpMkLst>
+        </pc:cxnChg>
+        <pc:cxnChg chg="mod">
+          <ac:chgData name="승웅 하" userId="f9089b053ea938d5" providerId="LiveId" clId="{D6CC9EDA-5790-40E7-B26A-1491EB203ABA}" dt="2023-10-12T06:53:17.980" v="1745" actId="1076"/>
+          <ac:cxnSpMkLst>
+            <pc:docMk/>
+            <pc:sldMk cId="2372134658" sldId="261"/>
+            <ac:cxnSpMk id="72" creationId="{DA102F6E-D8D4-19B8-7619-5B1B8025BD0C}"/>
+          </ac:cxnSpMkLst>
+        </pc:cxnChg>
+        <pc:cxnChg chg="mod">
+          <ac:chgData name="승웅 하" userId="f9089b053ea938d5" providerId="LiveId" clId="{D6CC9EDA-5790-40E7-B26A-1491EB203ABA}" dt="2023-10-12T06:53:17.980" v="1745" actId="1076"/>
+          <ac:cxnSpMkLst>
+            <pc:docMk/>
+            <pc:sldMk cId="2372134658" sldId="261"/>
+            <ac:cxnSpMk id="87" creationId="{5A0970F2-8C6E-34C6-11A6-72DAF5E6C006}"/>
+          </ac:cxnSpMkLst>
+        </pc:cxnChg>
+        <pc:cxnChg chg="mod">
+          <ac:chgData name="승웅 하" userId="f9089b053ea938d5" providerId="LiveId" clId="{D6CC9EDA-5790-40E7-B26A-1491EB203ABA}" dt="2023-10-12T06:53:17.980" v="1745" actId="1076"/>
+          <ac:cxnSpMkLst>
+            <pc:docMk/>
+            <pc:sldMk cId="2372134658" sldId="261"/>
+            <ac:cxnSpMk id="92" creationId="{C4B07B4D-DBFA-2039-E648-4200CC3EA759}"/>
+          </ac:cxnSpMkLst>
+        </pc:cxnChg>
+        <pc:cxnChg chg="mod">
+          <ac:chgData name="승웅 하" userId="f9089b053ea938d5" providerId="LiveId" clId="{D6CC9EDA-5790-40E7-B26A-1491EB203ABA}" dt="2023-10-12T06:53:17.980" v="1745" actId="1076"/>
+          <ac:cxnSpMkLst>
+            <pc:docMk/>
+            <pc:sldMk cId="2372134658" sldId="261"/>
+            <ac:cxnSpMk id="110" creationId="{EF4CB89A-A8E7-2D7C-83B7-A3083808BC0F}"/>
+          </ac:cxnSpMkLst>
+        </pc:cxnChg>
+        <pc:cxnChg chg="mod">
+          <ac:chgData name="승웅 하" userId="f9089b053ea938d5" providerId="LiveId" clId="{D6CC9EDA-5790-40E7-B26A-1491EB203ABA}" dt="2023-10-12T06:53:17.980" v="1745" actId="1076"/>
+          <ac:cxnSpMkLst>
+            <pc:docMk/>
+            <pc:sldMk cId="2372134658" sldId="261"/>
+            <ac:cxnSpMk id="111" creationId="{84806DFA-8FAC-10FD-1F10-C4714876CAEB}"/>
+          </ac:cxnSpMkLst>
+        </pc:cxnChg>
+        <pc:cxnChg chg="mod">
+          <ac:chgData name="승웅 하" userId="f9089b053ea938d5" providerId="LiveId" clId="{D6CC9EDA-5790-40E7-B26A-1491EB203ABA}" dt="2023-10-12T06:53:17.980" v="1745" actId="1076"/>
+          <ac:cxnSpMkLst>
+            <pc:docMk/>
+            <pc:sldMk cId="2372134658" sldId="261"/>
+            <ac:cxnSpMk id="127" creationId="{A5249615-5D08-8786-5E6E-BB02F4344EF6}"/>
+          </ac:cxnSpMkLst>
+        </pc:cxnChg>
+        <pc:cxnChg chg="mod">
+          <ac:chgData name="승웅 하" userId="f9089b053ea938d5" providerId="LiveId" clId="{D6CC9EDA-5790-40E7-B26A-1491EB203ABA}" dt="2023-10-12T06:54:15.562" v="1768" actId="1076"/>
+          <ac:cxnSpMkLst>
+            <pc:docMk/>
+            <pc:sldMk cId="2372134658" sldId="261"/>
+            <ac:cxnSpMk id="135" creationId="{4CFCDE48-F384-3B97-A3DD-A2B4C648A970}"/>
+          </ac:cxnSpMkLst>
+        </pc:cxnChg>
+        <pc:cxnChg chg="mod">
+          <ac:chgData name="승웅 하" userId="f9089b053ea938d5" providerId="LiveId" clId="{D6CC9EDA-5790-40E7-B26A-1491EB203ABA}" dt="2023-10-12T06:53:17.980" v="1745" actId="1076"/>
+          <ac:cxnSpMkLst>
+            <pc:docMk/>
+            <pc:sldMk cId="2372134658" sldId="261"/>
+            <ac:cxnSpMk id="137" creationId="{DB41038D-3911-161C-DA14-E5CD13FFE713}"/>
+          </ac:cxnSpMkLst>
+        </pc:cxnChg>
+        <pc:cxnChg chg="mod">
+          <ac:chgData name="승웅 하" userId="f9089b053ea938d5" providerId="LiveId" clId="{D6CC9EDA-5790-40E7-B26A-1491EB203ABA}" dt="2023-10-12T06:53:17.980" v="1745" actId="1076"/>
+          <ac:cxnSpMkLst>
+            <pc:docMk/>
+            <pc:sldMk cId="2372134658" sldId="261"/>
             <ac:cxnSpMk id="143" creationId="{5EC68208-783D-6465-12A4-87045E369E2D}"/>
           </ac:cxnSpMkLst>
         </pc:cxnChg>
@@ -8542,7 +9462,7 @@
           <a:p>
             <a:fld id="{FE640A48-ED0F-4F81-A7EB-C3B971E419A0}" type="datetimeFigureOut">
               <a:rPr lang="ko-KR" altLang="en-US" smtClean="0"/>
-              <a:t>2023-09-09</a:t>
+              <a:t>2023-10-13</a:t>
             </a:fld>
             <a:endParaRPr lang="ko-KR" altLang="en-US"/>
           </a:p>
@@ -8712,7 +9632,7 @@
           <a:p>
             <a:fld id="{FE640A48-ED0F-4F81-A7EB-C3B971E419A0}" type="datetimeFigureOut">
               <a:rPr lang="ko-KR" altLang="en-US" smtClean="0"/>
-              <a:t>2023-09-09</a:t>
+              <a:t>2023-10-13</a:t>
             </a:fld>
             <a:endParaRPr lang="ko-KR" altLang="en-US"/>
           </a:p>
@@ -8892,7 +9812,7 @@
           <a:p>
             <a:fld id="{FE640A48-ED0F-4F81-A7EB-C3B971E419A0}" type="datetimeFigureOut">
               <a:rPr lang="ko-KR" altLang="en-US" smtClean="0"/>
-              <a:t>2023-09-09</a:t>
+              <a:t>2023-10-13</a:t>
             </a:fld>
             <a:endParaRPr lang="ko-KR" altLang="en-US"/>
           </a:p>
@@ -9062,7 +9982,7 @@
           <a:p>
             <a:fld id="{FE640A48-ED0F-4F81-A7EB-C3B971E419A0}" type="datetimeFigureOut">
               <a:rPr lang="ko-KR" altLang="en-US" smtClean="0"/>
-              <a:t>2023-09-09</a:t>
+              <a:t>2023-10-13</a:t>
             </a:fld>
             <a:endParaRPr lang="ko-KR" altLang="en-US"/>
           </a:p>
@@ -9306,7 +10226,7 @@
           <a:p>
             <a:fld id="{FE640A48-ED0F-4F81-A7EB-C3B971E419A0}" type="datetimeFigureOut">
               <a:rPr lang="ko-KR" altLang="en-US" smtClean="0"/>
-              <a:t>2023-09-09</a:t>
+              <a:t>2023-10-13</a:t>
             </a:fld>
             <a:endParaRPr lang="ko-KR" altLang="en-US"/>
           </a:p>
@@ -9538,7 +10458,7 @@
           <a:p>
             <a:fld id="{FE640A48-ED0F-4F81-A7EB-C3B971E419A0}" type="datetimeFigureOut">
               <a:rPr lang="ko-KR" altLang="en-US" smtClean="0"/>
-              <a:t>2023-09-09</a:t>
+              <a:t>2023-10-13</a:t>
             </a:fld>
             <a:endParaRPr lang="ko-KR" altLang="en-US"/>
           </a:p>
@@ -9905,7 +10825,7 @@
           <a:p>
             <a:fld id="{FE640A48-ED0F-4F81-A7EB-C3B971E419A0}" type="datetimeFigureOut">
               <a:rPr lang="ko-KR" altLang="en-US" smtClean="0"/>
-              <a:t>2023-09-09</a:t>
+              <a:t>2023-10-13</a:t>
             </a:fld>
             <a:endParaRPr lang="ko-KR" altLang="en-US"/>
           </a:p>
@@ -10023,7 +10943,7 @@
           <a:p>
             <a:fld id="{FE640A48-ED0F-4F81-A7EB-C3B971E419A0}" type="datetimeFigureOut">
               <a:rPr lang="ko-KR" altLang="en-US" smtClean="0"/>
-              <a:t>2023-09-09</a:t>
+              <a:t>2023-10-13</a:t>
             </a:fld>
             <a:endParaRPr lang="ko-KR" altLang="en-US"/>
           </a:p>
@@ -10118,7 +11038,7 @@
           <a:p>
             <a:fld id="{FE640A48-ED0F-4F81-A7EB-C3B971E419A0}" type="datetimeFigureOut">
               <a:rPr lang="ko-KR" altLang="en-US" smtClean="0"/>
-              <a:t>2023-09-09</a:t>
+              <a:t>2023-10-13</a:t>
             </a:fld>
             <a:endParaRPr lang="ko-KR" altLang="en-US"/>
           </a:p>
@@ -10395,7 +11315,7 @@
           <a:p>
             <a:fld id="{FE640A48-ED0F-4F81-A7EB-C3B971E419A0}" type="datetimeFigureOut">
               <a:rPr lang="ko-KR" altLang="en-US" smtClean="0"/>
-              <a:t>2023-09-09</a:t>
+              <a:t>2023-10-13</a:t>
             </a:fld>
             <a:endParaRPr lang="ko-KR" altLang="en-US"/>
           </a:p>
@@ -10652,7 +11572,7 @@
           <a:p>
             <a:fld id="{FE640A48-ED0F-4F81-A7EB-C3B971E419A0}" type="datetimeFigureOut">
               <a:rPr lang="ko-KR" altLang="en-US" smtClean="0"/>
-              <a:t>2023-09-09</a:t>
+              <a:t>2023-10-13</a:t>
             </a:fld>
             <a:endParaRPr lang="ko-KR" altLang="en-US"/>
           </a:p>
@@ -10865,7 +11785,7 @@
           <a:p>
             <a:fld id="{FE640A48-ED0F-4F81-A7EB-C3B971E419A0}" type="datetimeFigureOut">
               <a:rPr lang="ko-KR" altLang="en-US" smtClean="0"/>
-              <a:t>2023-09-09</a:t>
+              <a:t>2023-10-13</a:t>
             </a:fld>
             <a:endParaRPr lang="ko-KR" altLang="en-US"/>
           </a:p>
@@ -16904,8 +17824,8 @@
           </p:sp>
         </mc:Fallback>
       </mc:AlternateContent>
-      <mc:AlternateContent xmlns:mc="http://schemas.openxmlformats.org/markup-compatibility/2006">
-        <mc:Choice xmlns:a14="http://schemas.microsoft.com/office/drawing/2010/main" Requires="a14">
+      <mc:AlternateContent xmlns:mc="http://schemas.openxmlformats.org/markup-compatibility/2006" xmlns:a14="http://schemas.microsoft.com/office/drawing/2010/main">
+        <mc:Choice Requires="a14">
           <p:sp>
             <p:nvSpPr>
               <p:cNvPr id="20" name="TextBox 19">
@@ -17481,7 +18401,7 @@
             </p:txBody>
           </p:sp>
         </mc:Choice>
-        <mc:Fallback>
+        <mc:Fallback xmlns="">
           <p:sp>
             <p:nvSpPr>
               <p:cNvPr id="20" name="TextBox 19">
@@ -20977,6 +21897,3839 @@
 </p:sld>
 </file>
 
+<file path=ppt/slides/slide2.xml><?xml version="1.0" encoding="utf-8"?>
+<p:sld xmlns:a="http://schemas.openxmlformats.org/drawingml/2006/main" xmlns:r="http://schemas.openxmlformats.org/officeDocument/2006/relationships" xmlns:p="http://schemas.openxmlformats.org/presentationml/2006/main">
+  <p:cSld>
+    <p:spTree>
+      <p:nvGrpSpPr>
+        <p:cNvPr id="1" name=""/>
+        <p:cNvGrpSpPr/>
+        <p:nvPr/>
+      </p:nvGrpSpPr>
+      <p:grpSpPr>
+        <a:xfrm>
+          <a:off x="0" y="0"/>
+          <a:ext cx="0" cy="0"/>
+          <a:chOff x="0" y="0"/>
+          <a:chExt cx="0" cy="0"/>
+        </a:xfrm>
+      </p:grpSpPr>
+      <p:sp>
+        <p:nvSpPr>
+          <p:cNvPr id="183" name="타원 182">
+            <a:extLst>
+              <a:ext uri="{FF2B5EF4-FFF2-40B4-BE49-F238E27FC236}">
+                <a16:creationId xmlns:a16="http://schemas.microsoft.com/office/drawing/2014/main" id="{C6BC361F-5679-AF4B-2034-8B28CE991510}"/>
+              </a:ext>
+            </a:extLst>
+          </p:cNvPr>
+          <p:cNvSpPr/>
+          <p:nvPr/>
+        </p:nvSpPr>
+        <p:spPr>
+          <a:xfrm>
+            <a:off x="5164176" y="1984267"/>
+            <a:ext cx="1298198" cy="1041542"/>
+          </a:xfrm>
+          <a:prstGeom prst="ellipse">
+            <a:avLst/>
+          </a:prstGeom>
+          <a:solidFill>
+            <a:schemeClr val="bg1">
+              <a:lumMod val="85000"/>
+            </a:schemeClr>
+          </a:solidFill>
+        </p:spPr>
+        <p:style>
+          <a:lnRef idx="2">
+            <a:schemeClr val="accent1">
+              <a:shade val="15000"/>
+            </a:schemeClr>
+          </a:lnRef>
+          <a:fillRef idx="1">
+            <a:schemeClr val="accent1"/>
+          </a:fillRef>
+          <a:effectRef idx="0">
+            <a:schemeClr val="accent1"/>
+          </a:effectRef>
+          <a:fontRef idx="minor">
+            <a:schemeClr val="lt1"/>
+          </a:fontRef>
+        </p:style>
+        <p:txBody>
+          <a:bodyPr rtlCol="0" anchor="ctr"/>
+          <a:lstStyle/>
+          <a:p>
+            <a:pPr algn="ctr"/>
+            <a:endParaRPr lang="ko-KR" altLang="en-US" dirty="0"/>
+          </a:p>
+        </p:txBody>
+      </p:sp>
+      <p:sp>
+        <p:nvSpPr>
+          <p:cNvPr id="6" name="타원 5">
+            <a:extLst>
+              <a:ext uri="{FF2B5EF4-FFF2-40B4-BE49-F238E27FC236}">
+                <a16:creationId xmlns:a16="http://schemas.microsoft.com/office/drawing/2014/main" id="{99BBB32C-FAA0-FFA6-F76E-704B253D57C6}"/>
+              </a:ext>
+            </a:extLst>
+          </p:cNvPr>
+          <p:cNvSpPr/>
+          <p:nvPr/>
+        </p:nvSpPr>
+        <p:spPr>
+          <a:xfrm>
+            <a:off x="1293572" y="2904884"/>
+            <a:ext cx="2348630" cy="851770"/>
+          </a:xfrm>
+          <a:prstGeom prst="ellipse">
+            <a:avLst/>
+          </a:prstGeom>
+          <a:solidFill>
+            <a:schemeClr val="accent1">
+              <a:lumMod val="20000"/>
+              <a:lumOff val="80000"/>
+            </a:schemeClr>
+          </a:solidFill>
+          <a:ln>
+            <a:solidFill>
+              <a:schemeClr val="tx1"/>
+            </a:solidFill>
+          </a:ln>
+        </p:spPr>
+        <p:style>
+          <a:lnRef idx="2">
+            <a:schemeClr val="accent1">
+              <a:shade val="15000"/>
+            </a:schemeClr>
+          </a:lnRef>
+          <a:fillRef idx="1">
+            <a:schemeClr val="accent1"/>
+          </a:fillRef>
+          <a:effectRef idx="0">
+            <a:schemeClr val="accent1"/>
+          </a:effectRef>
+          <a:fontRef idx="minor">
+            <a:schemeClr val="lt1"/>
+          </a:fontRef>
+        </p:style>
+        <p:txBody>
+          <a:bodyPr rtlCol="0" anchor="ctr"/>
+          <a:lstStyle/>
+          <a:p>
+            <a:pPr algn="ctr"/>
+            <a:endParaRPr lang="ko-KR" altLang="en-US"/>
+          </a:p>
+        </p:txBody>
+      </p:sp>
+      <p:sp>
+        <p:nvSpPr>
+          <p:cNvPr id="7" name="타원 6">
+            <a:extLst>
+              <a:ext uri="{FF2B5EF4-FFF2-40B4-BE49-F238E27FC236}">
+                <a16:creationId xmlns:a16="http://schemas.microsoft.com/office/drawing/2014/main" id="{FB6FD684-61B6-19B8-1A2D-BA84106DBA02}"/>
+              </a:ext>
+            </a:extLst>
+          </p:cNvPr>
+          <p:cNvSpPr/>
+          <p:nvPr/>
+        </p:nvSpPr>
+        <p:spPr>
+          <a:xfrm>
+            <a:off x="5785416" y="2916434"/>
+            <a:ext cx="2348630" cy="851770"/>
+          </a:xfrm>
+          <a:prstGeom prst="ellipse">
+            <a:avLst/>
+          </a:prstGeom>
+          <a:solidFill>
+            <a:schemeClr val="accent1">
+              <a:lumMod val="20000"/>
+              <a:lumOff val="80000"/>
+            </a:schemeClr>
+          </a:solidFill>
+          <a:ln>
+            <a:solidFill>
+              <a:schemeClr val="tx1"/>
+            </a:solidFill>
+          </a:ln>
+        </p:spPr>
+        <p:style>
+          <a:lnRef idx="2">
+            <a:schemeClr val="accent1">
+              <a:shade val="15000"/>
+            </a:schemeClr>
+          </a:lnRef>
+          <a:fillRef idx="1">
+            <a:schemeClr val="accent1"/>
+          </a:fillRef>
+          <a:effectRef idx="0">
+            <a:schemeClr val="accent1"/>
+          </a:effectRef>
+          <a:fontRef idx="minor">
+            <a:schemeClr val="lt1"/>
+          </a:fontRef>
+        </p:style>
+        <p:txBody>
+          <a:bodyPr rtlCol="0" anchor="ctr"/>
+          <a:lstStyle/>
+          <a:p>
+            <a:pPr algn="ctr"/>
+            <a:endParaRPr lang="ko-KR" altLang="en-US"/>
+          </a:p>
+        </p:txBody>
+      </p:sp>
+      <p:sp>
+        <p:nvSpPr>
+          <p:cNvPr id="47" name="TextBox 46">
+            <a:extLst>
+              <a:ext uri="{FF2B5EF4-FFF2-40B4-BE49-F238E27FC236}">
+                <a16:creationId xmlns:a16="http://schemas.microsoft.com/office/drawing/2014/main" id="{E9D017B4-B5D3-A1CC-1322-D60ACB11D32E}"/>
+              </a:ext>
+            </a:extLst>
+          </p:cNvPr>
+          <p:cNvSpPr txBox="1"/>
+          <p:nvPr/>
+        </p:nvSpPr>
+        <p:spPr>
+          <a:xfrm>
+            <a:off x="1293573" y="3888177"/>
+            <a:ext cx="2661781" cy="369332"/>
+          </a:xfrm>
+          <a:prstGeom prst="rect">
+            <a:avLst/>
+          </a:prstGeom>
+          <a:noFill/>
+        </p:spPr>
+        <p:txBody>
+          <a:bodyPr wrap="square" rtlCol="0">
+            <a:spAutoFit/>
+          </a:bodyPr>
+          <a:lstStyle/>
+          <a:p>
+            <a:r>
+              <a:rPr lang="en-US" altLang="ko-KR" dirty="0"/>
+              <a:t>General Topic graph</a:t>
+            </a:r>
+            <a:endParaRPr lang="ko-KR" altLang="en-US" dirty="0"/>
+          </a:p>
+        </p:txBody>
+      </p:sp>
+      <p:sp>
+        <p:nvSpPr>
+          <p:cNvPr id="48" name="TextBox 47">
+            <a:extLst>
+              <a:ext uri="{FF2B5EF4-FFF2-40B4-BE49-F238E27FC236}">
+                <a16:creationId xmlns:a16="http://schemas.microsoft.com/office/drawing/2014/main" id="{E0868C25-DEF0-DE3F-8413-2EC1BA00B86B}"/>
+              </a:ext>
+            </a:extLst>
+          </p:cNvPr>
+          <p:cNvSpPr txBox="1"/>
+          <p:nvPr/>
+        </p:nvSpPr>
+        <p:spPr>
+          <a:xfrm>
+            <a:off x="5669702" y="3864396"/>
+            <a:ext cx="2661781" cy="369332"/>
+          </a:xfrm>
+          <a:prstGeom prst="rect">
+            <a:avLst/>
+          </a:prstGeom>
+          <a:noFill/>
+        </p:spPr>
+        <p:txBody>
+          <a:bodyPr wrap="square" rtlCol="0">
+            <a:spAutoFit/>
+          </a:bodyPr>
+          <a:lstStyle/>
+          <a:p>
+            <a:r>
+              <a:rPr lang="en-US" altLang="ko-KR" dirty="0"/>
+              <a:t>Community Topic graph</a:t>
+            </a:r>
+            <a:endParaRPr lang="ko-KR" altLang="en-US" dirty="0"/>
+          </a:p>
+        </p:txBody>
+      </p:sp>
+      <p:sp>
+        <p:nvSpPr>
+          <p:cNvPr id="75" name="TextBox 74">
+            <a:extLst>
+              <a:ext uri="{FF2B5EF4-FFF2-40B4-BE49-F238E27FC236}">
+                <a16:creationId xmlns:a16="http://schemas.microsoft.com/office/drawing/2014/main" id="{16890CCC-3AB1-6DB2-3457-C9E0D1B0E43B}"/>
+              </a:ext>
+            </a:extLst>
+          </p:cNvPr>
+          <p:cNvSpPr txBox="1"/>
+          <p:nvPr/>
+        </p:nvSpPr>
+        <p:spPr>
+          <a:xfrm>
+            <a:off x="4295113" y="3179231"/>
+            <a:ext cx="707951" cy="369332"/>
+          </a:xfrm>
+          <a:prstGeom prst="rect">
+            <a:avLst/>
+          </a:prstGeom>
+          <a:noFill/>
+        </p:spPr>
+        <p:txBody>
+          <a:bodyPr wrap="square" rtlCol="0">
+            <a:spAutoFit/>
+          </a:bodyPr>
+          <a:lstStyle/>
+          <a:p>
+            <a:r>
+              <a:rPr lang="en-US" altLang="ko-KR" dirty="0"/>
+              <a:t>Filter</a:t>
+            </a:r>
+            <a:endParaRPr lang="ko-KR" altLang="en-US" dirty="0"/>
+          </a:p>
+        </p:txBody>
+      </p:sp>
+      <p:sp>
+        <p:nvSpPr>
+          <p:cNvPr id="76" name="타원 75">
+            <a:extLst>
+              <a:ext uri="{FF2B5EF4-FFF2-40B4-BE49-F238E27FC236}">
+                <a16:creationId xmlns:a16="http://schemas.microsoft.com/office/drawing/2014/main" id="{4BEB773B-F752-4DA3-5707-5D5D8142632D}"/>
+              </a:ext>
+            </a:extLst>
+          </p:cNvPr>
+          <p:cNvSpPr/>
+          <p:nvPr/>
+        </p:nvSpPr>
+        <p:spPr>
+          <a:xfrm>
+            <a:off x="1932712" y="707737"/>
+            <a:ext cx="501402" cy="480368"/>
+          </a:xfrm>
+          <a:prstGeom prst="ellipse">
+            <a:avLst/>
+          </a:prstGeom>
+          <a:solidFill>
+            <a:schemeClr val="bg1">
+              <a:lumMod val="75000"/>
+            </a:schemeClr>
+          </a:solidFill>
+        </p:spPr>
+        <p:style>
+          <a:lnRef idx="2">
+            <a:schemeClr val="accent1">
+              <a:shade val="15000"/>
+            </a:schemeClr>
+          </a:lnRef>
+          <a:fillRef idx="1">
+            <a:schemeClr val="accent1"/>
+          </a:fillRef>
+          <a:effectRef idx="0">
+            <a:schemeClr val="accent1"/>
+          </a:effectRef>
+          <a:fontRef idx="minor">
+            <a:schemeClr val="lt1"/>
+          </a:fontRef>
+        </p:style>
+        <p:txBody>
+          <a:bodyPr rtlCol="0" anchor="ctr"/>
+          <a:lstStyle/>
+          <a:p>
+            <a:pPr algn="ctr"/>
+            <a:endParaRPr lang="ko-KR" altLang="en-US"/>
+          </a:p>
+        </p:txBody>
+      </p:sp>
+      <p:sp>
+        <p:nvSpPr>
+          <p:cNvPr id="77" name="타원 76">
+            <a:extLst>
+              <a:ext uri="{FF2B5EF4-FFF2-40B4-BE49-F238E27FC236}">
+                <a16:creationId xmlns:a16="http://schemas.microsoft.com/office/drawing/2014/main" id="{5DE36840-14B2-68F9-E41A-037C7D4E99DF}"/>
+              </a:ext>
+            </a:extLst>
+          </p:cNvPr>
+          <p:cNvSpPr/>
+          <p:nvPr/>
+        </p:nvSpPr>
+        <p:spPr>
+          <a:xfrm>
+            <a:off x="2559645" y="777712"/>
+            <a:ext cx="323702" cy="310123"/>
+          </a:xfrm>
+          <a:prstGeom prst="ellipse">
+            <a:avLst/>
+          </a:prstGeom>
+          <a:solidFill>
+            <a:schemeClr val="bg1">
+              <a:lumMod val="75000"/>
+            </a:schemeClr>
+          </a:solidFill>
+        </p:spPr>
+        <p:style>
+          <a:lnRef idx="2">
+            <a:schemeClr val="accent1">
+              <a:shade val="15000"/>
+            </a:schemeClr>
+          </a:lnRef>
+          <a:fillRef idx="1">
+            <a:schemeClr val="accent1"/>
+          </a:fillRef>
+          <a:effectRef idx="0">
+            <a:schemeClr val="accent1"/>
+          </a:effectRef>
+          <a:fontRef idx="minor">
+            <a:schemeClr val="lt1"/>
+          </a:fontRef>
+        </p:style>
+        <p:txBody>
+          <a:bodyPr rtlCol="0" anchor="ctr"/>
+          <a:lstStyle/>
+          <a:p>
+            <a:pPr algn="ctr"/>
+            <a:endParaRPr lang="ko-KR" altLang="en-US"/>
+          </a:p>
+        </p:txBody>
+      </p:sp>
+      <p:sp>
+        <p:nvSpPr>
+          <p:cNvPr id="78" name="타원 77">
+            <a:extLst>
+              <a:ext uri="{FF2B5EF4-FFF2-40B4-BE49-F238E27FC236}">
+                <a16:creationId xmlns:a16="http://schemas.microsoft.com/office/drawing/2014/main" id="{2922B32E-08E3-5D62-E62C-98BA09B71B4F}"/>
+              </a:ext>
+            </a:extLst>
+          </p:cNvPr>
+          <p:cNvSpPr/>
+          <p:nvPr/>
+        </p:nvSpPr>
+        <p:spPr>
+          <a:xfrm>
+            <a:off x="2263002" y="1188105"/>
+            <a:ext cx="409773" cy="392583"/>
+          </a:xfrm>
+          <a:prstGeom prst="ellipse">
+            <a:avLst/>
+          </a:prstGeom>
+          <a:solidFill>
+            <a:schemeClr val="bg1">
+              <a:lumMod val="75000"/>
+            </a:schemeClr>
+          </a:solidFill>
+        </p:spPr>
+        <p:style>
+          <a:lnRef idx="2">
+            <a:schemeClr val="accent1">
+              <a:shade val="15000"/>
+            </a:schemeClr>
+          </a:lnRef>
+          <a:fillRef idx="1">
+            <a:schemeClr val="accent1"/>
+          </a:fillRef>
+          <a:effectRef idx="0">
+            <a:schemeClr val="accent1"/>
+          </a:effectRef>
+          <a:fontRef idx="minor">
+            <a:schemeClr val="lt1"/>
+          </a:fontRef>
+        </p:style>
+        <p:txBody>
+          <a:bodyPr rtlCol="0" anchor="ctr"/>
+          <a:lstStyle/>
+          <a:p>
+            <a:pPr algn="ctr"/>
+            <a:endParaRPr lang="ko-KR" altLang="en-US"/>
+          </a:p>
+        </p:txBody>
+      </p:sp>
+      <p:sp>
+        <p:nvSpPr>
+          <p:cNvPr id="79" name="TextBox 78">
+            <a:extLst>
+              <a:ext uri="{FF2B5EF4-FFF2-40B4-BE49-F238E27FC236}">
+                <a16:creationId xmlns:a16="http://schemas.microsoft.com/office/drawing/2014/main" id="{9C766AC5-A925-657F-9E5E-4DE29D7D67D9}"/>
+              </a:ext>
+            </a:extLst>
+          </p:cNvPr>
+          <p:cNvSpPr txBox="1"/>
+          <p:nvPr/>
+        </p:nvSpPr>
+        <p:spPr>
+          <a:xfrm>
+            <a:off x="2613882" y="1479057"/>
+            <a:ext cx="1021680" cy="369332"/>
+          </a:xfrm>
+          <a:prstGeom prst="rect">
+            <a:avLst/>
+          </a:prstGeom>
+          <a:noFill/>
+        </p:spPr>
+        <p:txBody>
+          <a:bodyPr wrap="square" rtlCol="0">
+            <a:spAutoFit/>
+          </a:bodyPr>
+          <a:lstStyle/>
+          <a:p>
+            <a:r>
+              <a:rPr lang="en-US" altLang="ko-KR" dirty="0"/>
+              <a:t>Events</a:t>
+            </a:r>
+            <a:endParaRPr lang="ko-KR" altLang="en-US" dirty="0"/>
+          </a:p>
+        </p:txBody>
+      </p:sp>
+      <p:sp>
+        <p:nvSpPr>
+          <p:cNvPr id="80" name="타원 79">
+            <a:extLst>
+              <a:ext uri="{FF2B5EF4-FFF2-40B4-BE49-F238E27FC236}">
+                <a16:creationId xmlns:a16="http://schemas.microsoft.com/office/drawing/2014/main" id="{DFDA8351-6E26-B839-6636-43B2B5054681}"/>
+              </a:ext>
+            </a:extLst>
+          </p:cNvPr>
+          <p:cNvSpPr/>
+          <p:nvPr/>
+        </p:nvSpPr>
+        <p:spPr>
+          <a:xfrm>
+            <a:off x="1921797" y="3209501"/>
+            <a:ext cx="120580" cy="115522"/>
+          </a:xfrm>
+          <a:prstGeom prst="ellipse">
+            <a:avLst/>
+          </a:prstGeom>
+          <a:solidFill>
+            <a:srgbClr val="7030A0"/>
+          </a:solidFill>
+        </p:spPr>
+        <p:style>
+          <a:lnRef idx="2">
+            <a:schemeClr val="accent1">
+              <a:shade val="15000"/>
+            </a:schemeClr>
+          </a:lnRef>
+          <a:fillRef idx="1">
+            <a:schemeClr val="accent1"/>
+          </a:fillRef>
+          <a:effectRef idx="0">
+            <a:schemeClr val="accent1"/>
+          </a:effectRef>
+          <a:fontRef idx="minor">
+            <a:schemeClr val="lt1"/>
+          </a:fontRef>
+        </p:style>
+        <p:txBody>
+          <a:bodyPr rtlCol="0" anchor="ctr"/>
+          <a:lstStyle/>
+          <a:p>
+            <a:pPr algn="ctr"/>
+            <a:endParaRPr lang="ko-KR" altLang="en-US"/>
+          </a:p>
+        </p:txBody>
+      </p:sp>
+      <p:sp>
+        <p:nvSpPr>
+          <p:cNvPr id="81" name="타원 80">
+            <a:extLst>
+              <a:ext uri="{FF2B5EF4-FFF2-40B4-BE49-F238E27FC236}">
+                <a16:creationId xmlns:a16="http://schemas.microsoft.com/office/drawing/2014/main" id="{DF067161-C688-11E0-5A1A-14F3D07E79DD}"/>
+              </a:ext>
+            </a:extLst>
+          </p:cNvPr>
+          <p:cNvSpPr/>
+          <p:nvPr/>
+        </p:nvSpPr>
+        <p:spPr>
+          <a:xfrm>
+            <a:off x="2163669" y="3503006"/>
+            <a:ext cx="120580" cy="115522"/>
+          </a:xfrm>
+          <a:prstGeom prst="ellipse">
+            <a:avLst/>
+          </a:prstGeom>
+          <a:solidFill>
+            <a:srgbClr val="00B050"/>
+          </a:solidFill>
+        </p:spPr>
+        <p:style>
+          <a:lnRef idx="2">
+            <a:schemeClr val="accent1">
+              <a:shade val="15000"/>
+            </a:schemeClr>
+          </a:lnRef>
+          <a:fillRef idx="1">
+            <a:schemeClr val="accent1"/>
+          </a:fillRef>
+          <a:effectRef idx="0">
+            <a:schemeClr val="accent1"/>
+          </a:effectRef>
+          <a:fontRef idx="minor">
+            <a:schemeClr val="lt1"/>
+          </a:fontRef>
+        </p:style>
+        <p:txBody>
+          <a:bodyPr rtlCol="0" anchor="ctr"/>
+          <a:lstStyle/>
+          <a:p>
+            <a:pPr algn="ctr"/>
+            <a:endParaRPr lang="ko-KR" altLang="en-US"/>
+          </a:p>
+        </p:txBody>
+      </p:sp>
+      <p:sp>
+        <p:nvSpPr>
+          <p:cNvPr id="82" name="타원 81">
+            <a:extLst>
+              <a:ext uri="{FF2B5EF4-FFF2-40B4-BE49-F238E27FC236}">
+                <a16:creationId xmlns:a16="http://schemas.microsoft.com/office/drawing/2014/main" id="{2EC7A63D-A0AD-9A22-311C-863F037B0CD2}"/>
+              </a:ext>
+            </a:extLst>
+          </p:cNvPr>
+          <p:cNvSpPr/>
+          <p:nvPr/>
+        </p:nvSpPr>
+        <p:spPr>
+          <a:xfrm>
+            <a:off x="2612484" y="3503006"/>
+            <a:ext cx="120580" cy="115522"/>
+          </a:xfrm>
+          <a:prstGeom prst="ellipse">
+            <a:avLst/>
+          </a:prstGeom>
+          <a:solidFill>
+            <a:srgbClr val="FFFF00"/>
+          </a:solidFill>
+        </p:spPr>
+        <p:style>
+          <a:lnRef idx="2">
+            <a:schemeClr val="accent1">
+              <a:shade val="15000"/>
+            </a:schemeClr>
+          </a:lnRef>
+          <a:fillRef idx="1">
+            <a:schemeClr val="accent1"/>
+          </a:fillRef>
+          <a:effectRef idx="0">
+            <a:schemeClr val="accent1"/>
+          </a:effectRef>
+          <a:fontRef idx="minor">
+            <a:schemeClr val="lt1"/>
+          </a:fontRef>
+        </p:style>
+        <p:txBody>
+          <a:bodyPr rtlCol="0" anchor="ctr"/>
+          <a:lstStyle/>
+          <a:p>
+            <a:pPr algn="ctr"/>
+            <a:endParaRPr lang="ko-KR" altLang="en-US"/>
+          </a:p>
+        </p:txBody>
+      </p:sp>
+      <p:sp>
+        <p:nvSpPr>
+          <p:cNvPr id="83" name="타원 82">
+            <a:extLst>
+              <a:ext uri="{FF2B5EF4-FFF2-40B4-BE49-F238E27FC236}">
+                <a16:creationId xmlns:a16="http://schemas.microsoft.com/office/drawing/2014/main" id="{43C2D2FD-C030-8077-C94D-974B0CC1CB2B}"/>
+              </a:ext>
+            </a:extLst>
+          </p:cNvPr>
+          <p:cNvSpPr/>
+          <p:nvPr/>
+        </p:nvSpPr>
+        <p:spPr>
+          <a:xfrm>
+            <a:off x="2810328" y="3188010"/>
+            <a:ext cx="120580" cy="115522"/>
+          </a:xfrm>
+          <a:prstGeom prst="ellipse">
+            <a:avLst/>
+          </a:prstGeom>
+          <a:solidFill>
+            <a:srgbClr val="FFC000"/>
+          </a:solidFill>
+        </p:spPr>
+        <p:style>
+          <a:lnRef idx="2">
+            <a:schemeClr val="accent1">
+              <a:shade val="15000"/>
+            </a:schemeClr>
+          </a:lnRef>
+          <a:fillRef idx="1">
+            <a:schemeClr val="accent1"/>
+          </a:fillRef>
+          <a:effectRef idx="0">
+            <a:schemeClr val="accent1"/>
+          </a:effectRef>
+          <a:fontRef idx="minor">
+            <a:schemeClr val="lt1"/>
+          </a:fontRef>
+        </p:style>
+        <p:txBody>
+          <a:bodyPr rtlCol="0" anchor="ctr"/>
+          <a:lstStyle/>
+          <a:p>
+            <a:pPr algn="ctr"/>
+            <a:endParaRPr lang="ko-KR" altLang="en-US"/>
+          </a:p>
+        </p:txBody>
+      </p:sp>
+      <p:sp>
+        <p:nvSpPr>
+          <p:cNvPr id="84" name="타원 83">
+            <a:extLst>
+              <a:ext uri="{FF2B5EF4-FFF2-40B4-BE49-F238E27FC236}">
+                <a16:creationId xmlns:a16="http://schemas.microsoft.com/office/drawing/2014/main" id="{44E36D5A-E280-E2B8-C6C2-E9A158132F87}"/>
+              </a:ext>
+            </a:extLst>
+          </p:cNvPr>
+          <p:cNvSpPr/>
+          <p:nvPr/>
+        </p:nvSpPr>
+        <p:spPr>
+          <a:xfrm>
+            <a:off x="2377716" y="3001107"/>
+            <a:ext cx="120580" cy="115522"/>
+          </a:xfrm>
+          <a:prstGeom prst="ellipse">
+            <a:avLst/>
+          </a:prstGeom>
+          <a:solidFill>
+            <a:srgbClr val="FF0000"/>
+          </a:solidFill>
+        </p:spPr>
+        <p:style>
+          <a:lnRef idx="2">
+            <a:schemeClr val="accent1">
+              <a:shade val="15000"/>
+            </a:schemeClr>
+          </a:lnRef>
+          <a:fillRef idx="1">
+            <a:schemeClr val="accent1"/>
+          </a:fillRef>
+          <a:effectRef idx="0">
+            <a:schemeClr val="accent1"/>
+          </a:effectRef>
+          <a:fontRef idx="minor">
+            <a:schemeClr val="lt1"/>
+          </a:fontRef>
+        </p:style>
+        <p:txBody>
+          <a:bodyPr rtlCol="0" anchor="ctr"/>
+          <a:lstStyle/>
+          <a:p>
+            <a:pPr algn="ctr"/>
+            <a:endParaRPr lang="ko-KR" altLang="en-US"/>
+          </a:p>
+        </p:txBody>
+      </p:sp>
+      <p:sp>
+        <p:nvSpPr>
+          <p:cNvPr id="90" name="화살표: 위쪽 89">
+            <a:extLst>
+              <a:ext uri="{FF2B5EF4-FFF2-40B4-BE49-F238E27FC236}">
+                <a16:creationId xmlns:a16="http://schemas.microsoft.com/office/drawing/2014/main" id="{FE1EE431-359E-76D7-9F58-AD1113D7CE0C}"/>
+              </a:ext>
+            </a:extLst>
+          </p:cNvPr>
+          <p:cNvSpPr/>
+          <p:nvPr/>
+        </p:nvSpPr>
+        <p:spPr>
+          <a:xfrm>
+            <a:off x="2320318" y="1680958"/>
+            <a:ext cx="247222" cy="1082645"/>
+          </a:xfrm>
+          <a:prstGeom prst="upArrow">
+            <a:avLst/>
+          </a:prstGeom>
+          <a:solidFill>
+            <a:schemeClr val="tx1"/>
+          </a:solidFill>
+        </p:spPr>
+        <p:style>
+          <a:lnRef idx="2">
+            <a:schemeClr val="accent1">
+              <a:shade val="15000"/>
+            </a:schemeClr>
+          </a:lnRef>
+          <a:fillRef idx="1">
+            <a:schemeClr val="accent1"/>
+          </a:fillRef>
+          <a:effectRef idx="0">
+            <a:schemeClr val="accent1"/>
+          </a:effectRef>
+          <a:fontRef idx="minor">
+            <a:schemeClr val="lt1"/>
+          </a:fontRef>
+        </p:style>
+        <p:txBody>
+          <a:bodyPr rtlCol="0" anchor="ctr"/>
+          <a:lstStyle/>
+          <a:p>
+            <a:pPr algn="ctr"/>
+            <a:endParaRPr lang="ko-KR" altLang="en-US" dirty="0"/>
+          </a:p>
+        </p:txBody>
+      </p:sp>
+      <p:sp>
+        <p:nvSpPr>
+          <p:cNvPr id="95" name="타원 94">
+            <a:extLst>
+              <a:ext uri="{FF2B5EF4-FFF2-40B4-BE49-F238E27FC236}">
+                <a16:creationId xmlns:a16="http://schemas.microsoft.com/office/drawing/2014/main" id="{0F7DF099-5E39-E413-2108-539156D89C15}"/>
+              </a:ext>
+            </a:extLst>
+          </p:cNvPr>
+          <p:cNvSpPr/>
+          <p:nvPr/>
+        </p:nvSpPr>
+        <p:spPr>
+          <a:xfrm>
+            <a:off x="2593713" y="915953"/>
+            <a:ext cx="120580" cy="115522"/>
+          </a:xfrm>
+          <a:prstGeom prst="ellipse">
+            <a:avLst/>
+          </a:prstGeom>
+          <a:solidFill>
+            <a:srgbClr val="7030A0"/>
+          </a:solidFill>
+        </p:spPr>
+        <p:style>
+          <a:lnRef idx="2">
+            <a:schemeClr val="accent1">
+              <a:shade val="15000"/>
+            </a:schemeClr>
+          </a:lnRef>
+          <a:fillRef idx="1">
+            <a:schemeClr val="accent1"/>
+          </a:fillRef>
+          <a:effectRef idx="0">
+            <a:schemeClr val="accent1"/>
+          </a:effectRef>
+          <a:fontRef idx="minor">
+            <a:schemeClr val="lt1"/>
+          </a:fontRef>
+        </p:style>
+        <p:txBody>
+          <a:bodyPr rtlCol="0" anchor="ctr"/>
+          <a:lstStyle/>
+          <a:p>
+            <a:pPr algn="ctr"/>
+            <a:endParaRPr lang="ko-KR" altLang="en-US"/>
+          </a:p>
+        </p:txBody>
+      </p:sp>
+      <p:sp>
+        <p:nvSpPr>
+          <p:cNvPr id="96" name="타원 95">
+            <a:extLst>
+              <a:ext uri="{FF2B5EF4-FFF2-40B4-BE49-F238E27FC236}">
+                <a16:creationId xmlns:a16="http://schemas.microsoft.com/office/drawing/2014/main" id="{DF9745F7-A092-D569-EFC6-D7CBDF4B8BA6}"/>
+              </a:ext>
+            </a:extLst>
+          </p:cNvPr>
+          <p:cNvSpPr/>
+          <p:nvPr/>
+        </p:nvSpPr>
+        <p:spPr>
+          <a:xfrm>
+            <a:off x="2733064" y="915953"/>
+            <a:ext cx="120580" cy="115522"/>
+          </a:xfrm>
+          <a:prstGeom prst="ellipse">
+            <a:avLst/>
+          </a:prstGeom>
+          <a:solidFill>
+            <a:srgbClr val="FFFF00"/>
+          </a:solidFill>
+        </p:spPr>
+        <p:style>
+          <a:lnRef idx="2">
+            <a:schemeClr val="accent1">
+              <a:shade val="15000"/>
+            </a:schemeClr>
+          </a:lnRef>
+          <a:fillRef idx="1">
+            <a:schemeClr val="accent1"/>
+          </a:fillRef>
+          <a:effectRef idx="0">
+            <a:schemeClr val="accent1"/>
+          </a:effectRef>
+          <a:fontRef idx="minor">
+            <a:schemeClr val="lt1"/>
+          </a:fontRef>
+        </p:style>
+        <p:txBody>
+          <a:bodyPr rtlCol="0" anchor="ctr"/>
+          <a:lstStyle/>
+          <a:p>
+            <a:pPr algn="ctr"/>
+            <a:endParaRPr lang="ko-KR" altLang="en-US"/>
+          </a:p>
+        </p:txBody>
+      </p:sp>
+      <p:sp>
+        <p:nvSpPr>
+          <p:cNvPr id="97" name="타원 96">
+            <a:extLst>
+              <a:ext uri="{FF2B5EF4-FFF2-40B4-BE49-F238E27FC236}">
+                <a16:creationId xmlns:a16="http://schemas.microsoft.com/office/drawing/2014/main" id="{983666E1-8203-72BB-A623-2D3606699A31}"/>
+              </a:ext>
+            </a:extLst>
+          </p:cNvPr>
+          <p:cNvSpPr/>
+          <p:nvPr/>
+        </p:nvSpPr>
+        <p:spPr>
+          <a:xfrm>
+            <a:off x="2663528" y="798309"/>
+            <a:ext cx="120580" cy="115522"/>
+          </a:xfrm>
+          <a:prstGeom prst="ellipse">
+            <a:avLst/>
+          </a:prstGeom>
+          <a:solidFill>
+            <a:srgbClr val="FFC000"/>
+          </a:solidFill>
+        </p:spPr>
+        <p:style>
+          <a:lnRef idx="2">
+            <a:schemeClr val="accent1">
+              <a:shade val="15000"/>
+            </a:schemeClr>
+          </a:lnRef>
+          <a:fillRef idx="1">
+            <a:schemeClr val="accent1"/>
+          </a:fillRef>
+          <a:effectRef idx="0">
+            <a:schemeClr val="accent1"/>
+          </a:effectRef>
+          <a:fontRef idx="minor">
+            <a:schemeClr val="lt1"/>
+          </a:fontRef>
+        </p:style>
+        <p:txBody>
+          <a:bodyPr rtlCol="0" anchor="ctr"/>
+          <a:lstStyle/>
+          <a:p>
+            <a:pPr algn="ctr"/>
+            <a:endParaRPr lang="ko-KR" altLang="en-US"/>
+          </a:p>
+        </p:txBody>
+      </p:sp>
+      <p:sp>
+        <p:nvSpPr>
+          <p:cNvPr id="98" name="타원 97">
+            <a:extLst>
+              <a:ext uri="{FF2B5EF4-FFF2-40B4-BE49-F238E27FC236}">
+                <a16:creationId xmlns:a16="http://schemas.microsoft.com/office/drawing/2014/main" id="{02426819-7CF5-4A99-E5EB-2C7CB7C55EAC}"/>
+              </a:ext>
+            </a:extLst>
+          </p:cNvPr>
+          <p:cNvSpPr/>
+          <p:nvPr/>
+        </p:nvSpPr>
+        <p:spPr>
+          <a:xfrm>
+            <a:off x="6419131" y="3209501"/>
+            <a:ext cx="120580" cy="115522"/>
+          </a:xfrm>
+          <a:prstGeom prst="ellipse">
+            <a:avLst/>
+          </a:prstGeom>
+          <a:solidFill>
+            <a:srgbClr val="7030A0"/>
+          </a:solidFill>
+        </p:spPr>
+        <p:style>
+          <a:lnRef idx="2">
+            <a:schemeClr val="accent1">
+              <a:shade val="15000"/>
+            </a:schemeClr>
+          </a:lnRef>
+          <a:fillRef idx="1">
+            <a:schemeClr val="accent1"/>
+          </a:fillRef>
+          <a:effectRef idx="0">
+            <a:schemeClr val="accent1"/>
+          </a:effectRef>
+          <a:fontRef idx="minor">
+            <a:schemeClr val="lt1"/>
+          </a:fontRef>
+        </p:style>
+        <p:txBody>
+          <a:bodyPr rtlCol="0" anchor="ctr"/>
+          <a:lstStyle/>
+          <a:p>
+            <a:pPr algn="ctr"/>
+            <a:endParaRPr lang="ko-KR" altLang="en-US"/>
+          </a:p>
+        </p:txBody>
+      </p:sp>
+      <p:sp>
+        <p:nvSpPr>
+          <p:cNvPr id="99" name="타원 98">
+            <a:extLst>
+              <a:ext uri="{FF2B5EF4-FFF2-40B4-BE49-F238E27FC236}">
+                <a16:creationId xmlns:a16="http://schemas.microsoft.com/office/drawing/2014/main" id="{15D7EE0B-BB43-BF00-83B1-17B20927F1DF}"/>
+              </a:ext>
+            </a:extLst>
+          </p:cNvPr>
+          <p:cNvSpPr/>
+          <p:nvPr/>
+        </p:nvSpPr>
+        <p:spPr>
+          <a:xfrm>
+            <a:off x="6661003" y="3503006"/>
+            <a:ext cx="181344" cy="173737"/>
+          </a:xfrm>
+          <a:prstGeom prst="ellipse">
+            <a:avLst/>
+          </a:prstGeom>
+          <a:solidFill>
+            <a:srgbClr val="00B050"/>
+          </a:solidFill>
+        </p:spPr>
+        <p:style>
+          <a:lnRef idx="2">
+            <a:schemeClr val="accent1">
+              <a:shade val="15000"/>
+            </a:schemeClr>
+          </a:lnRef>
+          <a:fillRef idx="1">
+            <a:schemeClr val="accent1"/>
+          </a:fillRef>
+          <a:effectRef idx="0">
+            <a:schemeClr val="accent1"/>
+          </a:effectRef>
+          <a:fontRef idx="minor">
+            <a:schemeClr val="lt1"/>
+          </a:fontRef>
+        </p:style>
+        <p:txBody>
+          <a:bodyPr rtlCol="0" anchor="ctr"/>
+          <a:lstStyle/>
+          <a:p>
+            <a:pPr algn="ctr"/>
+            <a:endParaRPr lang="ko-KR" altLang="en-US"/>
+          </a:p>
+        </p:txBody>
+      </p:sp>
+      <p:sp>
+        <p:nvSpPr>
+          <p:cNvPr id="100" name="타원 99">
+            <a:extLst>
+              <a:ext uri="{FF2B5EF4-FFF2-40B4-BE49-F238E27FC236}">
+                <a16:creationId xmlns:a16="http://schemas.microsoft.com/office/drawing/2014/main" id="{1F0EFEB7-511B-E5C8-3104-D94ABE058DAF}"/>
+              </a:ext>
+            </a:extLst>
+          </p:cNvPr>
+          <p:cNvSpPr/>
+          <p:nvPr/>
+        </p:nvSpPr>
+        <p:spPr>
+          <a:xfrm>
+            <a:off x="7112994" y="3503006"/>
+            <a:ext cx="79543" cy="76206"/>
+          </a:xfrm>
+          <a:prstGeom prst="ellipse">
+            <a:avLst/>
+          </a:prstGeom>
+          <a:solidFill>
+            <a:srgbClr val="FFFF00"/>
+          </a:solidFill>
+        </p:spPr>
+        <p:style>
+          <a:lnRef idx="2">
+            <a:schemeClr val="accent1">
+              <a:shade val="15000"/>
+            </a:schemeClr>
+          </a:lnRef>
+          <a:fillRef idx="1">
+            <a:schemeClr val="accent1"/>
+          </a:fillRef>
+          <a:effectRef idx="0">
+            <a:schemeClr val="accent1"/>
+          </a:effectRef>
+          <a:fontRef idx="minor">
+            <a:schemeClr val="lt1"/>
+          </a:fontRef>
+        </p:style>
+        <p:txBody>
+          <a:bodyPr rtlCol="0" anchor="ctr"/>
+          <a:lstStyle/>
+          <a:p>
+            <a:pPr algn="ctr"/>
+            <a:endParaRPr lang="ko-KR" altLang="en-US"/>
+          </a:p>
+        </p:txBody>
+      </p:sp>
+      <p:sp>
+        <p:nvSpPr>
+          <p:cNvPr id="101" name="타원 100">
+            <a:extLst>
+              <a:ext uri="{FF2B5EF4-FFF2-40B4-BE49-F238E27FC236}">
+                <a16:creationId xmlns:a16="http://schemas.microsoft.com/office/drawing/2014/main" id="{1994EB39-E5CF-1990-3D9F-B1565F824A70}"/>
+              </a:ext>
+            </a:extLst>
+          </p:cNvPr>
+          <p:cNvSpPr/>
+          <p:nvPr/>
+        </p:nvSpPr>
+        <p:spPr>
+          <a:xfrm>
+            <a:off x="7307662" y="3188011"/>
+            <a:ext cx="92580" cy="88697"/>
+          </a:xfrm>
+          <a:prstGeom prst="ellipse">
+            <a:avLst/>
+          </a:prstGeom>
+          <a:solidFill>
+            <a:srgbClr val="FFC000"/>
+          </a:solidFill>
+        </p:spPr>
+        <p:style>
+          <a:lnRef idx="2">
+            <a:schemeClr val="accent1">
+              <a:shade val="15000"/>
+            </a:schemeClr>
+          </a:lnRef>
+          <a:fillRef idx="1">
+            <a:schemeClr val="accent1"/>
+          </a:fillRef>
+          <a:effectRef idx="0">
+            <a:schemeClr val="accent1"/>
+          </a:effectRef>
+          <a:fontRef idx="minor">
+            <a:schemeClr val="lt1"/>
+          </a:fontRef>
+        </p:style>
+        <p:txBody>
+          <a:bodyPr rtlCol="0" anchor="ctr"/>
+          <a:lstStyle/>
+          <a:p>
+            <a:pPr algn="ctr"/>
+            <a:endParaRPr lang="ko-KR" altLang="en-US"/>
+          </a:p>
+        </p:txBody>
+      </p:sp>
+      <p:sp>
+        <p:nvSpPr>
+          <p:cNvPr id="102" name="타원 101">
+            <a:extLst>
+              <a:ext uri="{FF2B5EF4-FFF2-40B4-BE49-F238E27FC236}">
+                <a16:creationId xmlns:a16="http://schemas.microsoft.com/office/drawing/2014/main" id="{4C53AF7C-9572-B94B-AA5C-4301D96D251E}"/>
+              </a:ext>
+            </a:extLst>
+          </p:cNvPr>
+          <p:cNvSpPr/>
+          <p:nvPr/>
+        </p:nvSpPr>
+        <p:spPr>
+          <a:xfrm>
+            <a:off x="6842347" y="2969777"/>
+            <a:ext cx="234768" cy="224920"/>
+          </a:xfrm>
+          <a:prstGeom prst="ellipse">
+            <a:avLst/>
+          </a:prstGeom>
+          <a:solidFill>
+            <a:srgbClr val="FF0000"/>
+          </a:solidFill>
+        </p:spPr>
+        <p:style>
+          <a:lnRef idx="2">
+            <a:schemeClr val="accent1">
+              <a:shade val="15000"/>
+            </a:schemeClr>
+          </a:lnRef>
+          <a:fillRef idx="1">
+            <a:schemeClr val="accent1"/>
+          </a:fillRef>
+          <a:effectRef idx="0">
+            <a:schemeClr val="accent1"/>
+          </a:effectRef>
+          <a:fontRef idx="minor">
+            <a:schemeClr val="lt1"/>
+          </a:fontRef>
+        </p:style>
+        <p:txBody>
+          <a:bodyPr rtlCol="0" anchor="ctr"/>
+          <a:lstStyle/>
+          <a:p>
+            <a:pPr algn="ctr"/>
+            <a:endParaRPr lang="ko-KR" altLang="en-US"/>
+          </a:p>
+        </p:txBody>
+      </p:sp>
+      <p:sp>
+        <p:nvSpPr>
+          <p:cNvPr id="103" name="타원 102">
+            <a:extLst>
+              <a:ext uri="{FF2B5EF4-FFF2-40B4-BE49-F238E27FC236}">
+                <a16:creationId xmlns:a16="http://schemas.microsoft.com/office/drawing/2014/main" id="{49C78B53-8A57-B8FB-529F-84FC8B86BF59}"/>
+              </a:ext>
+            </a:extLst>
+          </p:cNvPr>
+          <p:cNvSpPr/>
+          <p:nvPr/>
+        </p:nvSpPr>
+        <p:spPr>
+          <a:xfrm>
+            <a:off x="2042377" y="921875"/>
+            <a:ext cx="120580" cy="115522"/>
+          </a:xfrm>
+          <a:prstGeom prst="ellipse">
+            <a:avLst/>
+          </a:prstGeom>
+          <a:solidFill>
+            <a:srgbClr val="7030A0"/>
+          </a:solidFill>
+        </p:spPr>
+        <p:style>
+          <a:lnRef idx="2">
+            <a:schemeClr val="accent1">
+              <a:shade val="15000"/>
+            </a:schemeClr>
+          </a:lnRef>
+          <a:fillRef idx="1">
+            <a:schemeClr val="accent1"/>
+          </a:fillRef>
+          <a:effectRef idx="0">
+            <a:schemeClr val="accent1"/>
+          </a:effectRef>
+          <a:fontRef idx="minor">
+            <a:schemeClr val="lt1"/>
+          </a:fontRef>
+        </p:style>
+        <p:txBody>
+          <a:bodyPr rtlCol="0" anchor="ctr"/>
+          <a:lstStyle/>
+          <a:p>
+            <a:pPr algn="ctr"/>
+            <a:endParaRPr lang="ko-KR" altLang="en-US"/>
+          </a:p>
+        </p:txBody>
+      </p:sp>
+      <p:sp>
+        <p:nvSpPr>
+          <p:cNvPr id="104" name="타원 103">
+            <a:extLst>
+              <a:ext uri="{FF2B5EF4-FFF2-40B4-BE49-F238E27FC236}">
+                <a16:creationId xmlns:a16="http://schemas.microsoft.com/office/drawing/2014/main" id="{1875E357-5939-89F6-66B4-C06380823EC2}"/>
+              </a:ext>
+            </a:extLst>
+          </p:cNvPr>
+          <p:cNvSpPr/>
+          <p:nvPr/>
+        </p:nvSpPr>
+        <p:spPr>
+          <a:xfrm>
+            <a:off x="2181728" y="921875"/>
+            <a:ext cx="120580" cy="115522"/>
+          </a:xfrm>
+          <a:prstGeom prst="ellipse">
+            <a:avLst/>
+          </a:prstGeom>
+          <a:solidFill>
+            <a:srgbClr val="FFC000"/>
+          </a:solidFill>
+        </p:spPr>
+        <p:style>
+          <a:lnRef idx="2">
+            <a:schemeClr val="accent1">
+              <a:shade val="15000"/>
+            </a:schemeClr>
+          </a:lnRef>
+          <a:fillRef idx="1">
+            <a:schemeClr val="accent1"/>
+          </a:fillRef>
+          <a:effectRef idx="0">
+            <a:schemeClr val="accent1"/>
+          </a:effectRef>
+          <a:fontRef idx="minor">
+            <a:schemeClr val="lt1"/>
+          </a:fontRef>
+        </p:style>
+        <p:txBody>
+          <a:bodyPr rtlCol="0" anchor="ctr"/>
+          <a:lstStyle/>
+          <a:p>
+            <a:pPr algn="ctr"/>
+            <a:endParaRPr lang="ko-KR" altLang="en-US"/>
+          </a:p>
+        </p:txBody>
+      </p:sp>
+      <p:sp>
+        <p:nvSpPr>
+          <p:cNvPr id="105" name="타원 104">
+            <a:extLst>
+              <a:ext uri="{FF2B5EF4-FFF2-40B4-BE49-F238E27FC236}">
+                <a16:creationId xmlns:a16="http://schemas.microsoft.com/office/drawing/2014/main" id="{1352283C-5504-C55D-2D7B-5EA23FED53B0}"/>
+              </a:ext>
+            </a:extLst>
+          </p:cNvPr>
+          <p:cNvSpPr/>
+          <p:nvPr/>
+        </p:nvSpPr>
+        <p:spPr>
+          <a:xfrm>
+            <a:off x="2112192" y="804231"/>
+            <a:ext cx="120580" cy="115522"/>
+          </a:xfrm>
+          <a:prstGeom prst="ellipse">
+            <a:avLst/>
+          </a:prstGeom>
+          <a:solidFill>
+            <a:srgbClr val="FF0000"/>
+          </a:solidFill>
+        </p:spPr>
+        <p:style>
+          <a:lnRef idx="2">
+            <a:schemeClr val="accent1">
+              <a:shade val="15000"/>
+            </a:schemeClr>
+          </a:lnRef>
+          <a:fillRef idx="1">
+            <a:schemeClr val="accent1"/>
+          </a:fillRef>
+          <a:effectRef idx="0">
+            <a:schemeClr val="accent1"/>
+          </a:effectRef>
+          <a:fontRef idx="minor">
+            <a:schemeClr val="lt1"/>
+          </a:fontRef>
+        </p:style>
+        <p:txBody>
+          <a:bodyPr rtlCol="0" anchor="ctr"/>
+          <a:lstStyle/>
+          <a:p>
+            <a:pPr algn="ctr"/>
+            <a:endParaRPr lang="ko-KR" altLang="en-US"/>
+          </a:p>
+        </p:txBody>
+      </p:sp>
+      <p:sp>
+        <p:nvSpPr>
+          <p:cNvPr id="106" name="타원 105">
+            <a:extLst>
+              <a:ext uri="{FF2B5EF4-FFF2-40B4-BE49-F238E27FC236}">
+                <a16:creationId xmlns:a16="http://schemas.microsoft.com/office/drawing/2014/main" id="{5B81EA6F-5D4F-8382-3602-AA4DD35D7725}"/>
+              </a:ext>
+            </a:extLst>
+          </p:cNvPr>
+          <p:cNvSpPr/>
+          <p:nvPr/>
+        </p:nvSpPr>
+        <p:spPr>
+          <a:xfrm>
+            <a:off x="2333782" y="1373504"/>
+            <a:ext cx="120580" cy="115522"/>
+          </a:xfrm>
+          <a:prstGeom prst="ellipse">
+            <a:avLst/>
+          </a:prstGeom>
+          <a:solidFill>
+            <a:srgbClr val="00B050"/>
+          </a:solidFill>
+        </p:spPr>
+        <p:style>
+          <a:lnRef idx="2">
+            <a:schemeClr val="accent1">
+              <a:shade val="15000"/>
+            </a:schemeClr>
+          </a:lnRef>
+          <a:fillRef idx="1">
+            <a:schemeClr val="accent1"/>
+          </a:fillRef>
+          <a:effectRef idx="0">
+            <a:schemeClr val="accent1"/>
+          </a:effectRef>
+          <a:fontRef idx="minor">
+            <a:schemeClr val="lt1"/>
+          </a:fontRef>
+        </p:style>
+        <p:txBody>
+          <a:bodyPr rtlCol="0" anchor="ctr"/>
+          <a:lstStyle/>
+          <a:p>
+            <a:pPr algn="ctr"/>
+            <a:endParaRPr lang="ko-KR" altLang="en-US"/>
+          </a:p>
+        </p:txBody>
+      </p:sp>
+      <p:sp>
+        <p:nvSpPr>
+          <p:cNvPr id="107" name="타원 106">
+            <a:extLst>
+              <a:ext uri="{FF2B5EF4-FFF2-40B4-BE49-F238E27FC236}">
+                <a16:creationId xmlns:a16="http://schemas.microsoft.com/office/drawing/2014/main" id="{DF61B449-C519-2142-F552-3C068E60D1D3}"/>
+              </a:ext>
+            </a:extLst>
+          </p:cNvPr>
+          <p:cNvSpPr/>
+          <p:nvPr/>
+        </p:nvSpPr>
+        <p:spPr>
+          <a:xfrm>
+            <a:off x="2473133" y="1373504"/>
+            <a:ext cx="120580" cy="115522"/>
+          </a:xfrm>
+          <a:prstGeom prst="ellipse">
+            <a:avLst/>
+          </a:prstGeom>
+          <a:solidFill>
+            <a:srgbClr val="FFC000"/>
+          </a:solidFill>
+        </p:spPr>
+        <p:style>
+          <a:lnRef idx="2">
+            <a:schemeClr val="accent1">
+              <a:shade val="15000"/>
+            </a:schemeClr>
+          </a:lnRef>
+          <a:fillRef idx="1">
+            <a:schemeClr val="accent1"/>
+          </a:fillRef>
+          <a:effectRef idx="0">
+            <a:schemeClr val="accent1"/>
+          </a:effectRef>
+          <a:fontRef idx="minor">
+            <a:schemeClr val="lt1"/>
+          </a:fontRef>
+        </p:style>
+        <p:txBody>
+          <a:bodyPr rtlCol="0" anchor="ctr"/>
+          <a:lstStyle/>
+          <a:p>
+            <a:pPr algn="ctr"/>
+            <a:endParaRPr lang="ko-KR" altLang="en-US"/>
+          </a:p>
+        </p:txBody>
+      </p:sp>
+      <p:sp>
+        <p:nvSpPr>
+          <p:cNvPr id="108" name="타원 107">
+            <a:extLst>
+              <a:ext uri="{FF2B5EF4-FFF2-40B4-BE49-F238E27FC236}">
+                <a16:creationId xmlns:a16="http://schemas.microsoft.com/office/drawing/2014/main" id="{B8371761-6E8D-3EF9-3046-BE268FB90822}"/>
+              </a:ext>
+            </a:extLst>
+          </p:cNvPr>
+          <p:cNvSpPr/>
+          <p:nvPr/>
+        </p:nvSpPr>
+        <p:spPr>
+          <a:xfrm>
+            <a:off x="2403597" y="1255860"/>
+            <a:ext cx="120580" cy="115522"/>
+          </a:xfrm>
+          <a:prstGeom prst="ellipse">
+            <a:avLst/>
+          </a:prstGeom>
+          <a:solidFill>
+            <a:srgbClr val="FF0000"/>
+          </a:solidFill>
+        </p:spPr>
+        <p:style>
+          <a:lnRef idx="2">
+            <a:schemeClr val="accent1">
+              <a:shade val="15000"/>
+            </a:schemeClr>
+          </a:lnRef>
+          <a:fillRef idx="1">
+            <a:schemeClr val="accent1"/>
+          </a:fillRef>
+          <a:effectRef idx="0">
+            <a:schemeClr val="accent1"/>
+          </a:effectRef>
+          <a:fontRef idx="minor">
+            <a:schemeClr val="lt1"/>
+          </a:fontRef>
+        </p:style>
+        <p:txBody>
+          <a:bodyPr rtlCol="0" anchor="ctr"/>
+          <a:lstStyle/>
+          <a:p>
+            <a:pPr algn="ctr"/>
+            <a:endParaRPr lang="ko-KR" altLang="en-US"/>
+          </a:p>
+        </p:txBody>
+      </p:sp>
+      <p:sp>
+        <p:nvSpPr>
+          <p:cNvPr id="109" name="원호 108">
+            <a:extLst>
+              <a:ext uri="{FF2B5EF4-FFF2-40B4-BE49-F238E27FC236}">
+                <a16:creationId xmlns:a16="http://schemas.microsoft.com/office/drawing/2014/main" id="{7B13077B-521A-9486-586B-C3553006ED4F}"/>
+              </a:ext>
+            </a:extLst>
+          </p:cNvPr>
+          <p:cNvSpPr/>
+          <p:nvPr/>
+        </p:nvSpPr>
+        <p:spPr>
+          <a:xfrm rot="16200000">
+            <a:off x="4503455" y="1912946"/>
+            <a:ext cx="2639898" cy="2348631"/>
+          </a:xfrm>
+          <a:prstGeom prst="arc">
+            <a:avLst>
+              <a:gd name="adj1" fmla="val 16200000"/>
+              <a:gd name="adj2" fmla="val 281922"/>
+            </a:avLst>
+          </a:prstGeom>
+          <a:noFill/>
+          <a:ln w="28575">
+            <a:solidFill>
+              <a:schemeClr val="tx1"/>
+            </a:solidFill>
+            <a:prstDash val="dash"/>
+          </a:ln>
+        </p:spPr>
+        <p:style>
+          <a:lnRef idx="1">
+            <a:schemeClr val="accent1"/>
+          </a:lnRef>
+          <a:fillRef idx="0">
+            <a:schemeClr val="accent1"/>
+          </a:fillRef>
+          <a:effectRef idx="0">
+            <a:schemeClr val="accent1"/>
+          </a:effectRef>
+          <a:fontRef idx="minor">
+            <a:schemeClr val="tx1"/>
+          </a:fontRef>
+        </p:style>
+        <p:txBody>
+          <a:bodyPr rtlCol="0" anchor="ctr"/>
+          <a:lstStyle/>
+          <a:p>
+            <a:pPr algn="ctr"/>
+            <a:endParaRPr lang="ko-KR" altLang="en-US"/>
+          </a:p>
+        </p:txBody>
+      </p:sp>
+      <p:cxnSp>
+        <p:nvCxnSpPr>
+          <p:cNvPr id="111" name="연결선: 구부러짐 110">
+            <a:extLst>
+              <a:ext uri="{FF2B5EF4-FFF2-40B4-BE49-F238E27FC236}">
+                <a16:creationId xmlns:a16="http://schemas.microsoft.com/office/drawing/2014/main" id="{84806DFA-8FAC-10FD-1F10-C4714876CAEB}"/>
+              </a:ext>
+            </a:extLst>
+          </p:cNvPr>
+          <p:cNvCxnSpPr>
+            <a:cxnSpLocks/>
+            <a:stCxn id="48" idx="1"/>
+            <a:endCxn id="75" idx="2"/>
+          </p:cNvCxnSpPr>
+          <p:nvPr/>
+        </p:nvCxnSpPr>
+        <p:spPr>
+          <a:xfrm rot="10800000">
+            <a:off x="4649090" y="3548565"/>
+            <a:ext cx="1020613" cy="500499"/>
+          </a:xfrm>
+          <a:prstGeom prst="curvedConnector2">
+            <a:avLst/>
+          </a:prstGeom>
+          <a:ln w="28575">
+            <a:solidFill>
+              <a:schemeClr val="tx1"/>
+            </a:solidFill>
+            <a:tailEnd type="triangle"/>
+          </a:ln>
+        </p:spPr>
+        <p:style>
+          <a:lnRef idx="1">
+            <a:schemeClr val="accent1"/>
+          </a:lnRef>
+          <a:fillRef idx="0">
+            <a:schemeClr val="accent1"/>
+          </a:fillRef>
+          <a:effectRef idx="0">
+            <a:schemeClr val="accent1"/>
+          </a:effectRef>
+          <a:fontRef idx="minor">
+            <a:schemeClr val="tx1"/>
+          </a:fontRef>
+        </p:style>
+      </p:cxnSp>
+      <p:sp>
+        <p:nvSpPr>
+          <p:cNvPr id="114" name="화살표: 위쪽 113">
+            <a:extLst>
+              <a:ext uri="{FF2B5EF4-FFF2-40B4-BE49-F238E27FC236}">
+                <a16:creationId xmlns:a16="http://schemas.microsoft.com/office/drawing/2014/main" id="{7142E4A9-CAF8-9F76-19FD-1C3B1575F6DA}"/>
+              </a:ext>
+            </a:extLst>
+          </p:cNvPr>
+          <p:cNvSpPr/>
+          <p:nvPr/>
+        </p:nvSpPr>
+        <p:spPr>
+          <a:xfrm rot="7200000">
+            <a:off x="3373773" y="1135288"/>
+            <a:ext cx="247222" cy="828364"/>
+          </a:xfrm>
+          <a:prstGeom prst="upArrow">
+            <a:avLst/>
+          </a:prstGeom>
+          <a:solidFill>
+            <a:schemeClr val="tx1"/>
+          </a:solidFill>
+        </p:spPr>
+        <p:style>
+          <a:lnRef idx="2">
+            <a:schemeClr val="accent1">
+              <a:shade val="15000"/>
+            </a:schemeClr>
+          </a:lnRef>
+          <a:fillRef idx="1">
+            <a:schemeClr val="accent1"/>
+          </a:fillRef>
+          <a:effectRef idx="0">
+            <a:schemeClr val="accent1"/>
+          </a:effectRef>
+          <a:fontRef idx="minor">
+            <a:schemeClr val="lt1"/>
+          </a:fontRef>
+        </p:style>
+        <p:txBody>
+          <a:bodyPr rtlCol="0" anchor="ctr"/>
+          <a:lstStyle/>
+          <a:p>
+            <a:pPr algn="ctr"/>
+            <a:endParaRPr lang="ko-KR" altLang="en-US" dirty="0"/>
+          </a:p>
+        </p:txBody>
+      </p:sp>
+      <p:sp>
+        <p:nvSpPr>
+          <p:cNvPr id="115" name="타원 114">
+            <a:extLst>
+              <a:ext uri="{FF2B5EF4-FFF2-40B4-BE49-F238E27FC236}">
+                <a16:creationId xmlns:a16="http://schemas.microsoft.com/office/drawing/2014/main" id="{0E132080-5691-9491-E4BE-FDFF3C067B9B}"/>
+              </a:ext>
+            </a:extLst>
+          </p:cNvPr>
+          <p:cNvSpPr/>
+          <p:nvPr/>
+        </p:nvSpPr>
+        <p:spPr>
+          <a:xfrm>
+            <a:off x="5352317" y="2182046"/>
+            <a:ext cx="359653" cy="344566"/>
+          </a:xfrm>
+          <a:prstGeom prst="ellipse">
+            <a:avLst/>
+          </a:prstGeom>
+          <a:solidFill>
+            <a:schemeClr val="bg1">
+              <a:lumMod val="75000"/>
+            </a:schemeClr>
+          </a:solidFill>
+        </p:spPr>
+        <p:style>
+          <a:lnRef idx="2">
+            <a:schemeClr val="accent1">
+              <a:shade val="15000"/>
+            </a:schemeClr>
+          </a:lnRef>
+          <a:fillRef idx="1">
+            <a:schemeClr val="accent1"/>
+          </a:fillRef>
+          <a:effectRef idx="0">
+            <a:schemeClr val="accent1"/>
+          </a:effectRef>
+          <a:fontRef idx="minor">
+            <a:schemeClr val="lt1"/>
+          </a:fontRef>
+        </p:style>
+        <p:txBody>
+          <a:bodyPr rtlCol="0" anchor="ctr"/>
+          <a:lstStyle/>
+          <a:p>
+            <a:pPr algn="ctr"/>
+            <a:endParaRPr lang="ko-KR" altLang="en-US"/>
+          </a:p>
+        </p:txBody>
+      </p:sp>
+      <p:sp>
+        <p:nvSpPr>
+          <p:cNvPr id="116" name="타원 115">
+            <a:extLst>
+              <a:ext uri="{FF2B5EF4-FFF2-40B4-BE49-F238E27FC236}">
+                <a16:creationId xmlns:a16="http://schemas.microsoft.com/office/drawing/2014/main" id="{A6F7D513-7E8C-3DD0-EDDF-4090E4852DF0}"/>
+              </a:ext>
+            </a:extLst>
+          </p:cNvPr>
+          <p:cNvSpPr/>
+          <p:nvPr/>
+        </p:nvSpPr>
+        <p:spPr>
+          <a:xfrm>
+            <a:off x="5838754" y="2134859"/>
+            <a:ext cx="463007" cy="443584"/>
+          </a:xfrm>
+          <a:prstGeom prst="ellipse">
+            <a:avLst/>
+          </a:prstGeom>
+          <a:solidFill>
+            <a:schemeClr val="bg1">
+              <a:lumMod val="75000"/>
+            </a:schemeClr>
+          </a:solidFill>
+        </p:spPr>
+        <p:style>
+          <a:lnRef idx="2">
+            <a:schemeClr val="accent1">
+              <a:shade val="15000"/>
+            </a:schemeClr>
+          </a:lnRef>
+          <a:fillRef idx="1">
+            <a:schemeClr val="accent1"/>
+          </a:fillRef>
+          <a:effectRef idx="0">
+            <a:schemeClr val="accent1"/>
+          </a:effectRef>
+          <a:fontRef idx="minor">
+            <a:schemeClr val="lt1"/>
+          </a:fontRef>
+        </p:style>
+        <p:txBody>
+          <a:bodyPr rtlCol="0" anchor="ctr"/>
+          <a:lstStyle/>
+          <a:p>
+            <a:pPr algn="ctr"/>
+            <a:endParaRPr lang="ko-KR" altLang="en-US"/>
+          </a:p>
+        </p:txBody>
+      </p:sp>
+      <p:sp>
+        <p:nvSpPr>
+          <p:cNvPr id="117" name="타원 116">
+            <a:extLst>
+              <a:ext uri="{FF2B5EF4-FFF2-40B4-BE49-F238E27FC236}">
+                <a16:creationId xmlns:a16="http://schemas.microsoft.com/office/drawing/2014/main" id="{847185A3-9CB1-4CA8-CD1D-8765E0486689}"/>
+              </a:ext>
+            </a:extLst>
+          </p:cNvPr>
+          <p:cNvSpPr/>
+          <p:nvPr/>
+        </p:nvSpPr>
+        <p:spPr>
+          <a:xfrm>
+            <a:off x="5953007" y="2338735"/>
+            <a:ext cx="120580" cy="115522"/>
+          </a:xfrm>
+          <a:prstGeom prst="ellipse">
+            <a:avLst/>
+          </a:prstGeom>
+          <a:solidFill>
+            <a:srgbClr val="7030A0"/>
+          </a:solidFill>
+        </p:spPr>
+        <p:style>
+          <a:lnRef idx="2">
+            <a:schemeClr val="accent1">
+              <a:shade val="15000"/>
+            </a:schemeClr>
+          </a:lnRef>
+          <a:fillRef idx="1">
+            <a:schemeClr val="accent1"/>
+          </a:fillRef>
+          <a:effectRef idx="0">
+            <a:schemeClr val="accent1"/>
+          </a:effectRef>
+          <a:fontRef idx="minor">
+            <a:schemeClr val="lt1"/>
+          </a:fontRef>
+        </p:style>
+        <p:txBody>
+          <a:bodyPr rtlCol="0" anchor="ctr"/>
+          <a:lstStyle/>
+          <a:p>
+            <a:pPr algn="ctr"/>
+            <a:endParaRPr lang="ko-KR" altLang="en-US"/>
+          </a:p>
+        </p:txBody>
+      </p:sp>
+      <p:sp>
+        <p:nvSpPr>
+          <p:cNvPr id="118" name="타원 117">
+            <a:extLst>
+              <a:ext uri="{FF2B5EF4-FFF2-40B4-BE49-F238E27FC236}">
+                <a16:creationId xmlns:a16="http://schemas.microsoft.com/office/drawing/2014/main" id="{E25F6966-8A19-EFD6-A235-BEAB40666E23}"/>
+              </a:ext>
+            </a:extLst>
+          </p:cNvPr>
+          <p:cNvSpPr/>
+          <p:nvPr/>
+        </p:nvSpPr>
+        <p:spPr>
+          <a:xfrm>
+            <a:off x="6092358" y="2338735"/>
+            <a:ext cx="120580" cy="115522"/>
+          </a:xfrm>
+          <a:prstGeom prst="ellipse">
+            <a:avLst/>
+          </a:prstGeom>
+          <a:solidFill>
+            <a:srgbClr val="FFFF00"/>
+          </a:solidFill>
+        </p:spPr>
+        <p:style>
+          <a:lnRef idx="2">
+            <a:schemeClr val="accent1">
+              <a:shade val="15000"/>
+            </a:schemeClr>
+          </a:lnRef>
+          <a:fillRef idx="1">
+            <a:schemeClr val="accent1"/>
+          </a:fillRef>
+          <a:effectRef idx="0">
+            <a:schemeClr val="accent1"/>
+          </a:effectRef>
+          <a:fontRef idx="minor">
+            <a:schemeClr val="lt1"/>
+          </a:fontRef>
+        </p:style>
+        <p:txBody>
+          <a:bodyPr rtlCol="0" anchor="ctr"/>
+          <a:lstStyle/>
+          <a:p>
+            <a:pPr algn="ctr"/>
+            <a:endParaRPr lang="ko-KR" altLang="en-US"/>
+          </a:p>
+        </p:txBody>
+      </p:sp>
+      <p:sp>
+        <p:nvSpPr>
+          <p:cNvPr id="119" name="타원 118">
+            <a:extLst>
+              <a:ext uri="{FF2B5EF4-FFF2-40B4-BE49-F238E27FC236}">
+                <a16:creationId xmlns:a16="http://schemas.microsoft.com/office/drawing/2014/main" id="{AD8FF88E-1C7D-0F9F-5DF0-45E902227CBB}"/>
+              </a:ext>
+            </a:extLst>
+          </p:cNvPr>
+          <p:cNvSpPr/>
+          <p:nvPr/>
+        </p:nvSpPr>
+        <p:spPr>
+          <a:xfrm>
+            <a:off x="6022822" y="2221091"/>
+            <a:ext cx="120580" cy="115522"/>
+          </a:xfrm>
+          <a:prstGeom prst="ellipse">
+            <a:avLst/>
+          </a:prstGeom>
+          <a:solidFill>
+            <a:srgbClr val="FFC000"/>
+          </a:solidFill>
+        </p:spPr>
+        <p:style>
+          <a:lnRef idx="2">
+            <a:schemeClr val="accent1">
+              <a:shade val="15000"/>
+            </a:schemeClr>
+          </a:lnRef>
+          <a:fillRef idx="1">
+            <a:schemeClr val="accent1"/>
+          </a:fillRef>
+          <a:effectRef idx="0">
+            <a:schemeClr val="accent1"/>
+          </a:effectRef>
+          <a:fontRef idx="minor">
+            <a:schemeClr val="lt1"/>
+          </a:fontRef>
+        </p:style>
+        <p:txBody>
+          <a:bodyPr rtlCol="0" anchor="ctr"/>
+          <a:lstStyle/>
+          <a:p>
+            <a:pPr algn="ctr"/>
+            <a:endParaRPr lang="ko-KR" altLang="en-US"/>
+          </a:p>
+        </p:txBody>
+      </p:sp>
+      <p:sp>
+        <p:nvSpPr>
+          <p:cNvPr id="120" name="타원 119">
+            <a:extLst>
+              <a:ext uri="{FF2B5EF4-FFF2-40B4-BE49-F238E27FC236}">
+                <a16:creationId xmlns:a16="http://schemas.microsoft.com/office/drawing/2014/main" id="{FC340BD2-7A10-98F4-FB4C-CB37E2F893E9}"/>
+              </a:ext>
+            </a:extLst>
+          </p:cNvPr>
+          <p:cNvSpPr/>
+          <p:nvPr/>
+        </p:nvSpPr>
+        <p:spPr>
+          <a:xfrm>
+            <a:off x="5401671" y="2344657"/>
+            <a:ext cx="120580" cy="115522"/>
+          </a:xfrm>
+          <a:prstGeom prst="ellipse">
+            <a:avLst/>
+          </a:prstGeom>
+          <a:solidFill>
+            <a:srgbClr val="7030A0"/>
+          </a:solidFill>
+        </p:spPr>
+        <p:style>
+          <a:lnRef idx="2">
+            <a:schemeClr val="accent1">
+              <a:shade val="15000"/>
+            </a:schemeClr>
+          </a:lnRef>
+          <a:fillRef idx="1">
+            <a:schemeClr val="accent1"/>
+          </a:fillRef>
+          <a:effectRef idx="0">
+            <a:schemeClr val="accent1"/>
+          </a:effectRef>
+          <a:fontRef idx="minor">
+            <a:schemeClr val="lt1"/>
+          </a:fontRef>
+        </p:style>
+        <p:txBody>
+          <a:bodyPr rtlCol="0" anchor="ctr"/>
+          <a:lstStyle/>
+          <a:p>
+            <a:pPr algn="ctr"/>
+            <a:endParaRPr lang="ko-KR" altLang="en-US"/>
+          </a:p>
+        </p:txBody>
+      </p:sp>
+      <p:sp>
+        <p:nvSpPr>
+          <p:cNvPr id="121" name="타원 120">
+            <a:extLst>
+              <a:ext uri="{FF2B5EF4-FFF2-40B4-BE49-F238E27FC236}">
+                <a16:creationId xmlns:a16="http://schemas.microsoft.com/office/drawing/2014/main" id="{4D989561-528A-C8B2-3AFE-2CA2A681D9D8}"/>
+              </a:ext>
+            </a:extLst>
+          </p:cNvPr>
+          <p:cNvSpPr/>
+          <p:nvPr/>
+        </p:nvSpPr>
+        <p:spPr>
+          <a:xfrm>
+            <a:off x="5541022" y="2344657"/>
+            <a:ext cx="120580" cy="115522"/>
+          </a:xfrm>
+          <a:prstGeom prst="ellipse">
+            <a:avLst/>
+          </a:prstGeom>
+          <a:solidFill>
+            <a:srgbClr val="FFC000"/>
+          </a:solidFill>
+        </p:spPr>
+        <p:style>
+          <a:lnRef idx="2">
+            <a:schemeClr val="accent1">
+              <a:shade val="15000"/>
+            </a:schemeClr>
+          </a:lnRef>
+          <a:fillRef idx="1">
+            <a:schemeClr val="accent1"/>
+          </a:fillRef>
+          <a:effectRef idx="0">
+            <a:schemeClr val="accent1"/>
+          </a:effectRef>
+          <a:fontRef idx="minor">
+            <a:schemeClr val="lt1"/>
+          </a:fontRef>
+        </p:style>
+        <p:txBody>
+          <a:bodyPr rtlCol="0" anchor="ctr"/>
+          <a:lstStyle/>
+          <a:p>
+            <a:pPr algn="ctr"/>
+            <a:endParaRPr lang="ko-KR" altLang="en-US"/>
+          </a:p>
+        </p:txBody>
+      </p:sp>
+      <p:sp>
+        <p:nvSpPr>
+          <p:cNvPr id="122" name="타원 121">
+            <a:extLst>
+              <a:ext uri="{FF2B5EF4-FFF2-40B4-BE49-F238E27FC236}">
+                <a16:creationId xmlns:a16="http://schemas.microsoft.com/office/drawing/2014/main" id="{AA94FE50-9B9B-26DB-392F-BE25C4592834}"/>
+              </a:ext>
+            </a:extLst>
+          </p:cNvPr>
+          <p:cNvSpPr/>
+          <p:nvPr/>
+        </p:nvSpPr>
+        <p:spPr>
+          <a:xfrm>
+            <a:off x="5471486" y="2227013"/>
+            <a:ext cx="120580" cy="115522"/>
+          </a:xfrm>
+          <a:prstGeom prst="ellipse">
+            <a:avLst/>
+          </a:prstGeom>
+          <a:solidFill>
+            <a:srgbClr val="FF0000"/>
+          </a:solidFill>
+        </p:spPr>
+        <p:style>
+          <a:lnRef idx="2">
+            <a:schemeClr val="accent1">
+              <a:shade val="15000"/>
+            </a:schemeClr>
+          </a:lnRef>
+          <a:fillRef idx="1">
+            <a:schemeClr val="accent1"/>
+          </a:fillRef>
+          <a:effectRef idx="0">
+            <a:schemeClr val="accent1"/>
+          </a:effectRef>
+          <a:fontRef idx="minor">
+            <a:schemeClr val="lt1"/>
+          </a:fontRef>
+        </p:style>
+        <p:txBody>
+          <a:bodyPr rtlCol="0" anchor="ctr"/>
+          <a:lstStyle/>
+          <a:p>
+            <a:pPr algn="ctr"/>
+            <a:endParaRPr lang="ko-KR" altLang="en-US"/>
+          </a:p>
+        </p:txBody>
+      </p:sp>
+      <p:sp>
+        <p:nvSpPr>
+          <p:cNvPr id="130" name="화살표: 위쪽 129">
+            <a:extLst>
+              <a:ext uri="{FF2B5EF4-FFF2-40B4-BE49-F238E27FC236}">
+                <a16:creationId xmlns:a16="http://schemas.microsoft.com/office/drawing/2014/main" id="{0FA72858-8DB7-9531-6671-3EE42744B1BD}"/>
+              </a:ext>
+            </a:extLst>
+          </p:cNvPr>
+          <p:cNvSpPr/>
+          <p:nvPr/>
+        </p:nvSpPr>
+        <p:spPr>
+          <a:xfrm rot="7200000">
+            <a:off x="4814616" y="2111163"/>
+            <a:ext cx="247222" cy="261807"/>
+          </a:xfrm>
+          <a:prstGeom prst="upArrow">
+            <a:avLst/>
+          </a:prstGeom>
+          <a:solidFill>
+            <a:schemeClr val="bg1">
+              <a:lumMod val="75000"/>
+            </a:schemeClr>
+          </a:solidFill>
+        </p:spPr>
+        <p:style>
+          <a:lnRef idx="2">
+            <a:schemeClr val="accent1">
+              <a:shade val="15000"/>
+            </a:schemeClr>
+          </a:lnRef>
+          <a:fillRef idx="1">
+            <a:schemeClr val="accent1"/>
+          </a:fillRef>
+          <a:effectRef idx="0">
+            <a:schemeClr val="accent1"/>
+          </a:effectRef>
+          <a:fontRef idx="minor">
+            <a:schemeClr val="lt1"/>
+          </a:fontRef>
+        </p:style>
+        <p:txBody>
+          <a:bodyPr rtlCol="0" anchor="ctr"/>
+          <a:lstStyle/>
+          <a:p>
+            <a:pPr algn="ctr"/>
+            <a:endParaRPr lang="ko-KR" altLang="en-US" dirty="0"/>
+          </a:p>
+        </p:txBody>
+      </p:sp>
+      <p:sp>
+        <p:nvSpPr>
+          <p:cNvPr id="131" name="TextBox 130">
+            <a:extLst>
+              <a:ext uri="{FF2B5EF4-FFF2-40B4-BE49-F238E27FC236}">
+                <a16:creationId xmlns:a16="http://schemas.microsoft.com/office/drawing/2014/main" id="{1610AB90-5838-D34A-0A9C-877EE22262D8}"/>
+              </a:ext>
+            </a:extLst>
+          </p:cNvPr>
+          <p:cNvSpPr txBox="1"/>
+          <p:nvPr/>
+        </p:nvSpPr>
+        <p:spPr>
+          <a:xfrm>
+            <a:off x="3752465" y="1729565"/>
+            <a:ext cx="1385231" cy="400110"/>
+          </a:xfrm>
+          <a:prstGeom prst="rect">
+            <a:avLst/>
+          </a:prstGeom>
+          <a:noFill/>
+        </p:spPr>
+        <p:txBody>
+          <a:bodyPr wrap="square" rtlCol="0">
+            <a:spAutoFit/>
+          </a:bodyPr>
+          <a:lstStyle/>
+          <a:p>
+            <a:r>
+              <a:rPr lang="en-US" altLang="ko-KR" sz="1000" dirty="0"/>
+              <a:t>Relative magnitude</a:t>
+            </a:r>
+            <a:r>
+              <a:rPr lang="ko-KR" altLang="en-US" sz="1000" dirty="0"/>
+              <a:t> </a:t>
+            </a:r>
+            <a:r>
+              <a:rPr lang="en-US" altLang="ko-KR" sz="1000" dirty="0"/>
+              <a:t>of</a:t>
+            </a:r>
+            <a:r>
+              <a:rPr lang="ko-KR" altLang="en-US" sz="1000" dirty="0"/>
+              <a:t> </a:t>
+            </a:r>
+            <a:r>
+              <a:rPr lang="en-US" altLang="ko-KR" sz="1000" dirty="0"/>
+              <a:t>events for each comm.</a:t>
+            </a:r>
+            <a:endParaRPr lang="ko-KR" altLang="en-US" sz="1000" dirty="0"/>
+          </a:p>
+        </p:txBody>
+      </p:sp>
+      <p:cxnSp>
+        <p:nvCxnSpPr>
+          <p:cNvPr id="135" name="연결선: 구부러짐 134">
+            <a:extLst>
+              <a:ext uri="{FF2B5EF4-FFF2-40B4-BE49-F238E27FC236}">
+                <a16:creationId xmlns:a16="http://schemas.microsoft.com/office/drawing/2014/main" id="{4CFCDE48-F384-3B97-A3DD-A2B4C648A970}"/>
+              </a:ext>
+            </a:extLst>
+          </p:cNvPr>
+          <p:cNvCxnSpPr>
+            <a:cxnSpLocks/>
+            <a:stCxn id="183" idx="6"/>
+          </p:cNvCxnSpPr>
+          <p:nvPr/>
+        </p:nvCxnSpPr>
+        <p:spPr>
+          <a:xfrm>
+            <a:off x="6462374" y="2505038"/>
+            <a:ext cx="225121" cy="553830"/>
+          </a:xfrm>
+          <a:prstGeom prst="curvedConnector2">
+            <a:avLst/>
+          </a:prstGeom>
+          <a:ln w="28575">
+            <a:solidFill>
+              <a:schemeClr val="tx1"/>
+            </a:solidFill>
+            <a:tailEnd type="triangle"/>
+          </a:ln>
+        </p:spPr>
+        <p:style>
+          <a:lnRef idx="1">
+            <a:schemeClr val="accent1"/>
+          </a:lnRef>
+          <a:fillRef idx="0">
+            <a:schemeClr val="accent1"/>
+          </a:fillRef>
+          <a:effectRef idx="0">
+            <a:schemeClr val="accent1"/>
+          </a:effectRef>
+          <a:fontRef idx="minor">
+            <a:schemeClr val="tx1"/>
+          </a:fontRef>
+        </p:style>
+      </p:cxnSp>
+      <p:cxnSp>
+        <p:nvCxnSpPr>
+          <p:cNvPr id="137" name="연결선: 구부러짐 136">
+            <a:extLst>
+              <a:ext uri="{FF2B5EF4-FFF2-40B4-BE49-F238E27FC236}">
+                <a16:creationId xmlns:a16="http://schemas.microsoft.com/office/drawing/2014/main" id="{DB41038D-3911-161C-DA14-E5CD13FFE713}"/>
+              </a:ext>
+            </a:extLst>
+          </p:cNvPr>
+          <p:cNvCxnSpPr>
+            <a:cxnSpLocks/>
+            <a:stCxn id="7" idx="0"/>
+          </p:cNvCxnSpPr>
+          <p:nvPr/>
+        </p:nvCxnSpPr>
+        <p:spPr>
+          <a:xfrm rot="5400000" flipH="1" flipV="1">
+            <a:off x="6314683" y="2258089"/>
+            <a:ext cx="1303395" cy="13296"/>
+          </a:xfrm>
+          <a:prstGeom prst="curvedConnector3">
+            <a:avLst>
+              <a:gd name="adj1" fmla="val 50000"/>
+            </a:avLst>
+          </a:prstGeom>
+          <a:ln w="28575">
+            <a:solidFill>
+              <a:schemeClr val="tx1"/>
+            </a:solidFill>
+            <a:tailEnd type="triangle"/>
+          </a:ln>
+        </p:spPr>
+        <p:style>
+          <a:lnRef idx="1">
+            <a:schemeClr val="accent1"/>
+          </a:lnRef>
+          <a:fillRef idx="0">
+            <a:schemeClr val="accent1"/>
+          </a:fillRef>
+          <a:effectRef idx="0">
+            <a:schemeClr val="accent1"/>
+          </a:effectRef>
+          <a:fontRef idx="minor">
+            <a:schemeClr val="tx1"/>
+          </a:fontRef>
+        </p:style>
+      </p:cxnSp>
+      <p:sp>
+        <p:nvSpPr>
+          <p:cNvPr id="141" name="타원 140">
+            <a:extLst>
+              <a:ext uri="{FF2B5EF4-FFF2-40B4-BE49-F238E27FC236}">
+                <a16:creationId xmlns:a16="http://schemas.microsoft.com/office/drawing/2014/main" id="{EEBA084C-9164-7A3B-50FA-171C761F6F1E}"/>
+              </a:ext>
+            </a:extLst>
+          </p:cNvPr>
+          <p:cNvSpPr/>
+          <p:nvPr/>
+        </p:nvSpPr>
+        <p:spPr>
+          <a:xfrm>
+            <a:off x="5757370" y="621093"/>
+            <a:ext cx="2348630" cy="851770"/>
+          </a:xfrm>
+          <a:prstGeom prst="ellipse">
+            <a:avLst/>
+          </a:prstGeom>
+          <a:solidFill>
+            <a:schemeClr val="accent4">
+              <a:lumMod val="20000"/>
+              <a:lumOff val="80000"/>
+            </a:schemeClr>
+          </a:solidFill>
+          <a:ln>
+            <a:solidFill>
+              <a:schemeClr val="tx1"/>
+            </a:solidFill>
+          </a:ln>
+        </p:spPr>
+        <p:style>
+          <a:lnRef idx="2">
+            <a:schemeClr val="accent1">
+              <a:shade val="15000"/>
+            </a:schemeClr>
+          </a:lnRef>
+          <a:fillRef idx="1">
+            <a:schemeClr val="accent1"/>
+          </a:fillRef>
+          <a:effectRef idx="0">
+            <a:schemeClr val="accent1"/>
+          </a:effectRef>
+          <a:fontRef idx="minor">
+            <a:schemeClr val="lt1"/>
+          </a:fontRef>
+        </p:style>
+        <p:txBody>
+          <a:bodyPr rtlCol="0" anchor="ctr"/>
+          <a:lstStyle/>
+          <a:p>
+            <a:pPr algn="ctr"/>
+            <a:endParaRPr lang="ko-KR" altLang="en-US"/>
+          </a:p>
+        </p:txBody>
+      </p:sp>
+      <p:sp>
+        <p:nvSpPr>
+          <p:cNvPr id="142" name="TextBox 141">
+            <a:extLst>
+              <a:ext uri="{FF2B5EF4-FFF2-40B4-BE49-F238E27FC236}">
+                <a16:creationId xmlns:a16="http://schemas.microsoft.com/office/drawing/2014/main" id="{ED2CBDFC-B8BD-4F83-569F-7AD27E3AF977}"/>
+              </a:ext>
+            </a:extLst>
+          </p:cNvPr>
+          <p:cNvSpPr txBox="1"/>
+          <p:nvPr/>
+        </p:nvSpPr>
+        <p:spPr>
+          <a:xfrm>
+            <a:off x="6419131" y="170084"/>
+            <a:ext cx="938618" cy="376733"/>
+          </a:xfrm>
+          <a:prstGeom prst="rect">
+            <a:avLst/>
+          </a:prstGeom>
+          <a:noFill/>
+        </p:spPr>
+        <p:txBody>
+          <a:bodyPr wrap="square" rtlCol="0">
+            <a:spAutoFit/>
+          </a:bodyPr>
+          <a:lstStyle/>
+          <a:p>
+            <a:r>
+              <a:rPr lang="en-US" altLang="ko-KR" dirty="0"/>
+              <a:t>Activity</a:t>
+            </a:r>
+            <a:endParaRPr lang="ko-KR" altLang="en-US" dirty="0"/>
+          </a:p>
+        </p:txBody>
+      </p:sp>
+      <p:cxnSp>
+        <p:nvCxnSpPr>
+          <p:cNvPr id="143" name="연결선: 구부러짐 142">
+            <a:extLst>
+              <a:ext uri="{FF2B5EF4-FFF2-40B4-BE49-F238E27FC236}">
+                <a16:creationId xmlns:a16="http://schemas.microsoft.com/office/drawing/2014/main" id="{5EC68208-783D-6465-12A4-87045E369E2D}"/>
+              </a:ext>
+            </a:extLst>
+          </p:cNvPr>
+          <p:cNvCxnSpPr>
+            <a:cxnSpLocks/>
+            <a:stCxn id="141" idx="6"/>
+            <a:endCxn id="7" idx="6"/>
+          </p:cNvCxnSpPr>
+          <p:nvPr/>
+        </p:nvCxnSpPr>
+        <p:spPr>
+          <a:xfrm>
+            <a:off x="8106000" y="1046979"/>
+            <a:ext cx="28046" cy="2295341"/>
+          </a:xfrm>
+          <a:prstGeom prst="curvedConnector3">
+            <a:avLst>
+              <a:gd name="adj1" fmla="val 2446802"/>
+            </a:avLst>
+          </a:prstGeom>
+          <a:ln w="28575">
+            <a:solidFill>
+              <a:schemeClr val="tx1"/>
+            </a:solidFill>
+            <a:tailEnd type="triangle"/>
+          </a:ln>
+        </p:spPr>
+        <p:style>
+          <a:lnRef idx="1">
+            <a:schemeClr val="accent1"/>
+          </a:lnRef>
+          <a:fillRef idx="0">
+            <a:schemeClr val="accent1"/>
+          </a:fillRef>
+          <a:effectRef idx="0">
+            <a:schemeClr val="accent1"/>
+          </a:effectRef>
+          <a:fontRef idx="minor">
+            <a:schemeClr val="tx1"/>
+          </a:fontRef>
+        </p:style>
+      </p:cxnSp>
+      <p:sp>
+        <p:nvSpPr>
+          <p:cNvPr id="148" name="타원 147">
+            <a:extLst>
+              <a:ext uri="{FF2B5EF4-FFF2-40B4-BE49-F238E27FC236}">
+                <a16:creationId xmlns:a16="http://schemas.microsoft.com/office/drawing/2014/main" id="{373D58FB-A53F-B90B-B23E-2E211BB73FB4}"/>
+              </a:ext>
+            </a:extLst>
+          </p:cNvPr>
+          <p:cNvSpPr/>
+          <p:nvPr/>
+        </p:nvSpPr>
+        <p:spPr>
+          <a:xfrm>
+            <a:off x="6373637" y="815017"/>
+            <a:ext cx="254926" cy="244233"/>
+          </a:xfrm>
+          <a:prstGeom prst="ellipse">
+            <a:avLst/>
+          </a:prstGeom>
+          <a:solidFill>
+            <a:srgbClr val="7030A0"/>
+          </a:solidFill>
+        </p:spPr>
+        <p:style>
+          <a:lnRef idx="2">
+            <a:schemeClr val="accent1">
+              <a:shade val="15000"/>
+            </a:schemeClr>
+          </a:lnRef>
+          <a:fillRef idx="1">
+            <a:schemeClr val="accent1"/>
+          </a:fillRef>
+          <a:effectRef idx="0">
+            <a:schemeClr val="accent1"/>
+          </a:effectRef>
+          <a:fontRef idx="minor">
+            <a:schemeClr val="lt1"/>
+          </a:fontRef>
+        </p:style>
+        <p:txBody>
+          <a:bodyPr rtlCol="0" anchor="ctr"/>
+          <a:lstStyle/>
+          <a:p>
+            <a:pPr algn="ctr"/>
+            <a:endParaRPr lang="ko-KR" altLang="en-US"/>
+          </a:p>
+        </p:txBody>
+      </p:sp>
+      <p:sp>
+        <p:nvSpPr>
+          <p:cNvPr id="149" name="타원 148">
+            <a:extLst>
+              <a:ext uri="{FF2B5EF4-FFF2-40B4-BE49-F238E27FC236}">
+                <a16:creationId xmlns:a16="http://schemas.microsoft.com/office/drawing/2014/main" id="{F23A85D5-9E0A-0501-D290-0B87FDE2AA53}"/>
+              </a:ext>
+            </a:extLst>
+          </p:cNvPr>
+          <p:cNvSpPr/>
+          <p:nvPr/>
+        </p:nvSpPr>
+        <p:spPr>
+          <a:xfrm>
+            <a:off x="6687495" y="1246583"/>
+            <a:ext cx="101912" cy="97638"/>
+          </a:xfrm>
+          <a:prstGeom prst="ellipse">
+            <a:avLst/>
+          </a:prstGeom>
+          <a:solidFill>
+            <a:srgbClr val="00B050"/>
+          </a:solidFill>
+        </p:spPr>
+        <p:style>
+          <a:lnRef idx="2">
+            <a:schemeClr val="accent1">
+              <a:shade val="15000"/>
+            </a:schemeClr>
+          </a:lnRef>
+          <a:fillRef idx="1">
+            <a:schemeClr val="accent1"/>
+          </a:fillRef>
+          <a:effectRef idx="0">
+            <a:schemeClr val="accent1"/>
+          </a:effectRef>
+          <a:fontRef idx="minor">
+            <a:schemeClr val="lt1"/>
+          </a:fontRef>
+        </p:style>
+        <p:txBody>
+          <a:bodyPr rtlCol="0" anchor="ctr"/>
+          <a:lstStyle/>
+          <a:p>
+            <a:pPr algn="ctr"/>
+            <a:endParaRPr lang="ko-KR" altLang="en-US"/>
+          </a:p>
+        </p:txBody>
+      </p:sp>
+      <p:sp>
+        <p:nvSpPr>
+          <p:cNvPr id="150" name="타원 149">
+            <a:extLst>
+              <a:ext uri="{FF2B5EF4-FFF2-40B4-BE49-F238E27FC236}">
+                <a16:creationId xmlns:a16="http://schemas.microsoft.com/office/drawing/2014/main" id="{049F0D94-528D-4CE2-0CAE-5B6AA6C655DF}"/>
+              </a:ext>
+            </a:extLst>
+          </p:cNvPr>
+          <p:cNvSpPr/>
+          <p:nvPr/>
+        </p:nvSpPr>
+        <p:spPr>
+          <a:xfrm>
+            <a:off x="7077116" y="1213974"/>
+            <a:ext cx="146413" cy="140271"/>
+          </a:xfrm>
+          <a:prstGeom prst="ellipse">
+            <a:avLst/>
+          </a:prstGeom>
+          <a:solidFill>
+            <a:srgbClr val="FFFF00"/>
+          </a:solidFill>
+        </p:spPr>
+        <p:style>
+          <a:lnRef idx="2">
+            <a:schemeClr val="accent1">
+              <a:shade val="15000"/>
+            </a:schemeClr>
+          </a:lnRef>
+          <a:fillRef idx="1">
+            <a:schemeClr val="accent1"/>
+          </a:fillRef>
+          <a:effectRef idx="0">
+            <a:schemeClr val="accent1"/>
+          </a:effectRef>
+          <a:fontRef idx="minor">
+            <a:schemeClr val="lt1"/>
+          </a:fontRef>
+        </p:style>
+        <p:txBody>
+          <a:bodyPr rtlCol="0" anchor="ctr"/>
+          <a:lstStyle/>
+          <a:p>
+            <a:pPr algn="ctr"/>
+            <a:endParaRPr lang="ko-KR" altLang="en-US"/>
+          </a:p>
+        </p:txBody>
+      </p:sp>
+      <p:sp>
+        <p:nvSpPr>
+          <p:cNvPr id="151" name="타원 150">
+            <a:extLst>
+              <a:ext uri="{FF2B5EF4-FFF2-40B4-BE49-F238E27FC236}">
+                <a16:creationId xmlns:a16="http://schemas.microsoft.com/office/drawing/2014/main" id="{E5AC36E2-94B2-73D6-3AFD-DF76566A3866}"/>
+              </a:ext>
+            </a:extLst>
+          </p:cNvPr>
+          <p:cNvSpPr/>
+          <p:nvPr/>
+        </p:nvSpPr>
+        <p:spPr>
+          <a:xfrm>
+            <a:off x="7257736" y="898978"/>
+            <a:ext cx="154479" cy="148000"/>
+          </a:xfrm>
+          <a:prstGeom prst="ellipse">
+            <a:avLst/>
+          </a:prstGeom>
+          <a:solidFill>
+            <a:srgbClr val="FFC000"/>
+          </a:solidFill>
+        </p:spPr>
+        <p:style>
+          <a:lnRef idx="2">
+            <a:schemeClr val="accent1">
+              <a:shade val="15000"/>
+            </a:schemeClr>
+          </a:lnRef>
+          <a:fillRef idx="1">
+            <a:schemeClr val="accent1"/>
+          </a:fillRef>
+          <a:effectRef idx="0">
+            <a:schemeClr val="accent1"/>
+          </a:effectRef>
+          <a:fontRef idx="minor">
+            <a:schemeClr val="lt1"/>
+          </a:fontRef>
+        </p:style>
+        <p:txBody>
+          <a:bodyPr rtlCol="0" anchor="ctr"/>
+          <a:lstStyle/>
+          <a:p>
+            <a:pPr algn="ctr"/>
+            <a:endParaRPr lang="ko-KR" altLang="en-US"/>
+          </a:p>
+        </p:txBody>
+      </p:sp>
+      <p:sp>
+        <p:nvSpPr>
+          <p:cNvPr id="152" name="타원 151">
+            <a:extLst>
+              <a:ext uri="{FF2B5EF4-FFF2-40B4-BE49-F238E27FC236}">
+                <a16:creationId xmlns:a16="http://schemas.microsoft.com/office/drawing/2014/main" id="{DC5517EA-6A08-29CB-859F-AC332D96A8EB}"/>
+              </a:ext>
+            </a:extLst>
+          </p:cNvPr>
+          <p:cNvSpPr/>
+          <p:nvPr/>
+        </p:nvSpPr>
+        <p:spPr>
+          <a:xfrm>
+            <a:off x="6806469" y="680746"/>
+            <a:ext cx="181344" cy="173737"/>
+          </a:xfrm>
+          <a:prstGeom prst="ellipse">
+            <a:avLst/>
+          </a:prstGeom>
+          <a:solidFill>
+            <a:srgbClr val="FF0000"/>
+          </a:solidFill>
+        </p:spPr>
+        <p:style>
+          <a:lnRef idx="2">
+            <a:schemeClr val="accent1">
+              <a:shade val="15000"/>
+            </a:schemeClr>
+          </a:lnRef>
+          <a:fillRef idx="1">
+            <a:schemeClr val="accent1"/>
+          </a:fillRef>
+          <a:effectRef idx="0">
+            <a:schemeClr val="accent1"/>
+          </a:effectRef>
+          <a:fontRef idx="minor">
+            <a:schemeClr val="lt1"/>
+          </a:fontRef>
+        </p:style>
+        <p:txBody>
+          <a:bodyPr rtlCol="0" anchor="ctr"/>
+          <a:lstStyle/>
+          <a:p>
+            <a:pPr algn="ctr"/>
+            <a:endParaRPr lang="ko-KR" altLang="en-US"/>
+          </a:p>
+        </p:txBody>
+      </p:sp>
+      <p:cxnSp>
+        <p:nvCxnSpPr>
+          <p:cNvPr id="39" name="직선 연결선 38">
+            <a:extLst>
+              <a:ext uri="{FF2B5EF4-FFF2-40B4-BE49-F238E27FC236}">
+                <a16:creationId xmlns:a16="http://schemas.microsoft.com/office/drawing/2014/main" id="{C6171346-F228-4978-7607-A260957DEB3B}"/>
+              </a:ext>
+            </a:extLst>
+          </p:cNvPr>
+          <p:cNvCxnSpPr>
+            <a:cxnSpLocks/>
+            <a:stCxn id="84" idx="2"/>
+            <a:endCxn id="80" idx="7"/>
+          </p:cNvCxnSpPr>
+          <p:nvPr/>
+        </p:nvCxnSpPr>
+        <p:spPr>
+          <a:xfrm flipH="1">
+            <a:off x="2024718" y="3058868"/>
+            <a:ext cx="352998" cy="167551"/>
+          </a:xfrm>
+          <a:prstGeom prst="line">
+            <a:avLst/>
+          </a:prstGeom>
+        </p:spPr>
+        <p:style>
+          <a:lnRef idx="1">
+            <a:schemeClr val="dk1"/>
+          </a:lnRef>
+          <a:fillRef idx="0">
+            <a:schemeClr val="dk1"/>
+          </a:fillRef>
+          <a:effectRef idx="0">
+            <a:schemeClr val="dk1"/>
+          </a:effectRef>
+          <a:fontRef idx="minor">
+            <a:schemeClr val="tx1"/>
+          </a:fontRef>
+        </p:style>
+      </p:cxnSp>
+      <p:cxnSp>
+        <p:nvCxnSpPr>
+          <p:cNvPr id="41" name="직선 연결선 40">
+            <a:extLst>
+              <a:ext uri="{FF2B5EF4-FFF2-40B4-BE49-F238E27FC236}">
+                <a16:creationId xmlns:a16="http://schemas.microsoft.com/office/drawing/2014/main" id="{6B0BB905-7E51-0FA0-6F1D-4690E824E1A6}"/>
+              </a:ext>
+            </a:extLst>
+          </p:cNvPr>
+          <p:cNvCxnSpPr>
+            <a:cxnSpLocks/>
+            <a:stCxn id="83" idx="2"/>
+            <a:endCxn id="80" idx="5"/>
+          </p:cNvCxnSpPr>
+          <p:nvPr/>
+        </p:nvCxnSpPr>
+        <p:spPr>
+          <a:xfrm flipH="1">
+            <a:off x="2024718" y="3245771"/>
+            <a:ext cx="785610" cy="62334"/>
+          </a:xfrm>
+          <a:prstGeom prst="line">
+            <a:avLst/>
+          </a:prstGeom>
+          <a:ln w="28575"/>
+        </p:spPr>
+        <p:style>
+          <a:lnRef idx="1">
+            <a:schemeClr val="dk1"/>
+          </a:lnRef>
+          <a:fillRef idx="0">
+            <a:schemeClr val="dk1"/>
+          </a:fillRef>
+          <a:effectRef idx="0">
+            <a:schemeClr val="dk1"/>
+          </a:effectRef>
+          <a:fontRef idx="minor">
+            <a:schemeClr val="tx1"/>
+          </a:fontRef>
+        </p:style>
+      </p:cxnSp>
+      <p:cxnSp>
+        <p:nvCxnSpPr>
+          <p:cNvPr id="44" name="직선 연결선 43">
+            <a:extLst>
+              <a:ext uri="{FF2B5EF4-FFF2-40B4-BE49-F238E27FC236}">
+                <a16:creationId xmlns:a16="http://schemas.microsoft.com/office/drawing/2014/main" id="{A923842B-C2EA-2540-3F79-2D4D00091EDC}"/>
+              </a:ext>
+            </a:extLst>
+          </p:cNvPr>
+          <p:cNvCxnSpPr>
+            <a:cxnSpLocks/>
+            <a:stCxn id="82" idx="1"/>
+            <a:endCxn id="84" idx="5"/>
+          </p:cNvCxnSpPr>
+          <p:nvPr/>
+        </p:nvCxnSpPr>
+        <p:spPr>
+          <a:xfrm flipH="1" flipV="1">
+            <a:off x="2480637" y="3099711"/>
+            <a:ext cx="149506" cy="420213"/>
+          </a:xfrm>
+          <a:prstGeom prst="line">
+            <a:avLst/>
+          </a:prstGeom>
+          <a:ln w="12700"/>
+        </p:spPr>
+        <p:style>
+          <a:lnRef idx="1">
+            <a:schemeClr val="dk1"/>
+          </a:lnRef>
+          <a:fillRef idx="0">
+            <a:schemeClr val="dk1"/>
+          </a:fillRef>
+          <a:effectRef idx="0">
+            <a:schemeClr val="dk1"/>
+          </a:effectRef>
+          <a:fontRef idx="minor">
+            <a:schemeClr val="tx1"/>
+          </a:fontRef>
+        </p:style>
+      </p:cxnSp>
+      <p:cxnSp>
+        <p:nvCxnSpPr>
+          <p:cNvPr id="49" name="직선 연결선 48">
+            <a:extLst>
+              <a:ext uri="{FF2B5EF4-FFF2-40B4-BE49-F238E27FC236}">
+                <a16:creationId xmlns:a16="http://schemas.microsoft.com/office/drawing/2014/main" id="{3A58CF3D-B152-6349-279E-2875CE0BBFA5}"/>
+              </a:ext>
+            </a:extLst>
+          </p:cNvPr>
+          <p:cNvCxnSpPr>
+            <a:cxnSpLocks/>
+            <a:stCxn id="83" idx="3"/>
+            <a:endCxn id="81" idx="0"/>
+          </p:cNvCxnSpPr>
+          <p:nvPr/>
+        </p:nvCxnSpPr>
+        <p:spPr>
+          <a:xfrm flipH="1">
+            <a:off x="2223959" y="3286614"/>
+            <a:ext cx="604028" cy="216392"/>
+          </a:xfrm>
+          <a:prstGeom prst="line">
+            <a:avLst/>
+          </a:prstGeom>
+        </p:spPr>
+        <p:style>
+          <a:lnRef idx="1">
+            <a:schemeClr val="dk1"/>
+          </a:lnRef>
+          <a:fillRef idx="0">
+            <a:schemeClr val="dk1"/>
+          </a:fillRef>
+          <a:effectRef idx="0">
+            <a:schemeClr val="dk1"/>
+          </a:effectRef>
+          <a:fontRef idx="minor">
+            <a:schemeClr val="tx1"/>
+          </a:fontRef>
+        </p:style>
+      </p:cxnSp>
+      <p:cxnSp>
+        <p:nvCxnSpPr>
+          <p:cNvPr id="52" name="직선 연결선 51">
+            <a:extLst>
+              <a:ext uri="{FF2B5EF4-FFF2-40B4-BE49-F238E27FC236}">
+                <a16:creationId xmlns:a16="http://schemas.microsoft.com/office/drawing/2014/main" id="{A3081BD3-57A8-4E53-CCEE-221184D5E88A}"/>
+              </a:ext>
+            </a:extLst>
+          </p:cNvPr>
+          <p:cNvCxnSpPr>
+            <a:cxnSpLocks/>
+            <a:stCxn id="81" idx="0"/>
+          </p:cNvCxnSpPr>
+          <p:nvPr/>
+        </p:nvCxnSpPr>
+        <p:spPr>
+          <a:xfrm flipV="1">
+            <a:off x="2223959" y="3123887"/>
+            <a:ext cx="207023" cy="379119"/>
+          </a:xfrm>
+          <a:prstGeom prst="line">
+            <a:avLst/>
+          </a:prstGeom>
+        </p:spPr>
+        <p:style>
+          <a:lnRef idx="1">
+            <a:schemeClr val="dk1"/>
+          </a:lnRef>
+          <a:fillRef idx="0">
+            <a:schemeClr val="dk1"/>
+          </a:fillRef>
+          <a:effectRef idx="0">
+            <a:schemeClr val="dk1"/>
+          </a:effectRef>
+          <a:fontRef idx="minor">
+            <a:schemeClr val="tx1"/>
+          </a:fontRef>
+        </p:style>
+      </p:cxnSp>
+      <p:cxnSp>
+        <p:nvCxnSpPr>
+          <p:cNvPr id="57" name="직선 연결선 56">
+            <a:extLst>
+              <a:ext uri="{FF2B5EF4-FFF2-40B4-BE49-F238E27FC236}">
+                <a16:creationId xmlns:a16="http://schemas.microsoft.com/office/drawing/2014/main" id="{053BD79F-D7BC-C1FB-3B54-75E529C3EA45}"/>
+              </a:ext>
+            </a:extLst>
+          </p:cNvPr>
+          <p:cNvCxnSpPr>
+            <a:cxnSpLocks/>
+            <a:stCxn id="102" idx="2"/>
+            <a:endCxn id="98" idx="7"/>
+          </p:cNvCxnSpPr>
+          <p:nvPr/>
+        </p:nvCxnSpPr>
+        <p:spPr>
+          <a:xfrm flipH="1">
+            <a:off x="6522052" y="3082237"/>
+            <a:ext cx="320295" cy="144182"/>
+          </a:xfrm>
+          <a:prstGeom prst="line">
+            <a:avLst/>
+          </a:prstGeom>
+          <a:ln w="28575"/>
+        </p:spPr>
+        <p:style>
+          <a:lnRef idx="1">
+            <a:schemeClr val="dk1"/>
+          </a:lnRef>
+          <a:fillRef idx="0">
+            <a:schemeClr val="dk1"/>
+          </a:fillRef>
+          <a:effectRef idx="0">
+            <a:schemeClr val="dk1"/>
+          </a:effectRef>
+          <a:fontRef idx="minor">
+            <a:schemeClr val="tx1"/>
+          </a:fontRef>
+        </p:style>
+      </p:cxnSp>
+      <p:cxnSp>
+        <p:nvCxnSpPr>
+          <p:cNvPr id="60" name="직선 연결선 59">
+            <a:extLst>
+              <a:ext uri="{FF2B5EF4-FFF2-40B4-BE49-F238E27FC236}">
+                <a16:creationId xmlns:a16="http://schemas.microsoft.com/office/drawing/2014/main" id="{2E734A6C-FF4B-89A4-8342-F6D88ED42C23}"/>
+              </a:ext>
+            </a:extLst>
+          </p:cNvPr>
+          <p:cNvCxnSpPr>
+            <a:cxnSpLocks/>
+            <a:stCxn id="100" idx="1"/>
+            <a:endCxn id="98" idx="5"/>
+          </p:cNvCxnSpPr>
+          <p:nvPr/>
+        </p:nvCxnSpPr>
+        <p:spPr>
+          <a:xfrm flipH="1" flipV="1">
+            <a:off x="6522052" y="3308105"/>
+            <a:ext cx="602591" cy="206061"/>
+          </a:xfrm>
+          <a:prstGeom prst="line">
+            <a:avLst/>
+          </a:prstGeom>
+          <a:ln w="12700"/>
+        </p:spPr>
+        <p:style>
+          <a:lnRef idx="1">
+            <a:schemeClr val="dk1"/>
+          </a:lnRef>
+          <a:fillRef idx="0">
+            <a:schemeClr val="dk1"/>
+          </a:fillRef>
+          <a:effectRef idx="0">
+            <a:schemeClr val="dk1"/>
+          </a:effectRef>
+          <a:fontRef idx="minor">
+            <a:schemeClr val="tx1"/>
+          </a:fontRef>
+        </p:style>
+      </p:cxnSp>
+      <p:cxnSp>
+        <p:nvCxnSpPr>
+          <p:cNvPr id="63" name="직선 연결선 62">
+            <a:extLst>
+              <a:ext uri="{FF2B5EF4-FFF2-40B4-BE49-F238E27FC236}">
+                <a16:creationId xmlns:a16="http://schemas.microsoft.com/office/drawing/2014/main" id="{1ADF04A6-23B2-F3C6-51C2-0D9C063038D2}"/>
+              </a:ext>
+            </a:extLst>
+          </p:cNvPr>
+          <p:cNvCxnSpPr>
+            <a:cxnSpLocks/>
+            <a:stCxn id="100" idx="2"/>
+            <a:endCxn id="99" idx="6"/>
+          </p:cNvCxnSpPr>
+          <p:nvPr/>
+        </p:nvCxnSpPr>
+        <p:spPr>
+          <a:xfrm flipH="1">
+            <a:off x="6842347" y="3541109"/>
+            <a:ext cx="270647" cy="48766"/>
+          </a:xfrm>
+          <a:prstGeom prst="line">
+            <a:avLst/>
+          </a:prstGeom>
+          <a:ln w="28575"/>
+        </p:spPr>
+        <p:style>
+          <a:lnRef idx="1">
+            <a:schemeClr val="dk1"/>
+          </a:lnRef>
+          <a:fillRef idx="0">
+            <a:schemeClr val="dk1"/>
+          </a:fillRef>
+          <a:effectRef idx="0">
+            <a:schemeClr val="dk1"/>
+          </a:effectRef>
+          <a:fontRef idx="minor">
+            <a:schemeClr val="tx1"/>
+          </a:fontRef>
+        </p:style>
+      </p:cxnSp>
+      <p:cxnSp>
+        <p:nvCxnSpPr>
+          <p:cNvPr id="66" name="직선 연결선 65">
+            <a:extLst>
+              <a:ext uri="{FF2B5EF4-FFF2-40B4-BE49-F238E27FC236}">
+                <a16:creationId xmlns:a16="http://schemas.microsoft.com/office/drawing/2014/main" id="{1BD2C6C7-DF5E-762D-96F8-927A610D0174}"/>
+              </a:ext>
+            </a:extLst>
+          </p:cNvPr>
+          <p:cNvCxnSpPr>
+            <a:cxnSpLocks/>
+            <a:stCxn id="102" idx="4"/>
+            <a:endCxn id="99" idx="7"/>
+          </p:cNvCxnSpPr>
+          <p:nvPr/>
+        </p:nvCxnSpPr>
+        <p:spPr>
+          <a:xfrm flipH="1">
+            <a:off x="6815790" y="3194697"/>
+            <a:ext cx="143941" cy="333752"/>
+          </a:xfrm>
+          <a:prstGeom prst="line">
+            <a:avLst/>
+          </a:prstGeom>
+          <a:ln w="12700"/>
+        </p:spPr>
+        <p:style>
+          <a:lnRef idx="1">
+            <a:schemeClr val="dk1"/>
+          </a:lnRef>
+          <a:fillRef idx="0">
+            <a:schemeClr val="dk1"/>
+          </a:fillRef>
+          <a:effectRef idx="0">
+            <a:schemeClr val="dk1"/>
+          </a:effectRef>
+          <a:fontRef idx="minor">
+            <a:schemeClr val="tx1"/>
+          </a:fontRef>
+        </p:style>
+      </p:cxnSp>
+      <p:cxnSp>
+        <p:nvCxnSpPr>
+          <p:cNvPr id="69" name="직선 연결선 68">
+            <a:extLst>
+              <a:ext uri="{FF2B5EF4-FFF2-40B4-BE49-F238E27FC236}">
+                <a16:creationId xmlns:a16="http://schemas.microsoft.com/office/drawing/2014/main" id="{7079B5DF-FE90-EBC6-F88D-AB009B032481}"/>
+              </a:ext>
+            </a:extLst>
+          </p:cNvPr>
+          <p:cNvCxnSpPr>
+            <a:cxnSpLocks/>
+            <a:stCxn id="101" idx="1"/>
+            <a:endCxn id="102" idx="5"/>
+          </p:cNvCxnSpPr>
+          <p:nvPr/>
+        </p:nvCxnSpPr>
+        <p:spPr>
+          <a:xfrm flipH="1" flipV="1">
+            <a:off x="7042734" y="3161758"/>
+            <a:ext cx="278486" cy="39242"/>
+          </a:xfrm>
+          <a:prstGeom prst="line">
+            <a:avLst/>
+          </a:prstGeom>
+          <a:ln w="12700"/>
+        </p:spPr>
+        <p:style>
+          <a:lnRef idx="1">
+            <a:schemeClr val="dk1"/>
+          </a:lnRef>
+          <a:fillRef idx="0">
+            <a:schemeClr val="dk1"/>
+          </a:fillRef>
+          <a:effectRef idx="0">
+            <a:schemeClr val="dk1"/>
+          </a:effectRef>
+          <a:fontRef idx="minor">
+            <a:schemeClr val="tx1"/>
+          </a:fontRef>
+        </p:style>
+      </p:cxnSp>
+      <p:cxnSp>
+        <p:nvCxnSpPr>
+          <p:cNvPr id="72" name="직선 연결선 71">
+            <a:extLst>
+              <a:ext uri="{FF2B5EF4-FFF2-40B4-BE49-F238E27FC236}">
+                <a16:creationId xmlns:a16="http://schemas.microsoft.com/office/drawing/2014/main" id="{DA102F6E-D8D4-19B8-7619-5B1B8025BD0C}"/>
+              </a:ext>
+            </a:extLst>
+          </p:cNvPr>
+          <p:cNvCxnSpPr>
+            <a:cxnSpLocks/>
+            <a:stCxn id="99" idx="1"/>
+            <a:endCxn id="98" idx="5"/>
+          </p:cNvCxnSpPr>
+          <p:nvPr/>
+        </p:nvCxnSpPr>
+        <p:spPr>
+          <a:xfrm flipH="1" flipV="1">
+            <a:off x="6522052" y="3308105"/>
+            <a:ext cx="165508" cy="220344"/>
+          </a:xfrm>
+          <a:prstGeom prst="line">
+            <a:avLst/>
+          </a:prstGeom>
+          <a:ln w="9525"/>
+        </p:spPr>
+        <p:style>
+          <a:lnRef idx="1">
+            <a:schemeClr val="dk1"/>
+          </a:lnRef>
+          <a:fillRef idx="0">
+            <a:schemeClr val="dk1"/>
+          </a:fillRef>
+          <a:effectRef idx="0">
+            <a:schemeClr val="dk1"/>
+          </a:effectRef>
+          <a:fontRef idx="minor">
+            <a:schemeClr val="tx1"/>
+          </a:fontRef>
+        </p:style>
+      </p:cxnSp>
+      <p:cxnSp>
+        <p:nvCxnSpPr>
+          <p:cNvPr id="87" name="직선 연결선 86">
+            <a:extLst>
+              <a:ext uri="{FF2B5EF4-FFF2-40B4-BE49-F238E27FC236}">
+                <a16:creationId xmlns:a16="http://schemas.microsoft.com/office/drawing/2014/main" id="{5A0970F2-8C6E-34C6-11A6-72DAF5E6C006}"/>
+              </a:ext>
+            </a:extLst>
+          </p:cNvPr>
+          <p:cNvCxnSpPr>
+            <a:cxnSpLocks/>
+            <a:stCxn id="151" idx="4"/>
+            <a:endCxn id="150" idx="0"/>
+          </p:cNvCxnSpPr>
+          <p:nvPr/>
+        </p:nvCxnSpPr>
+        <p:spPr>
+          <a:xfrm flipH="1">
+            <a:off x="7150323" y="1046978"/>
+            <a:ext cx="184653" cy="166996"/>
+          </a:xfrm>
+          <a:prstGeom prst="line">
+            <a:avLst/>
+          </a:prstGeom>
+          <a:ln w="28575"/>
+        </p:spPr>
+        <p:style>
+          <a:lnRef idx="1">
+            <a:schemeClr val="dk1"/>
+          </a:lnRef>
+          <a:fillRef idx="0">
+            <a:schemeClr val="dk1"/>
+          </a:fillRef>
+          <a:effectRef idx="0">
+            <a:schemeClr val="dk1"/>
+          </a:effectRef>
+          <a:fontRef idx="minor">
+            <a:schemeClr val="tx1"/>
+          </a:fontRef>
+        </p:style>
+      </p:cxnSp>
+      <p:cxnSp>
+        <p:nvCxnSpPr>
+          <p:cNvPr id="92" name="직선 연결선 91">
+            <a:extLst>
+              <a:ext uri="{FF2B5EF4-FFF2-40B4-BE49-F238E27FC236}">
+                <a16:creationId xmlns:a16="http://schemas.microsoft.com/office/drawing/2014/main" id="{C4B07B4D-DBFA-2039-E648-4200CC3EA759}"/>
+              </a:ext>
+            </a:extLst>
+          </p:cNvPr>
+          <p:cNvCxnSpPr>
+            <a:cxnSpLocks/>
+            <a:stCxn id="149" idx="7"/>
+            <a:endCxn id="152" idx="4"/>
+          </p:cNvCxnSpPr>
+          <p:nvPr/>
+        </p:nvCxnSpPr>
+        <p:spPr>
+          <a:xfrm flipV="1">
+            <a:off x="6774482" y="854483"/>
+            <a:ext cx="122659" cy="406399"/>
+          </a:xfrm>
+          <a:prstGeom prst="line">
+            <a:avLst/>
+          </a:prstGeom>
+          <a:ln w="12700"/>
+        </p:spPr>
+        <p:style>
+          <a:lnRef idx="1">
+            <a:schemeClr val="dk1"/>
+          </a:lnRef>
+          <a:fillRef idx="0">
+            <a:schemeClr val="dk1"/>
+          </a:fillRef>
+          <a:effectRef idx="0">
+            <a:schemeClr val="dk1"/>
+          </a:effectRef>
+          <a:fontRef idx="minor">
+            <a:schemeClr val="tx1"/>
+          </a:fontRef>
+        </p:style>
+      </p:cxnSp>
+      <p:cxnSp>
+        <p:nvCxnSpPr>
+          <p:cNvPr id="110" name="직선 연결선 109">
+            <a:extLst>
+              <a:ext uri="{FF2B5EF4-FFF2-40B4-BE49-F238E27FC236}">
+                <a16:creationId xmlns:a16="http://schemas.microsoft.com/office/drawing/2014/main" id="{EF4CB89A-A8E7-2D7C-83B7-A3083808BC0F}"/>
+              </a:ext>
+            </a:extLst>
+          </p:cNvPr>
+          <p:cNvCxnSpPr>
+            <a:cxnSpLocks/>
+            <a:stCxn id="150" idx="1"/>
+            <a:endCxn id="148" idx="5"/>
+          </p:cNvCxnSpPr>
+          <p:nvPr/>
+        </p:nvCxnSpPr>
+        <p:spPr>
+          <a:xfrm flipH="1" flipV="1">
+            <a:off x="6591230" y="1023483"/>
+            <a:ext cx="507328" cy="211033"/>
+          </a:xfrm>
+          <a:prstGeom prst="line">
+            <a:avLst/>
+          </a:prstGeom>
+          <a:ln w="12700"/>
+        </p:spPr>
+        <p:style>
+          <a:lnRef idx="1">
+            <a:schemeClr val="dk1"/>
+          </a:lnRef>
+          <a:fillRef idx="0">
+            <a:schemeClr val="dk1"/>
+          </a:fillRef>
+          <a:effectRef idx="0">
+            <a:schemeClr val="dk1"/>
+          </a:effectRef>
+          <a:fontRef idx="minor">
+            <a:schemeClr val="tx1"/>
+          </a:fontRef>
+        </p:style>
+      </p:cxnSp>
+      <p:cxnSp>
+        <p:nvCxnSpPr>
+          <p:cNvPr id="127" name="직선 연결선 126">
+            <a:extLst>
+              <a:ext uri="{FF2B5EF4-FFF2-40B4-BE49-F238E27FC236}">
+                <a16:creationId xmlns:a16="http://schemas.microsoft.com/office/drawing/2014/main" id="{A5249615-5D08-8786-5E6E-BB02F4344EF6}"/>
+              </a:ext>
+            </a:extLst>
+          </p:cNvPr>
+          <p:cNvCxnSpPr>
+            <a:cxnSpLocks/>
+            <a:stCxn id="150" idx="1"/>
+            <a:endCxn id="152" idx="5"/>
+          </p:cNvCxnSpPr>
+          <p:nvPr/>
+        </p:nvCxnSpPr>
+        <p:spPr>
+          <a:xfrm flipH="1" flipV="1">
+            <a:off x="6961256" y="829040"/>
+            <a:ext cx="137302" cy="405476"/>
+          </a:xfrm>
+          <a:prstGeom prst="line">
+            <a:avLst/>
+          </a:prstGeom>
+          <a:ln w="12700"/>
+        </p:spPr>
+        <p:style>
+          <a:lnRef idx="1">
+            <a:schemeClr val="dk1"/>
+          </a:lnRef>
+          <a:fillRef idx="0">
+            <a:schemeClr val="dk1"/>
+          </a:fillRef>
+          <a:effectRef idx="0">
+            <a:schemeClr val="dk1"/>
+          </a:effectRef>
+          <a:fontRef idx="minor">
+            <a:schemeClr val="tx1"/>
+          </a:fontRef>
+        </p:style>
+      </p:cxnSp>
+      <p:sp>
+        <p:nvSpPr>
+          <p:cNvPr id="2" name="TextBox 1">
+            <a:extLst>
+              <a:ext uri="{FF2B5EF4-FFF2-40B4-BE49-F238E27FC236}">
+                <a16:creationId xmlns:a16="http://schemas.microsoft.com/office/drawing/2014/main" id="{6AADFA1C-F1BF-CF9A-E449-D7B7C1FFB2FF}"/>
+              </a:ext>
+            </a:extLst>
+          </p:cNvPr>
+          <p:cNvSpPr txBox="1"/>
+          <p:nvPr/>
+        </p:nvSpPr>
+        <p:spPr>
+          <a:xfrm>
+            <a:off x="5965147" y="1727190"/>
+            <a:ext cx="335938" cy="368690"/>
+          </a:xfrm>
+          <a:prstGeom prst="rect">
+            <a:avLst/>
+          </a:prstGeom>
+          <a:noFill/>
+        </p:spPr>
+        <p:txBody>
+          <a:bodyPr wrap="square">
+            <a:spAutoFit/>
+          </a:bodyPr>
+          <a:lstStyle/>
+          <a:p>
+            <a:r>
+              <a:rPr lang="ko-KR" altLang="en-US" sz="1800" dirty="0"/>
+              <a:t>①</a:t>
+            </a:r>
+            <a:endParaRPr lang="ko-KR" altLang="en-US" dirty="0"/>
+          </a:p>
+        </p:txBody>
+      </p:sp>
+      <p:sp>
+        <p:nvSpPr>
+          <p:cNvPr id="3" name="TextBox 2">
+            <a:extLst>
+              <a:ext uri="{FF2B5EF4-FFF2-40B4-BE49-F238E27FC236}">
+                <a16:creationId xmlns:a16="http://schemas.microsoft.com/office/drawing/2014/main" id="{BFBA4F1F-FFB9-31FC-A312-2ECF9F523F0A}"/>
+              </a:ext>
+            </a:extLst>
+          </p:cNvPr>
+          <p:cNvSpPr txBox="1"/>
+          <p:nvPr/>
+        </p:nvSpPr>
+        <p:spPr>
+          <a:xfrm>
+            <a:off x="4126573" y="2031781"/>
+            <a:ext cx="675185" cy="369332"/>
+          </a:xfrm>
+          <a:prstGeom prst="rect">
+            <a:avLst/>
+          </a:prstGeom>
+          <a:noFill/>
+        </p:spPr>
+        <p:txBody>
+          <a:bodyPr wrap="square">
+            <a:spAutoFit/>
+          </a:bodyPr>
+          <a:lstStyle/>
+          <a:p>
+            <a:r>
+              <a:rPr lang="ko-KR" altLang="en-US" sz="1800" dirty="0"/>
+              <a:t>②</a:t>
+            </a:r>
+            <a:endParaRPr lang="ko-KR" altLang="en-US" dirty="0"/>
+          </a:p>
+        </p:txBody>
+      </p:sp>
+      <p:sp>
+        <p:nvSpPr>
+          <p:cNvPr id="4" name="TextBox 3">
+            <a:extLst>
+              <a:ext uri="{FF2B5EF4-FFF2-40B4-BE49-F238E27FC236}">
+                <a16:creationId xmlns:a16="http://schemas.microsoft.com/office/drawing/2014/main" id="{1B3FD1AC-A3F0-FC52-9C97-CF67B7184E17}"/>
+              </a:ext>
+            </a:extLst>
+          </p:cNvPr>
+          <p:cNvSpPr txBox="1"/>
+          <p:nvPr/>
+        </p:nvSpPr>
+        <p:spPr>
+          <a:xfrm>
+            <a:off x="7108699" y="2510310"/>
+            <a:ext cx="403274" cy="369332"/>
+          </a:xfrm>
+          <a:prstGeom prst="rect">
+            <a:avLst/>
+          </a:prstGeom>
+          <a:noFill/>
+        </p:spPr>
+        <p:txBody>
+          <a:bodyPr wrap="square">
+            <a:spAutoFit/>
+          </a:bodyPr>
+          <a:lstStyle/>
+          <a:p>
+            <a:r>
+              <a:rPr lang="ko-KR" altLang="en-US" sz="1800" dirty="0"/>
+              <a:t>③</a:t>
+            </a:r>
+            <a:endParaRPr lang="ko-KR" altLang="en-US" dirty="0"/>
+          </a:p>
+        </p:txBody>
+      </p:sp>
+      <p:sp>
+        <p:nvSpPr>
+          <p:cNvPr id="5" name="TextBox 4">
+            <a:extLst>
+              <a:ext uri="{FF2B5EF4-FFF2-40B4-BE49-F238E27FC236}">
+                <a16:creationId xmlns:a16="http://schemas.microsoft.com/office/drawing/2014/main" id="{2EE2059A-EB8A-E7C0-778A-717EEAB39638}"/>
+              </a:ext>
+            </a:extLst>
+          </p:cNvPr>
+          <p:cNvSpPr txBox="1"/>
+          <p:nvPr/>
+        </p:nvSpPr>
+        <p:spPr>
+          <a:xfrm>
+            <a:off x="1249323" y="4352753"/>
+            <a:ext cx="9527948" cy="3785652"/>
+          </a:xfrm>
+          <a:prstGeom prst="rect">
+            <a:avLst/>
+          </a:prstGeom>
+          <a:noFill/>
+        </p:spPr>
+        <p:txBody>
+          <a:bodyPr wrap="square">
+            <a:spAutoFit/>
+          </a:bodyPr>
+          <a:lstStyle/>
+          <a:p>
+            <a:pPr marL="342900" indent="-342900">
+              <a:buAutoNum type="circleNumDbPlain"/>
+            </a:pPr>
+            <a:r>
+              <a:rPr lang="en-US" altLang="ko-KR" sz="1200" dirty="0"/>
+              <a:t>Title topic frequency distribution</a:t>
+            </a:r>
+          </a:p>
+          <a:p>
+            <a:pPr marL="342900" indent="-342900">
+              <a:buAutoNum type="circleNumDbPlain"/>
+            </a:pPr>
+            <a:r>
+              <a:rPr lang="en-US" altLang="ko-KR" sz="1200" dirty="0"/>
+              <a:t>Difference of title topic distribution for each comm.</a:t>
+            </a:r>
+          </a:p>
+          <a:p>
+            <a:pPr marL="342900" indent="-342900">
+              <a:buAutoNum type="circleNumDbPlain"/>
+            </a:pPr>
+            <a:r>
+              <a:rPr lang="en-US" altLang="ko-KR" sz="1200" dirty="0"/>
+              <a:t>Initial comments topic distribution</a:t>
+            </a:r>
+          </a:p>
+          <a:p>
+            <a:r>
+              <a:rPr lang="en-US" altLang="ko-KR" sz="1200" dirty="0"/>
+              <a:t>	- Distribution of topic frequency / similarity distribution</a:t>
+            </a:r>
+          </a:p>
+          <a:p>
+            <a:r>
+              <a:rPr lang="en-US" altLang="ko-KR" sz="1200" dirty="0"/>
+              <a:t>	- Topic frequency / similarity correlation</a:t>
+            </a:r>
+          </a:p>
+          <a:p>
+            <a:pPr marL="228600" indent="-228600">
+              <a:buAutoNum type="circleNumDbPlain" startAt="4"/>
+            </a:pPr>
+            <a:r>
+              <a:rPr lang="en-US" altLang="ko-KR" sz="1200" dirty="0"/>
+              <a:t>With random walk / walker placement / modifier / conversion, does individual article result match with the real title-article topic distribution?</a:t>
+            </a:r>
+          </a:p>
+          <a:p>
+            <a:pPr lvl="1"/>
+            <a:r>
+              <a:rPr lang="en-US" altLang="ko-KR" sz="1200" dirty="0"/>
+              <a:t>- For each title topic, what is the comment topic distribution overall? (Stefan</a:t>
+            </a:r>
+            <a:r>
+              <a:rPr lang="ko-KR" altLang="en-US" sz="1200" dirty="0"/>
+              <a:t> </a:t>
+            </a:r>
+            <a:r>
+              <a:rPr lang="en-US" altLang="ko-KR" sz="1200" dirty="0"/>
+              <a:t>problem)</a:t>
+            </a:r>
+          </a:p>
+          <a:p>
+            <a:pPr lvl="1"/>
+            <a:r>
+              <a:rPr lang="en-US" altLang="ko-KR" sz="1200" dirty="0"/>
+              <a:t>- Does article have</a:t>
+            </a:r>
+            <a:r>
+              <a:rPr lang="ko-KR" altLang="en-US" sz="1200" dirty="0"/>
+              <a:t> </a:t>
+            </a:r>
+            <a:r>
+              <a:rPr lang="en-US" altLang="ko-KR" sz="1200" dirty="0"/>
+              <a:t>more</a:t>
+            </a:r>
+            <a:r>
+              <a:rPr lang="ko-KR" altLang="en-US" sz="1200" dirty="0"/>
+              <a:t> </a:t>
+            </a:r>
+            <a:r>
+              <a:rPr lang="en-US" altLang="ko-KR" sz="1200" dirty="0"/>
+              <a:t>comments of its own title</a:t>
+            </a:r>
+            <a:r>
+              <a:rPr lang="ko-KR" altLang="en-US" sz="1200" dirty="0"/>
+              <a:t> </a:t>
+            </a:r>
+            <a:r>
+              <a:rPr lang="en-US" altLang="ko-KR" sz="1200" dirty="0"/>
+              <a:t>topic?</a:t>
+            </a:r>
+            <a:r>
+              <a:rPr lang="ko-KR" altLang="en-US" sz="1200" dirty="0"/>
+              <a:t> </a:t>
+            </a:r>
+            <a:r>
+              <a:rPr lang="en-US" altLang="ko-KR" sz="1200" dirty="0"/>
+              <a:t>(modifier)	</a:t>
+            </a:r>
+          </a:p>
+          <a:p>
+            <a:r>
+              <a:rPr lang="ko-KR" altLang="en-US" sz="1200" dirty="0"/>
+              <a:t>⑤ </a:t>
+            </a:r>
+            <a:r>
+              <a:rPr lang="en-US" altLang="ko-KR" sz="1200" dirty="0"/>
+              <a:t>With random walk / walker placement / modifier / conversion, does the cumulative result match with the data distribution / tendency?</a:t>
+            </a:r>
+          </a:p>
+          <a:p>
+            <a:r>
+              <a:rPr lang="en-US" altLang="ko-KR" sz="1200" dirty="0"/>
+              <a:t>	- How does topic frequency / edge weight distribution changes in time?</a:t>
+            </a:r>
+          </a:p>
+          <a:p>
+            <a:r>
+              <a:rPr lang="en-US" altLang="ko-KR" sz="1200" dirty="0"/>
+              <a:t>	 - Does positive feedback happen in edge? (topic similarity tendency of pair/triplets)</a:t>
+            </a:r>
+          </a:p>
+          <a:p>
+            <a:r>
+              <a:rPr lang="en-US" altLang="ko-KR" sz="1200" dirty="0"/>
+              <a:t>	 - Does positive feedback happen in filter? (topic selection tendency of pair/triplets)</a:t>
+            </a:r>
+          </a:p>
+          <a:p>
+            <a:r>
+              <a:rPr lang="en-US" altLang="ko-KR" sz="1200" dirty="0"/>
+              <a:t>         </a:t>
+            </a:r>
+          </a:p>
+          <a:p>
+            <a:r>
+              <a:rPr lang="en-US" altLang="ko-KR" sz="1200" dirty="0"/>
+              <a:t>Current findings / thoughts:</a:t>
+            </a:r>
+          </a:p>
+          <a:p>
+            <a:pPr marL="342900" indent="-342900">
+              <a:buAutoNum type="arabicPeriod"/>
+            </a:pPr>
+            <a:r>
+              <a:rPr lang="en-US" altLang="ko-KR" sz="1200" dirty="0"/>
+              <a:t>Both title</a:t>
+            </a:r>
+            <a:r>
+              <a:rPr lang="ko-KR" altLang="en-US" sz="1200" dirty="0"/>
+              <a:t> </a:t>
+            </a:r>
+            <a:r>
+              <a:rPr lang="en-US" altLang="ko-KR" sz="1200" dirty="0"/>
+              <a:t>topic</a:t>
+            </a:r>
+            <a:r>
+              <a:rPr lang="ko-KR" altLang="en-US" sz="1200" dirty="0"/>
+              <a:t> </a:t>
+            </a:r>
+            <a:r>
+              <a:rPr lang="en-US" altLang="ko-KR" sz="1200" dirty="0"/>
+              <a:t>/</a:t>
+            </a:r>
+            <a:r>
+              <a:rPr lang="ko-KR" altLang="en-US" sz="1200" dirty="0"/>
+              <a:t> </a:t>
+            </a:r>
+            <a:r>
+              <a:rPr lang="en-US" altLang="ko-KR" sz="1200" dirty="0"/>
+              <a:t>comment topic distribution looks like exp(-ax) (exponential decay) , but topic distribution has longer tail (smaller a)</a:t>
+            </a:r>
+          </a:p>
+          <a:p>
+            <a:pPr marL="342900" indent="-342900">
+              <a:buAutoNum type="arabicPeriod"/>
+            </a:pPr>
+            <a:r>
+              <a:rPr lang="en-US" altLang="ko-KR" sz="1200" dirty="0"/>
+              <a:t>Without super large modifier, model result gives almost normal-like, not .</a:t>
+            </a:r>
+          </a:p>
+          <a:p>
+            <a:pPr marL="800100" lvl="1" indent="-342900">
+              <a:buAutoNum type="arabicPeriod"/>
+            </a:pPr>
+            <a:r>
+              <a:rPr lang="en-US" altLang="ko-KR" sz="1200" dirty="0"/>
+              <a:t>random walk with weight as a similarity score is not a good idea, or maybe we need to make some transition from similarity to weight? (since comment topic frequency are much concentrated?)</a:t>
+            </a:r>
+          </a:p>
+          <a:p>
+            <a:pPr marL="800100" lvl="1" indent="-342900">
+              <a:buAutoNum type="arabicPeriod"/>
+            </a:pPr>
+            <a:r>
+              <a:rPr lang="en-US" altLang="ko-KR" sz="1200" dirty="0"/>
+              <a:t>Maybe modifiers are different for each community? (MJ : high modifier, AT : low modifier)</a:t>
+            </a:r>
+          </a:p>
+          <a:p>
+            <a:pPr marL="342900" indent="-342900">
+              <a:buAutoNum type="arabicPeriod"/>
+            </a:pPr>
+            <a:r>
+              <a:rPr lang="en-US" altLang="ko-KR" sz="1200" dirty="0"/>
+              <a:t>How about a single topic event (</a:t>
+            </a:r>
+            <a:r>
+              <a:rPr lang="en-US" altLang="ko-KR" sz="1200" dirty="0" err="1"/>
+              <a:t>N_v</a:t>
+            </a:r>
+            <a:r>
+              <a:rPr lang="en-US" altLang="ko-KR" sz="1200" dirty="0"/>
+              <a:t> = 1) version? (and maybe multi-topic version as a supp.?)</a:t>
+            </a:r>
+          </a:p>
+        </p:txBody>
+      </p:sp>
+      <p:sp>
+        <p:nvSpPr>
+          <p:cNvPr id="9" name="TextBox 8">
+            <a:extLst>
+              <a:ext uri="{FF2B5EF4-FFF2-40B4-BE49-F238E27FC236}">
+                <a16:creationId xmlns:a16="http://schemas.microsoft.com/office/drawing/2014/main" id="{821780F4-7084-4E3F-2FCE-E938BA6FDBAD}"/>
+              </a:ext>
+            </a:extLst>
+          </p:cNvPr>
+          <p:cNvSpPr txBox="1"/>
+          <p:nvPr/>
+        </p:nvSpPr>
+        <p:spPr>
+          <a:xfrm>
+            <a:off x="8116803" y="3318340"/>
+            <a:ext cx="403274" cy="369332"/>
+          </a:xfrm>
+          <a:prstGeom prst="rect">
+            <a:avLst/>
+          </a:prstGeom>
+          <a:noFill/>
+        </p:spPr>
+        <p:txBody>
+          <a:bodyPr wrap="square">
+            <a:spAutoFit/>
+          </a:bodyPr>
+          <a:lstStyle/>
+          <a:p>
+            <a:r>
+              <a:rPr lang="ko-KR" altLang="en-US" dirty="0"/>
+              <a:t>⑤</a:t>
+            </a:r>
+          </a:p>
+        </p:txBody>
+      </p:sp>
+      <p:sp>
+        <p:nvSpPr>
+          <p:cNvPr id="14" name="타원 13">
+            <a:extLst>
+              <a:ext uri="{FF2B5EF4-FFF2-40B4-BE49-F238E27FC236}">
+                <a16:creationId xmlns:a16="http://schemas.microsoft.com/office/drawing/2014/main" id="{4BC26F2F-2045-BA4C-2659-4611ECEC08D0}"/>
+              </a:ext>
+            </a:extLst>
+          </p:cNvPr>
+          <p:cNvSpPr/>
+          <p:nvPr/>
+        </p:nvSpPr>
+        <p:spPr>
+          <a:xfrm>
+            <a:off x="5644347" y="2659149"/>
+            <a:ext cx="283505" cy="271612"/>
+          </a:xfrm>
+          <a:prstGeom prst="ellipse">
+            <a:avLst/>
+          </a:prstGeom>
+          <a:solidFill>
+            <a:schemeClr val="bg1">
+              <a:lumMod val="75000"/>
+            </a:schemeClr>
+          </a:solidFill>
+        </p:spPr>
+        <p:style>
+          <a:lnRef idx="2">
+            <a:schemeClr val="accent1">
+              <a:shade val="15000"/>
+            </a:schemeClr>
+          </a:lnRef>
+          <a:fillRef idx="1">
+            <a:schemeClr val="accent1"/>
+          </a:fillRef>
+          <a:effectRef idx="0">
+            <a:schemeClr val="accent1"/>
+          </a:effectRef>
+          <a:fontRef idx="minor">
+            <a:schemeClr val="lt1"/>
+          </a:fontRef>
+        </p:style>
+        <p:txBody>
+          <a:bodyPr rtlCol="0" anchor="ctr"/>
+          <a:lstStyle/>
+          <a:p>
+            <a:pPr algn="ctr"/>
+            <a:endParaRPr lang="ko-KR" altLang="en-US"/>
+          </a:p>
+        </p:txBody>
+      </p:sp>
+      <p:sp>
+        <p:nvSpPr>
+          <p:cNvPr id="15" name="타원 14">
+            <a:extLst>
+              <a:ext uri="{FF2B5EF4-FFF2-40B4-BE49-F238E27FC236}">
+                <a16:creationId xmlns:a16="http://schemas.microsoft.com/office/drawing/2014/main" id="{F70974E3-A647-1B3D-201C-7B554A7BCD16}"/>
+              </a:ext>
+            </a:extLst>
+          </p:cNvPr>
+          <p:cNvSpPr/>
+          <p:nvPr/>
+        </p:nvSpPr>
+        <p:spPr>
+          <a:xfrm>
+            <a:off x="5663503" y="2786679"/>
+            <a:ext cx="120580" cy="115522"/>
+          </a:xfrm>
+          <a:prstGeom prst="ellipse">
+            <a:avLst/>
+          </a:prstGeom>
+          <a:solidFill>
+            <a:srgbClr val="00B050"/>
+          </a:solidFill>
+        </p:spPr>
+        <p:style>
+          <a:lnRef idx="2">
+            <a:schemeClr val="accent1">
+              <a:shade val="15000"/>
+            </a:schemeClr>
+          </a:lnRef>
+          <a:fillRef idx="1">
+            <a:schemeClr val="accent1"/>
+          </a:fillRef>
+          <a:effectRef idx="0">
+            <a:schemeClr val="accent1"/>
+          </a:effectRef>
+          <a:fontRef idx="minor">
+            <a:schemeClr val="lt1"/>
+          </a:fontRef>
+        </p:style>
+        <p:txBody>
+          <a:bodyPr rtlCol="0" anchor="ctr"/>
+          <a:lstStyle/>
+          <a:p>
+            <a:pPr algn="ctr"/>
+            <a:endParaRPr lang="ko-KR" altLang="en-US"/>
+          </a:p>
+        </p:txBody>
+      </p:sp>
+      <p:sp>
+        <p:nvSpPr>
+          <p:cNvPr id="16" name="타원 15">
+            <a:extLst>
+              <a:ext uri="{FF2B5EF4-FFF2-40B4-BE49-F238E27FC236}">
+                <a16:creationId xmlns:a16="http://schemas.microsoft.com/office/drawing/2014/main" id="{34A32A85-FF2F-A7DA-28FF-37966FB6E43D}"/>
+              </a:ext>
+            </a:extLst>
+          </p:cNvPr>
+          <p:cNvSpPr/>
+          <p:nvPr/>
+        </p:nvSpPr>
+        <p:spPr>
+          <a:xfrm>
+            <a:off x="5802854" y="2786679"/>
+            <a:ext cx="120580" cy="115522"/>
+          </a:xfrm>
+          <a:prstGeom prst="ellipse">
+            <a:avLst/>
+          </a:prstGeom>
+          <a:solidFill>
+            <a:srgbClr val="FFC000"/>
+          </a:solidFill>
+        </p:spPr>
+        <p:style>
+          <a:lnRef idx="2">
+            <a:schemeClr val="accent1">
+              <a:shade val="15000"/>
+            </a:schemeClr>
+          </a:lnRef>
+          <a:fillRef idx="1">
+            <a:schemeClr val="accent1"/>
+          </a:fillRef>
+          <a:effectRef idx="0">
+            <a:schemeClr val="accent1"/>
+          </a:effectRef>
+          <a:fontRef idx="minor">
+            <a:schemeClr val="lt1"/>
+          </a:fontRef>
+        </p:style>
+        <p:txBody>
+          <a:bodyPr rtlCol="0" anchor="ctr"/>
+          <a:lstStyle/>
+          <a:p>
+            <a:pPr algn="ctr"/>
+            <a:endParaRPr lang="ko-KR" altLang="en-US"/>
+          </a:p>
+        </p:txBody>
+      </p:sp>
+      <p:sp>
+        <p:nvSpPr>
+          <p:cNvPr id="17" name="타원 16">
+            <a:extLst>
+              <a:ext uri="{FF2B5EF4-FFF2-40B4-BE49-F238E27FC236}">
+                <a16:creationId xmlns:a16="http://schemas.microsoft.com/office/drawing/2014/main" id="{29692975-696E-A7AF-717E-F4874D438E12}"/>
+              </a:ext>
+            </a:extLst>
+          </p:cNvPr>
+          <p:cNvSpPr/>
+          <p:nvPr/>
+        </p:nvSpPr>
+        <p:spPr>
+          <a:xfrm>
+            <a:off x="5733318" y="2669035"/>
+            <a:ext cx="120580" cy="115522"/>
+          </a:xfrm>
+          <a:prstGeom prst="ellipse">
+            <a:avLst/>
+          </a:prstGeom>
+          <a:solidFill>
+            <a:srgbClr val="FF0000"/>
+          </a:solidFill>
+        </p:spPr>
+        <p:style>
+          <a:lnRef idx="2">
+            <a:schemeClr val="accent1">
+              <a:shade val="15000"/>
+            </a:schemeClr>
+          </a:lnRef>
+          <a:fillRef idx="1">
+            <a:schemeClr val="accent1"/>
+          </a:fillRef>
+          <a:effectRef idx="0">
+            <a:schemeClr val="accent1"/>
+          </a:effectRef>
+          <a:fontRef idx="minor">
+            <a:schemeClr val="lt1"/>
+          </a:fontRef>
+        </p:style>
+        <p:txBody>
+          <a:bodyPr rtlCol="0" anchor="ctr"/>
+          <a:lstStyle/>
+          <a:p>
+            <a:pPr algn="ctr"/>
+            <a:endParaRPr lang="ko-KR" altLang="en-US"/>
+          </a:p>
+        </p:txBody>
+      </p:sp>
+      <p:sp>
+        <p:nvSpPr>
+          <p:cNvPr id="18" name="TextBox 17">
+            <a:extLst>
+              <a:ext uri="{FF2B5EF4-FFF2-40B4-BE49-F238E27FC236}">
+                <a16:creationId xmlns:a16="http://schemas.microsoft.com/office/drawing/2014/main" id="{D1539F89-489A-5D91-494A-892C3DA18AAE}"/>
+              </a:ext>
+            </a:extLst>
+          </p:cNvPr>
+          <p:cNvSpPr txBox="1"/>
+          <p:nvPr/>
+        </p:nvSpPr>
+        <p:spPr>
+          <a:xfrm>
+            <a:off x="8811004" y="1984267"/>
+            <a:ext cx="403274" cy="369332"/>
+          </a:xfrm>
+          <a:prstGeom prst="rect">
+            <a:avLst/>
+          </a:prstGeom>
+          <a:noFill/>
+        </p:spPr>
+        <p:txBody>
+          <a:bodyPr wrap="square">
+            <a:spAutoFit/>
+          </a:bodyPr>
+          <a:lstStyle/>
+          <a:p>
+            <a:r>
+              <a:rPr lang="ko-KR" altLang="en-US" dirty="0"/>
+              <a:t>④</a:t>
+            </a:r>
+          </a:p>
+        </p:txBody>
+      </p:sp>
+    </p:spTree>
+    <p:extLst>
+      <p:ext uri="{BB962C8B-B14F-4D97-AF65-F5344CB8AC3E}">
+        <p14:creationId xmlns:p14="http://schemas.microsoft.com/office/powerpoint/2010/main" val="2372134658"/>
+      </p:ext>
+    </p:extLst>
+  </p:cSld>
+  <p:clrMapOvr>
+    <a:masterClrMapping/>
+  </p:clrMapOvr>
+</p:sld>
+</file>
+
 <file path=ppt/theme/theme1.xml><?xml version="1.0" encoding="utf-8"?>
 <a:theme xmlns:a="http://schemas.openxmlformats.org/drawingml/2006/main" name="Office 테마">
   <a:themeElements>
